--- a/assets/template_que_estudiar.pptx
+++ b/assets/template_que_estudiar.pptx
@@ -1,52 +1,52 @@
 
 <file path=ppt/presentation.xml><?xml version="1.0" encoding="utf-8"?>
-<p:presentation xmlns:a="http://schemas.openxmlformats.org/drawingml/2006/main" xmlns:r="http://schemas.openxmlformats.org/officeDocument/2006/relationships" xmlns:mc="http://schemas.openxmlformats.org/markup-compatibility/2006" xmlns:mv="urn:schemas-microsoft-com:mac:vml" xmlns:p="http://schemas.openxmlformats.org/presentationml/2006/main" xmlns:c="http://schemas.openxmlformats.org/drawingml/2006/chart" xmlns:dgm="http://schemas.openxmlformats.org/drawingml/2006/diagram" xmlns:o="urn:schemas-microsoft-com:office:office" xmlns:v="urn:schemas-microsoft-com:vml" xmlns:pvml="urn:schemas-microsoft-com:office:powerpoint" xmlns:com="http://schemas.openxmlformats.org/drawingml/2006/compatibility" xmlns:p14="http://schemas.microsoft.com/office/powerpoint/2010/main" xmlns:p15="http://schemas.microsoft.com/office/powerpoint/2012/main" xmlns:ahyp="http://schemas.microsoft.com/office/drawing/2018/hyperlinkcolor" autoCompressPictures="0" embedTrueTypeFonts="1" strictFirstAndLastChars="0" saveSubsetFonts="1">
+<p:presentation xmlns:a="http://schemas.openxmlformats.org/drawingml/2006/main" xmlns:r="http://schemas.openxmlformats.org/officeDocument/2006/relationships" xmlns:p="http://schemas.openxmlformats.org/presentationml/2006/main" strictFirstAndLastChars="0" embedTrueTypeFonts="1" saveSubsetFonts="1" autoCompressPictures="0">
   <p:sldMasterIdLst>
-    <p:sldMasterId id="2147483659" r:id="rId4"/>
+    <p:sldMasterId id="2147483659" r:id="rId1"/>
   </p:sldMasterIdLst>
   <p:notesMasterIdLst>
-    <p:notesMasterId r:id="rId5"/>
+    <p:notesMasterId r:id="rId13"/>
   </p:notesMasterIdLst>
   <p:sldIdLst>
-    <p:sldId id="256" r:id="rId6"/>
-    <p:sldId id="257" r:id="rId7"/>
-    <p:sldId id="258" r:id="rId8"/>
-    <p:sldId id="259" r:id="rId9"/>
-    <p:sldId id="260" r:id="rId10"/>
-    <p:sldId id="261" r:id="rId11"/>
-    <p:sldId id="262" r:id="rId12"/>
-    <p:sldId id="263" r:id="rId13"/>
-    <p:sldId id="264" r:id="rId14"/>
-    <p:sldId id="265" r:id="rId15"/>
-    <p:sldId id="266" r:id="rId16"/>
+    <p:sldId id="256" r:id="rId2"/>
+    <p:sldId id="257" r:id="rId3"/>
+    <p:sldId id="258" r:id="rId4"/>
+    <p:sldId id="259" r:id="rId5"/>
+    <p:sldId id="260" r:id="rId6"/>
+    <p:sldId id="261" r:id="rId7"/>
+    <p:sldId id="262" r:id="rId8"/>
+    <p:sldId id="263" r:id="rId9"/>
+    <p:sldId id="264" r:id="rId10"/>
+    <p:sldId id="265" r:id="rId11"/>
+    <p:sldId id="266" r:id="rId12"/>
   </p:sldIdLst>
-  <p:sldSz cy="18288000" cx="10287000"/>
+  <p:sldSz cx="10287000" cy="18288000"/>
   <p:notesSz cx="6858000" cy="9144000"/>
   <p:embeddedFontLst>
     <p:embeddedFont>
-      <p:font typeface="Archivo Medium"/>
-      <p:regular r:id="rId17"/>
-      <p:bold r:id="rId18"/>
-      <p:italic r:id="rId19"/>
-      <p:boldItalic r:id="rId20"/>
+      <p:font typeface="Archivo" panose="020B0604020202020204" charset="0"/>
+      <p:regular r:id="rId14"/>
+      <p:bold r:id="rId15"/>
+      <p:italic r:id="rId16"/>
+      <p:boldItalic r:id="rId17"/>
     </p:embeddedFont>
     <p:embeddedFont>
-      <p:font typeface="Archivo"/>
-      <p:regular r:id="rId21"/>
-      <p:bold r:id="rId22"/>
-      <p:italic r:id="rId23"/>
-      <p:boldItalic r:id="rId24"/>
+      <p:font typeface="Archivo Medium" panose="020B0604020202020204" charset="0"/>
+      <p:regular r:id="rId18"/>
+      <p:bold r:id="rId19"/>
+      <p:italic r:id="rId20"/>
+      <p:boldItalic r:id="rId21"/>
     </p:embeddedFont>
     <p:embeddedFont>
-      <p:font typeface="Archivo SemiBold"/>
-      <p:regular r:id="rId25"/>
-      <p:bold r:id="rId26"/>
-      <p:italic r:id="rId27"/>
-      <p:boldItalic r:id="rId28"/>
+      <p:font typeface="Archivo SemiBold" panose="020B0604020202020204" charset="0"/>
+      <p:regular r:id="rId22"/>
+      <p:bold r:id="rId23"/>
+      <p:italic r:id="rId24"/>
+      <p:boldItalic r:id="rId25"/>
     </p:embeddedFont>
   </p:embeddedFontLst>
   <p:defaultTextStyle>
-    <a:defPPr lvl="0" marR="0" rtl="0" algn="l">
+    <a:defPPr marR="0" lvl="0" algn="l" rtl="0">
       <a:lnSpc>
         <a:spcPct val="100000"/>
       </a:lnSpc>
@@ -57,7 +57,7 @@
         <a:spcPts val="0"/>
       </a:spcAft>
     </a:defPPr>
-    <a:lvl1pPr lvl="0" marR="0" rtl="0" algn="l">
+    <a:lvl1pPr marR="0" lvl="0" algn="l" rtl="0">
       <a:lnSpc>
         <a:spcPct val="100000"/>
       </a:lnSpc>
@@ -71,7 +71,7 @@
         <a:srgbClr val="000000"/>
       </a:buClr>
       <a:buFont typeface="Arial"/>
-      <a:defRPr b="0" i="0" spc="0" sz="1400" u="none" cap="none" strike="noStrike">
+      <a:defRPr sz="1400" b="0" i="0" u="none" strike="noStrike" cap="none" spc="0">
         <a:solidFill>
           <a:srgbClr val="000000"/>
         </a:solidFill>
@@ -81,7 +81,7 @@
         <a:sym typeface="Arial"/>
       </a:defRPr>
     </a:lvl1pPr>
-    <a:lvl2pPr lvl="1" marR="0" rtl="0" algn="l">
+    <a:lvl2pPr marR="0" lvl="1" algn="l" rtl="0">
       <a:lnSpc>
         <a:spcPct val="100000"/>
       </a:lnSpc>
@@ -95,7 +95,7 @@
         <a:srgbClr val="000000"/>
       </a:buClr>
       <a:buFont typeface="Arial"/>
-      <a:defRPr b="0" i="0" spc="0" sz="1400" u="none" cap="none" strike="noStrike">
+      <a:defRPr sz="1400" b="0" i="0" u="none" strike="noStrike" cap="none" spc="0">
         <a:solidFill>
           <a:srgbClr val="000000"/>
         </a:solidFill>
@@ -105,7 +105,7 @@
         <a:sym typeface="Arial"/>
       </a:defRPr>
     </a:lvl2pPr>
-    <a:lvl3pPr lvl="2" marR="0" rtl="0" algn="l">
+    <a:lvl3pPr marR="0" lvl="2" algn="l" rtl="0">
       <a:lnSpc>
         <a:spcPct val="100000"/>
       </a:lnSpc>
@@ -119,7 +119,7 @@
         <a:srgbClr val="000000"/>
       </a:buClr>
       <a:buFont typeface="Arial"/>
-      <a:defRPr b="0" i="0" spc="0" sz="1400" u="none" cap="none" strike="noStrike">
+      <a:defRPr sz="1400" b="0" i="0" u="none" strike="noStrike" cap="none" spc="0">
         <a:solidFill>
           <a:srgbClr val="000000"/>
         </a:solidFill>
@@ -129,7 +129,7 @@
         <a:sym typeface="Arial"/>
       </a:defRPr>
     </a:lvl3pPr>
-    <a:lvl4pPr lvl="3" marR="0" rtl="0" algn="l">
+    <a:lvl4pPr marR="0" lvl="3" algn="l" rtl="0">
       <a:lnSpc>
         <a:spcPct val="100000"/>
       </a:lnSpc>
@@ -143,7 +143,7 @@
         <a:srgbClr val="000000"/>
       </a:buClr>
       <a:buFont typeface="Arial"/>
-      <a:defRPr b="0" i="0" spc="0" sz="1400" u="none" cap="none" strike="noStrike">
+      <a:defRPr sz="1400" b="0" i="0" u="none" strike="noStrike" cap="none" spc="0">
         <a:solidFill>
           <a:srgbClr val="000000"/>
         </a:solidFill>
@@ -153,7 +153,7 @@
         <a:sym typeface="Arial"/>
       </a:defRPr>
     </a:lvl4pPr>
-    <a:lvl5pPr lvl="4" marR="0" rtl="0" algn="l">
+    <a:lvl5pPr marR="0" lvl="4" algn="l" rtl="0">
       <a:lnSpc>
         <a:spcPct val="100000"/>
       </a:lnSpc>
@@ -167,7 +167,7 @@
         <a:srgbClr val="000000"/>
       </a:buClr>
       <a:buFont typeface="Arial"/>
-      <a:defRPr b="0" i="0" spc="0" sz="1400" u="none" cap="none" strike="noStrike">
+      <a:defRPr sz="1400" b="0" i="0" u="none" strike="noStrike" cap="none" spc="0">
         <a:solidFill>
           <a:srgbClr val="000000"/>
         </a:solidFill>
@@ -177,7 +177,7 @@
         <a:sym typeface="Arial"/>
       </a:defRPr>
     </a:lvl5pPr>
-    <a:lvl6pPr lvl="5" marR="0" rtl="0" algn="l">
+    <a:lvl6pPr marR="0" lvl="5" algn="l" rtl="0">
       <a:lnSpc>
         <a:spcPct val="100000"/>
       </a:lnSpc>
@@ -191,7 +191,7 @@
         <a:srgbClr val="000000"/>
       </a:buClr>
       <a:buFont typeface="Arial"/>
-      <a:defRPr b="0" i="0" spc="0" sz="1400" u="none" cap="none" strike="noStrike">
+      <a:defRPr sz="1400" b="0" i="0" u="none" strike="noStrike" cap="none" spc="0">
         <a:solidFill>
           <a:srgbClr val="000000"/>
         </a:solidFill>
@@ -201,7 +201,7 @@
         <a:sym typeface="Arial"/>
       </a:defRPr>
     </a:lvl6pPr>
-    <a:lvl7pPr lvl="6" marR="0" rtl="0" algn="l">
+    <a:lvl7pPr marR="0" lvl="6" algn="l" rtl="0">
       <a:lnSpc>
         <a:spcPct val="100000"/>
       </a:lnSpc>
@@ -215,7 +215,7 @@
         <a:srgbClr val="000000"/>
       </a:buClr>
       <a:buFont typeface="Arial"/>
-      <a:defRPr b="0" i="0" spc="0" sz="1400" u="none" cap="none" strike="noStrike">
+      <a:defRPr sz="1400" b="0" i="0" u="none" strike="noStrike" cap="none" spc="0">
         <a:solidFill>
           <a:srgbClr val="000000"/>
         </a:solidFill>
@@ -225,7 +225,7 @@
         <a:sym typeface="Arial"/>
       </a:defRPr>
     </a:lvl7pPr>
-    <a:lvl8pPr lvl="7" marR="0" rtl="0" algn="l">
+    <a:lvl8pPr marR="0" lvl="7" algn="l" rtl="0">
       <a:lnSpc>
         <a:spcPct val="100000"/>
       </a:lnSpc>
@@ -239,7 +239,7 @@
         <a:srgbClr val="000000"/>
       </a:buClr>
       <a:buFont typeface="Arial"/>
-      <a:defRPr b="0" i="0" spc="0" sz="1400" u="none" cap="none" strike="noStrike">
+      <a:defRPr sz="1400" b="0" i="0" u="none" strike="noStrike" cap="none" spc="0">
         <a:solidFill>
           <a:srgbClr val="000000"/>
         </a:solidFill>
@@ -249,7 +249,7 @@
         <a:sym typeface="Arial"/>
       </a:defRPr>
     </a:lvl8pPr>
-    <a:lvl9pPr lvl="8" marR="0" rtl="0" algn="l">
+    <a:lvl9pPr marR="0" lvl="8" algn="l" rtl="0">
       <a:lnSpc>
         <a:spcPct val="100000"/>
       </a:lnSpc>
@@ -263,7 +263,7 @@
         <a:srgbClr val="000000"/>
       </a:buClr>
       <a:buFont typeface="Arial"/>
-      <a:defRPr b="0" i="0" spc="0" sz="1400" u="none" cap="none" strike="noStrike">
+      <a:defRPr sz="1400" b="0" i="0" u="none" strike="noStrike" cap="none" spc="0">
         <a:solidFill>
           <a:srgbClr val="000000"/>
         </a:solidFill>
@@ -276,7 +276,7 @@
   </p:defaultTextStyle>
   <p:extLst>
     <p:ext uri="{EFAFB233-063F-42B5-8137-9DF3F51BA10A}">
-      <p15:sldGuideLst>
+      <p15:sldGuideLst xmlns:p15="http://schemas.microsoft.com/office/powerpoint/2012/main">
         <p15:guide id="1" orient="horz" pos="5760">
           <p15:clr>
             <a:srgbClr val="747775"/>
@@ -294,11 +294,16 @@
 </file>
 
 <file path=ppt/notesMasters/notesMaster1.xml><?xml version="1.0" encoding="utf-8"?>
-<p:notesMaster xmlns:a="http://schemas.openxmlformats.org/drawingml/2006/main" xmlns:r="http://schemas.openxmlformats.org/officeDocument/2006/relationships" xmlns:mc="http://schemas.openxmlformats.org/markup-compatibility/2006" xmlns:mv="urn:schemas-microsoft-com:mac:vml" xmlns:p="http://schemas.openxmlformats.org/presentationml/2006/main" xmlns:c="http://schemas.openxmlformats.org/drawingml/2006/chart" xmlns:dgm="http://schemas.openxmlformats.org/drawingml/2006/diagram" xmlns:o="urn:schemas-microsoft-com:office:office" xmlns:v="urn:schemas-microsoft-com:vml" xmlns:pvml="urn:schemas-microsoft-com:office:powerpoint" xmlns:com="http://schemas.openxmlformats.org/drawingml/2006/compatibility" xmlns:p14="http://schemas.microsoft.com/office/powerpoint/2010/main" xmlns:p15="http://schemas.microsoft.com/office/powerpoint/2012/main" xmlns:ahyp="http://schemas.microsoft.com/office/drawing/2018/hyperlinkcolor">
+<p:notesMaster xmlns:a="http://schemas.openxmlformats.org/drawingml/2006/main" xmlns:r="http://schemas.openxmlformats.org/officeDocument/2006/relationships" xmlns:p="http://schemas.openxmlformats.org/presentationml/2006/main">
   <p:cSld>
+    <p:bg>
+      <p:bgRef idx="1001">
+        <a:schemeClr val="bg1"/>
+      </p:bgRef>
+    </p:bg>
     <p:spTree>
       <p:nvGrpSpPr>
-        <p:cNvPr id="2" name="Shape 2"/>
+        <p:cNvPr id="1" name="Shape 2"/>
         <p:cNvGrpSpPr/>
         <p:nvPr/>
       </p:nvGrpSpPr>
@@ -313,9 +318,11 @@
       <p:sp>
         <p:nvSpPr>
           <p:cNvPr id="3" name="Google Shape;3;n"/>
-          <p:cNvSpPr/>
+          <p:cNvSpPr>
+            <a:spLocks noGrp="1" noRot="1" noChangeAspect="1"/>
+          </p:cNvSpPr>
           <p:nvPr>
-            <p:ph idx="2" type="sldImg"/>
+            <p:ph type="sldImg" idx="2"/>
           </p:nvPr>
         </p:nvSpPr>
         <p:spPr>
@@ -324,9 +331,13 @@
             <a:ext cx="1928700" cy="3429000"/>
           </a:xfrm>
           <a:custGeom>
-            <a:rect b="b" l="l" r="r" t="t"/>
+            <a:avLst/>
+            <a:gdLst/>
+            <a:ahLst/>
+            <a:cxnLst/>
+            <a:rect l="l" t="t" r="r" b="b"/>
             <a:pathLst>
-              <a:path extrusionOk="0" h="120000" w="120000">
+              <a:path w="120000" h="120000" extrusionOk="0">
                 <a:moveTo>
                   <a:pt x="0" y="0"/>
                 </a:moveTo>
@@ -344,23 +355,25 @@
             </a:pathLst>
           </a:custGeom>
           <a:noFill/>
-          <a:ln cap="flat" cmpd="sng" w="9525">
+          <a:ln w="9525" cap="flat" cmpd="sng">
             <a:solidFill>
               <a:srgbClr val="000000"/>
             </a:solidFill>
             <a:prstDash val="solid"/>
             <a:round/>
-            <a:headEnd len="sm" w="sm" type="none"/>
-            <a:tailEnd len="sm" w="sm" type="none"/>
+            <a:headEnd type="none" w="sm" len="sm"/>
+            <a:tailEnd type="none" w="sm" len="sm"/>
           </a:ln>
         </p:spPr>
       </p:sp>
       <p:sp>
         <p:nvSpPr>
           <p:cNvPr id="4" name="Google Shape;4;n"/>
-          <p:cNvSpPr txBox="1"/>
+          <p:cNvSpPr txBox="1">
+            <a:spLocks noGrp="1"/>
+          </p:cNvSpPr>
           <p:nvPr>
-            <p:ph idx="1" type="body"/>
+            <p:ph type="body" idx="1"/>
           </p:nvPr>
         </p:nvSpPr>
         <p:spPr>
@@ -377,11 +390,11 @@
           </a:ln>
         </p:spPr>
         <p:txBody>
-          <a:bodyPr anchorCtr="0" anchor="t" bIns="91425" lIns="91425" spcFirstLastPara="1" rIns="91425" wrap="square" tIns="91425">
+          <a:bodyPr spcFirstLastPara="1" wrap="square" lIns="91425" tIns="91425" rIns="91425" bIns="91425" anchor="t" anchorCtr="0">
             <a:noAutofit/>
           </a:bodyPr>
           <a:lstStyle>
-            <a:lvl1pPr indent="-298450" lvl="0" marL="457200">
+            <a:lvl1pPr marL="457200" lvl="0" indent="-298450">
               <a:spcBef>
                 <a:spcPts val="0"/>
               </a:spcBef>
@@ -392,7 +405,7 @@
               <a:buChar char="●"/>
               <a:defRPr sz="1100"/>
             </a:lvl1pPr>
-            <a:lvl2pPr indent="-298450" lvl="1" marL="914400">
+            <a:lvl2pPr marL="914400" lvl="1" indent="-298450">
               <a:spcBef>
                 <a:spcPts val="0"/>
               </a:spcBef>
@@ -403,7 +416,7 @@
               <a:buChar char="○"/>
               <a:defRPr sz="1100"/>
             </a:lvl2pPr>
-            <a:lvl3pPr indent="-298450" lvl="2" marL="1371600">
+            <a:lvl3pPr marL="1371600" lvl="2" indent="-298450">
               <a:spcBef>
                 <a:spcPts val="0"/>
               </a:spcBef>
@@ -414,7 +427,7 @@
               <a:buChar char="■"/>
               <a:defRPr sz="1100"/>
             </a:lvl3pPr>
-            <a:lvl4pPr indent="-298450" lvl="3" marL="1828800">
+            <a:lvl4pPr marL="1828800" lvl="3" indent="-298450">
               <a:spcBef>
                 <a:spcPts val="0"/>
               </a:spcBef>
@@ -425,7 +438,7 @@
               <a:buChar char="●"/>
               <a:defRPr sz="1100"/>
             </a:lvl4pPr>
-            <a:lvl5pPr indent="-298450" lvl="4" marL="2286000">
+            <a:lvl5pPr marL="2286000" lvl="4" indent="-298450">
               <a:spcBef>
                 <a:spcPts val="0"/>
               </a:spcBef>
@@ -436,7 +449,7 @@
               <a:buChar char="○"/>
               <a:defRPr sz="1100"/>
             </a:lvl5pPr>
-            <a:lvl6pPr indent="-298450" lvl="5" marL="2743200">
+            <a:lvl6pPr marL="2743200" lvl="5" indent="-298450">
               <a:spcBef>
                 <a:spcPts val="0"/>
               </a:spcBef>
@@ -447,7 +460,7 @@
               <a:buChar char="■"/>
               <a:defRPr sz="1100"/>
             </a:lvl6pPr>
-            <a:lvl7pPr indent="-298450" lvl="6" marL="3200400">
+            <a:lvl7pPr marL="3200400" lvl="6" indent="-298450">
               <a:spcBef>
                 <a:spcPts val="0"/>
               </a:spcBef>
@@ -458,7 +471,7 @@
               <a:buChar char="●"/>
               <a:defRPr sz="1100"/>
             </a:lvl7pPr>
-            <a:lvl8pPr indent="-298450" lvl="7" marL="3657600">
+            <a:lvl8pPr marL="3657600" lvl="7" indent="-298450">
               <a:spcBef>
                 <a:spcPts val="0"/>
               </a:spcBef>
@@ -469,7 +482,7 @@
               <a:buChar char="○"/>
               <a:defRPr sz="1100"/>
             </a:lvl8pPr>
-            <a:lvl9pPr indent="-298450" lvl="8" marL="4114800">
+            <a:lvl9pPr marL="4114800" lvl="8" indent="-298450">
               <a:spcBef>
                 <a:spcPts val="0"/>
               </a:spcBef>
@@ -481,14 +494,16 @@
               <a:defRPr sz="1100"/>
             </a:lvl9pPr>
           </a:lstStyle>
-          <a:p/>
+          <a:p>
+            <a:endParaRPr/>
+          </a:p>
         </p:txBody>
       </p:sp>
     </p:spTree>
   </p:cSld>
-  <p:clrMap accent1="accent1" accent2="accent2" accent3="accent3" accent4="accent4" accent5="accent5" accent6="accent6" bg1="lt1" bg2="dk2" tx1="dk1" tx2="lt2" folHlink="folHlink" hlink="hlink"/>
+  <p:clrMap bg1="lt1" tx1="dk1" bg2="dk2" tx2="lt2" accent1="accent1" accent2="accent2" accent3="accent3" accent4="accent4" accent5="accent5" accent6="accent6" hlink="hlink" folHlink="folHlink"/>
   <p:notesStyle>
-    <a:defPPr lvl="0" marR="0" rtl="0" algn="l">
+    <a:defPPr marR="0" lvl="0" algn="l" rtl="0">
       <a:lnSpc>
         <a:spcPct val="100000"/>
       </a:lnSpc>
@@ -499,7 +514,7 @@
         <a:spcPts val="0"/>
       </a:spcAft>
     </a:defPPr>
-    <a:lvl1pPr lvl="0" marR="0" rtl="0" algn="l">
+    <a:lvl1pPr marR="0" lvl="0" algn="l" rtl="0">
       <a:lnSpc>
         <a:spcPct val="100000"/>
       </a:lnSpc>
@@ -513,7 +528,7 @@
         <a:srgbClr val="000000"/>
       </a:buClr>
       <a:buFont typeface="Arial"/>
-      <a:defRPr b="0" i="0" spc="0" sz="1400" u="none" cap="none" strike="noStrike">
+      <a:defRPr sz="1400" b="0" i="0" u="none" strike="noStrike" cap="none" spc="0">
         <a:solidFill>
           <a:srgbClr val="000000"/>
         </a:solidFill>
@@ -523,7 +538,7 @@
         <a:sym typeface="Arial"/>
       </a:defRPr>
     </a:lvl1pPr>
-    <a:lvl2pPr lvl="1" marR="0" rtl="0" algn="l">
+    <a:lvl2pPr marR="0" lvl="1" algn="l" rtl="0">
       <a:lnSpc>
         <a:spcPct val="100000"/>
       </a:lnSpc>
@@ -537,7 +552,7 @@
         <a:srgbClr val="000000"/>
       </a:buClr>
       <a:buFont typeface="Arial"/>
-      <a:defRPr b="0" i="0" spc="0" sz="1400" u="none" cap="none" strike="noStrike">
+      <a:defRPr sz="1400" b="0" i="0" u="none" strike="noStrike" cap="none" spc="0">
         <a:solidFill>
           <a:srgbClr val="000000"/>
         </a:solidFill>
@@ -547,7 +562,7 @@
         <a:sym typeface="Arial"/>
       </a:defRPr>
     </a:lvl2pPr>
-    <a:lvl3pPr lvl="2" marR="0" rtl="0" algn="l">
+    <a:lvl3pPr marR="0" lvl="2" algn="l" rtl="0">
       <a:lnSpc>
         <a:spcPct val="100000"/>
       </a:lnSpc>
@@ -561,7 +576,7 @@
         <a:srgbClr val="000000"/>
       </a:buClr>
       <a:buFont typeface="Arial"/>
-      <a:defRPr b="0" i="0" spc="0" sz="1400" u="none" cap="none" strike="noStrike">
+      <a:defRPr sz="1400" b="0" i="0" u="none" strike="noStrike" cap="none" spc="0">
         <a:solidFill>
           <a:srgbClr val="000000"/>
         </a:solidFill>
@@ -571,7 +586,7 @@
         <a:sym typeface="Arial"/>
       </a:defRPr>
     </a:lvl3pPr>
-    <a:lvl4pPr lvl="3" marR="0" rtl="0" algn="l">
+    <a:lvl4pPr marR="0" lvl="3" algn="l" rtl="0">
       <a:lnSpc>
         <a:spcPct val="100000"/>
       </a:lnSpc>
@@ -585,7 +600,7 @@
         <a:srgbClr val="000000"/>
       </a:buClr>
       <a:buFont typeface="Arial"/>
-      <a:defRPr b="0" i="0" spc="0" sz="1400" u="none" cap="none" strike="noStrike">
+      <a:defRPr sz="1400" b="0" i="0" u="none" strike="noStrike" cap="none" spc="0">
         <a:solidFill>
           <a:srgbClr val="000000"/>
         </a:solidFill>
@@ -595,7 +610,7 @@
         <a:sym typeface="Arial"/>
       </a:defRPr>
     </a:lvl4pPr>
-    <a:lvl5pPr lvl="4" marR="0" rtl="0" algn="l">
+    <a:lvl5pPr marR="0" lvl="4" algn="l" rtl="0">
       <a:lnSpc>
         <a:spcPct val="100000"/>
       </a:lnSpc>
@@ -609,7 +624,7 @@
         <a:srgbClr val="000000"/>
       </a:buClr>
       <a:buFont typeface="Arial"/>
-      <a:defRPr b="0" i="0" spc="0" sz="1400" u="none" cap="none" strike="noStrike">
+      <a:defRPr sz="1400" b="0" i="0" u="none" strike="noStrike" cap="none" spc="0">
         <a:solidFill>
           <a:srgbClr val="000000"/>
         </a:solidFill>
@@ -619,7 +634,7 @@
         <a:sym typeface="Arial"/>
       </a:defRPr>
     </a:lvl5pPr>
-    <a:lvl6pPr lvl="5" marR="0" rtl="0" algn="l">
+    <a:lvl6pPr marR="0" lvl="5" algn="l" rtl="0">
       <a:lnSpc>
         <a:spcPct val="100000"/>
       </a:lnSpc>
@@ -633,7 +648,7 @@
         <a:srgbClr val="000000"/>
       </a:buClr>
       <a:buFont typeface="Arial"/>
-      <a:defRPr b="0" i="0" spc="0" sz="1400" u="none" cap="none" strike="noStrike">
+      <a:defRPr sz="1400" b="0" i="0" u="none" strike="noStrike" cap="none" spc="0">
         <a:solidFill>
           <a:srgbClr val="000000"/>
         </a:solidFill>
@@ -643,7 +658,7 @@
         <a:sym typeface="Arial"/>
       </a:defRPr>
     </a:lvl6pPr>
-    <a:lvl7pPr lvl="6" marR="0" rtl="0" algn="l">
+    <a:lvl7pPr marR="0" lvl="6" algn="l" rtl="0">
       <a:lnSpc>
         <a:spcPct val="100000"/>
       </a:lnSpc>
@@ -657,7 +672,7 @@
         <a:srgbClr val="000000"/>
       </a:buClr>
       <a:buFont typeface="Arial"/>
-      <a:defRPr b="0" i="0" spc="0" sz="1400" u="none" cap="none" strike="noStrike">
+      <a:defRPr sz="1400" b="0" i="0" u="none" strike="noStrike" cap="none" spc="0">
         <a:solidFill>
           <a:srgbClr val="000000"/>
         </a:solidFill>
@@ -667,7 +682,7 @@
         <a:sym typeface="Arial"/>
       </a:defRPr>
     </a:lvl7pPr>
-    <a:lvl8pPr lvl="7" marR="0" rtl="0" algn="l">
+    <a:lvl8pPr marR="0" lvl="7" algn="l" rtl="0">
       <a:lnSpc>
         <a:spcPct val="100000"/>
       </a:lnSpc>
@@ -681,7 +696,7 @@
         <a:srgbClr val="000000"/>
       </a:buClr>
       <a:buFont typeface="Arial"/>
-      <a:defRPr b="0" i="0" spc="0" sz="1400" u="none" cap="none" strike="noStrike">
+      <a:defRPr sz="1400" b="0" i="0" u="none" strike="noStrike" cap="none" spc="0">
         <a:solidFill>
           <a:srgbClr val="000000"/>
         </a:solidFill>
@@ -691,7 +706,7 @@
         <a:sym typeface="Arial"/>
       </a:defRPr>
     </a:lvl8pPr>
-    <a:lvl9pPr lvl="8" marR="0" rtl="0" algn="l">
+    <a:lvl9pPr marR="0" lvl="8" algn="l" rtl="0">
       <a:lnSpc>
         <a:spcPct val="100000"/>
       </a:lnSpc>
@@ -705,7 +720,7 @@
         <a:srgbClr val="000000"/>
       </a:buClr>
       <a:buFont typeface="Arial"/>
-      <a:defRPr b="0" i="0" spc="0" sz="1400" u="none" cap="none" strike="noStrike">
+      <a:defRPr sz="1400" b="0" i="0" u="none" strike="noStrike" cap="none" spc="0">
         <a:solidFill>
           <a:srgbClr val="000000"/>
         </a:solidFill>
@@ -720,11 +735,11 @@
 </file>
 
 <file path=ppt/notesSlides/notesSlide1.xml><?xml version="1.0" encoding="utf-8"?>
-<p:notes xmlns:a="http://schemas.openxmlformats.org/drawingml/2006/main" xmlns:r="http://schemas.openxmlformats.org/officeDocument/2006/relationships" xmlns:mc="http://schemas.openxmlformats.org/markup-compatibility/2006" xmlns:mv="urn:schemas-microsoft-com:mac:vml" xmlns:p="http://schemas.openxmlformats.org/presentationml/2006/main" xmlns:c="http://schemas.openxmlformats.org/drawingml/2006/chart" xmlns:dgm="http://schemas.openxmlformats.org/drawingml/2006/diagram" xmlns:o="urn:schemas-microsoft-com:office:office" xmlns:v="urn:schemas-microsoft-com:vml" xmlns:pvml="urn:schemas-microsoft-com:office:powerpoint" xmlns:com="http://schemas.openxmlformats.org/drawingml/2006/compatibility" xmlns:p14="http://schemas.microsoft.com/office/powerpoint/2010/main" xmlns:p15="http://schemas.microsoft.com/office/powerpoint/2012/main" xmlns:ahyp="http://schemas.microsoft.com/office/drawing/2018/hyperlinkcolor" showMasterPhAnim="0" showMasterSp="0">
+<p:notes xmlns:a="http://schemas.openxmlformats.org/drawingml/2006/main" xmlns:r="http://schemas.openxmlformats.org/officeDocument/2006/relationships" xmlns:p="http://schemas.openxmlformats.org/presentationml/2006/main" showMasterSp="0" showMasterPhAnim="0">
   <p:cSld>
     <p:spTree>
       <p:nvGrpSpPr>
-        <p:cNvPr id="50" name="Shape 50"/>
+        <p:cNvPr id="1" name="Shape 50"/>
         <p:cNvGrpSpPr/>
         <p:nvPr/>
       </p:nvGrpSpPr>
@@ -739,9 +754,11 @@
       <p:sp>
         <p:nvSpPr>
           <p:cNvPr id="51" name="Google Shape;51;p:notes"/>
-          <p:cNvSpPr/>
+          <p:cNvSpPr>
+            <a:spLocks noGrp="1" noRot="1" noChangeAspect="1"/>
+          </p:cNvSpPr>
           <p:nvPr>
-            <p:ph idx="2" type="sldImg"/>
+            <p:ph type="sldImg" idx="2"/>
           </p:nvPr>
         </p:nvSpPr>
         <p:spPr>
@@ -750,9 +767,13 @@
             <a:ext cx="1928700" cy="3429000"/>
           </a:xfrm>
           <a:custGeom>
-            <a:rect b="b" l="l" r="r" t="t"/>
+            <a:avLst/>
+            <a:gdLst/>
+            <a:ahLst/>
+            <a:cxnLst/>
+            <a:rect l="l" t="t" r="r" b="b"/>
             <a:pathLst>
-              <a:path extrusionOk="0" h="120000" w="120000">
+              <a:path w="120000" h="120000" extrusionOk="0">
                 <a:moveTo>
                   <a:pt x="0" y="0"/>
                 </a:moveTo>
@@ -774,9 +795,11 @@
       <p:sp>
         <p:nvSpPr>
           <p:cNvPr id="52" name="Google Shape;52;p:notes"/>
-          <p:cNvSpPr txBox="1"/>
+          <p:cNvSpPr txBox="1">
+            <a:spLocks noGrp="1"/>
+          </p:cNvSpPr>
           <p:nvPr>
-            <p:ph idx="1" type="body"/>
+            <p:ph type="body" idx="1"/>
           </p:nvPr>
         </p:nvSpPr>
         <p:spPr>
@@ -789,12 +812,12 @@
           </a:prstGeom>
         </p:spPr>
         <p:txBody>
-          <a:bodyPr anchorCtr="0" anchor="t" bIns="91425" lIns="91425" spcFirstLastPara="1" rIns="91425" wrap="square" tIns="91425">
+          <a:bodyPr spcFirstLastPara="1" wrap="square" lIns="91425" tIns="91425" rIns="91425" bIns="91425" anchor="t" anchorCtr="0">
             <a:noAutofit/>
           </a:bodyPr>
           <a:lstStyle/>
           <a:p>
-            <a:pPr indent="0" lvl="0" marL="0" rtl="0" algn="l">
+            <a:pPr marL="0" lvl="0" indent="0" algn="l" rtl="0">
               <a:spcBef>
                 <a:spcPts val="0"/>
               </a:spcBef>
@@ -803,9 +826,6 @@
               </a:spcAft>
               <a:buNone/>
             </a:pPr>
-            <a:r>
-              <a:t/>
-            </a:r>
             <a:endParaRPr/>
           </a:p>
         </p:txBody>
@@ -819,11 +839,11 @@
 </file>
 
 <file path=ppt/notesSlides/notesSlide10.xml><?xml version="1.0" encoding="utf-8"?>
-<p:notes xmlns:a="http://schemas.openxmlformats.org/drawingml/2006/main" xmlns:r="http://schemas.openxmlformats.org/officeDocument/2006/relationships" xmlns:mc="http://schemas.openxmlformats.org/markup-compatibility/2006" xmlns:mv="urn:schemas-microsoft-com:mac:vml" xmlns:p="http://schemas.openxmlformats.org/presentationml/2006/main" xmlns:c="http://schemas.openxmlformats.org/drawingml/2006/chart" xmlns:dgm="http://schemas.openxmlformats.org/drawingml/2006/diagram" xmlns:o="urn:schemas-microsoft-com:office:office" xmlns:v="urn:schemas-microsoft-com:vml" xmlns:pvml="urn:schemas-microsoft-com:office:powerpoint" xmlns:com="http://schemas.openxmlformats.org/drawingml/2006/compatibility" xmlns:p14="http://schemas.microsoft.com/office/powerpoint/2010/main" xmlns:p15="http://schemas.microsoft.com/office/powerpoint/2012/main" xmlns:ahyp="http://schemas.microsoft.com/office/drawing/2018/hyperlinkcolor" showMasterPhAnim="0" showMasterSp="0">
+<p:notes xmlns:a="http://schemas.openxmlformats.org/drawingml/2006/main" xmlns:r="http://schemas.openxmlformats.org/officeDocument/2006/relationships" xmlns:p="http://schemas.openxmlformats.org/presentationml/2006/main" showMasterSp="0" showMasterPhAnim="0">
   <p:cSld>
     <p:spTree>
       <p:nvGrpSpPr>
-        <p:cNvPr id="105" name="Shape 105"/>
+        <p:cNvPr id="1" name="Shape 105"/>
         <p:cNvGrpSpPr/>
         <p:nvPr/>
       </p:nvGrpSpPr>
@@ -838,20 +858,26 @@
       <p:sp>
         <p:nvSpPr>
           <p:cNvPr id="106" name="Google Shape;106;g2d78cae0a27_0_24:notes"/>
-          <p:cNvSpPr/>
+          <p:cNvSpPr>
+            <a:spLocks noGrp="1" noRot="1" noChangeAspect="1"/>
+          </p:cNvSpPr>
           <p:nvPr>
-            <p:ph idx="2" type="sldImg"/>
+            <p:ph type="sldImg" idx="2"/>
           </p:nvPr>
         </p:nvSpPr>
         <p:spPr>
           <a:xfrm>
-            <a:off x="2464919" y="685800"/>
-            <a:ext cx="1928700" cy="3429000"/>
+            <a:off x="2465388" y="685800"/>
+            <a:ext cx="1928812" cy="3429000"/>
           </a:xfrm>
           <a:custGeom>
-            <a:rect b="b" l="l" r="r" t="t"/>
+            <a:avLst/>
+            <a:gdLst/>
+            <a:ahLst/>
+            <a:cxnLst/>
+            <a:rect l="l" t="t" r="r" b="b"/>
             <a:pathLst>
-              <a:path extrusionOk="0" h="120000" w="120000">
+              <a:path w="120000" h="120000" extrusionOk="0">
                 <a:moveTo>
                   <a:pt x="0" y="0"/>
                 </a:moveTo>
@@ -873,9 +899,11 @@
       <p:sp>
         <p:nvSpPr>
           <p:cNvPr id="107" name="Google Shape;107;g2d78cae0a27_0_24:notes"/>
-          <p:cNvSpPr txBox="1"/>
+          <p:cNvSpPr txBox="1">
+            <a:spLocks noGrp="1"/>
+          </p:cNvSpPr>
           <p:nvPr>
-            <p:ph idx="1" type="body"/>
+            <p:ph type="body" idx="1"/>
           </p:nvPr>
         </p:nvSpPr>
         <p:spPr>
@@ -888,12 +916,12 @@
           </a:prstGeom>
         </p:spPr>
         <p:txBody>
-          <a:bodyPr anchorCtr="0" anchor="t" bIns="91425" lIns="91425" spcFirstLastPara="1" rIns="91425" wrap="square" tIns="91425">
+          <a:bodyPr spcFirstLastPara="1" wrap="square" lIns="91425" tIns="91425" rIns="91425" bIns="91425" anchor="t" anchorCtr="0">
             <a:noAutofit/>
           </a:bodyPr>
           <a:lstStyle/>
           <a:p>
-            <a:pPr indent="0" lvl="0" marL="0" rtl="0" algn="l">
+            <a:pPr marL="0" lvl="0" indent="0" algn="l" rtl="0">
               <a:spcBef>
                 <a:spcPts val="0"/>
               </a:spcBef>
@@ -902,9 +930,6 @@
               </a:spcAft>
               <a:buNone/>
             </a:pPr>
-            <a:r>
-              <a:t/>
-            </a:r>
             <a:endParaRPr/>
           </a:p>
         </p:txBody>
@@ -918,11 +943,11 @@
 </file>
 
 <file path=ppt/notesSlides/notesSlide11.xml><?xml version="1.0" encoding="utf-8"?>
-<p:notes xmlns:a="http://schemas.openxmlformats.org/drawingml/2006/main" xmlns:r="http://schemas.openxmlformats.org/officeDocument/2006/relationships" xmlns:mc="http://schemas.openxmlformats.org/markup-compatibility/2006" xmlns:mv="urn:schemas-microsoft-com:mac:vml" xmlns:p="http://schemas.openxmlformats.org/presentationml/2006/main" xmlns:c="http://schemas.openxmlformats.org/drawingml/2006/chart" xmlns:dgm="http://schemas.openxmlformats.org/drawingml/2006/diagram" xmlns:o="urn:schemas-microsoft-com:office:office" xmlns:v="urn:schemas-microsoft-com:vml" xmlns:pvml="urn:schemas-microsoft-com:office:powerpoint" xmlns:com="http://schemas.openxmlformats.org/drawingml/2006/compatibility" xmlns:p14="http://schemas.microsoft.com/office/powerpoint/2010/main" xmlns:p15="http://schemas.microsoft.com/office/powerpoint/2012/main" xmlns:ahyp="http://schemas.microsoft.com/office/drawing/2018/hyperlinkcolor" showMasterPhAnim="0" showMasterSp="0">
+<p:notes xmlns:a="http://schemas.openxmlformats.org/drawingml/2006/main" xmlns:r="http://schemas.openxmlformats.org/officeDocument/2006/relationships" xmlns:p="http://schemas.openxmlformats.org/presentationml/2006/main" showMasterSp="0" showMasterPhAnim="0">
   <p:cSld>
     <p:spTree>
       <p:nvGrpSpPr>
-        <p:cNvPr id="113" name="Shape 113"/>
+        <p:cNvPr id="1" name="Shape 113"/>
         <p:cNvGrpSpPr/>
         <p:nvPr/>
       </p:nvGrpSpPr>
@@ -937,9 +962,11 @@
       <p:sp>
         <p:nvSpPr>
           <p:cNvPr id="114" name="Google Shape;114;g2d78cae0a27_0_27:notes"/>
-          <p:cNvSpPr/>
+          <p:cNvSpPr>
+            <a:spLocks noGrp="1" noRot="1" noChangeAspect="1"/>
+          </p:cNvSpPr>
           <p:nvPr>
-            <p:ph idx="2" type="sldImg"/>
+            <p:ph type="sldImg" idx="2"/>
           </p:nvPr>
         </p:nvSpPr>
         <p:spPr>
@@ -948,9 +975,13 @@
             <a:ext cx="1928700" cy="3429000"/>
           </a:xfrm>
           <a:custGeom>
-            <a:rect b="b" l="l" r="r" t="t"/>
+            <a:avLst/>
+            <a:gdLst/>
+            <a:ahLst/>
+            <a:cxnLst/>
+            <a:rect l="l" t="t" r="r" b="b"/>
             <a:pathLst>
-              <a:path extrusionOk="0" h="120000" w="120000">
+              <a:path w="120000" h="120000" extrusionOk="0">
                 <a:moveTo>
                   <a:pt x="0" y="0"/>
                 </a:moveTo>
@@ -972,9 +1003,11 @@
       <p:sp>
         <p:nvSpPr>
           <p:cNvPr id="115" name="Google Shape;115;g2d78cae0a27_0_27:notes"/>
-          <p:cNvSpPr txBox="1"/>
+          <p:cNvSpPr txBox="1">
+            <a:spLocks noGrp="1"/>
+          </p:cNvSpPr>
           <p:nvPr>
-            <p:ph idx="1" type="body"/>
+            <p:ph type="body" idx="1"/>
           </p:nvPr>
         </p:nvSpPr>
         <p:spPr>
@@ -987,12 +1020,12 @@
           </a:prstGeom>
         </p:spPr>
         <p:txBody>
-          <a:bodyPr anchorCtr="0" anchor="t" bIns="91425" lIns="91425" spcFirstLastPara="1" rIns="91425" wrap="square" tIns="91425">
+          <a:bodyPr spcFirstLastPara="1" wrap="square" lIns="91425" tIns="91425" rIns="91425" bIns="91425" anchor="t" anchorCtr="0">
             <a:noAutofit/>
           </a:bodyPr>
           <a:lstStyle/>
           <a:p>
-            <a:pPr indent="0" lvl="0" marL="0" rtl="0" algn="l">
+            <a:pPr marL="0" lvl="0" indent="0" algn="l" rtl="0">
               <a:spcBef>
                 <a:spcPts val="0"/>
               </a:spcBef>
@@ -1001,9 +1034,6 @@
               </a:spcAft>
               <a:buNone/>
             </a:pPr>
-            <a:r>
-              <a:t/>
-            </a:r>
             <a:endParaRPr/>
           </a:p>
         </p:txBody>
@@ -1017,11 +1047,11 @@
 </file>
 
 <file path=ppt/notesSlides/notesSlide2.xml><?xml version="1.0" encoding="utf-8"?>
-<p:notes xmlns:a="http://schemas.openxmlformats.org/drawingml/2006/main" xmlns:r="http://schemas.openxmlformats.org/officeDocument/2006/relationships" xmlns:mc="http://schemas.openxmlformats.org/markup-compatibility/2006" xmlns:mv="urn:schemas-microsoft-com:mac:vml" xmlns:p="http://schemas.openxmlformats.org/presentationml/2006/main" xmlns:c="http://schemas.openxmlformats.org/drawingml/2006/chart" xmlns:dgm="http://schemas.openxmlformats.org/drawingml/2006/diagram" xmlns:o="urn:schemas-microsoft-com:office:office" xmlns:v="urn:schemas-microsoft-com:vml" xmlns:pvml="urn:schemas-microsoft-com:office:powerpoint" xmlns:com="http://schemas.openxmlformats.org/drawingml/2006/compatibility" xmlns:p14="http://schemas.microsoft.com/office/powerpoint/2010/main" xmlns:p15="http://schemas.microsoft.com/office/powerpoint/2012/main" xmlns:ahyp="http://schemas.microsoft.com/office/drawing/2018/hyperlinkcolor" showMasterPhAnim="0" showMasterSp="0">
+<p:notes xmlns:a="http://schemas.openxmlformats.org/drawingml/2006/main" xmlns:r="http://schemas.openxmlformats.org/officeDocument/2006/relationships" xmlns:p="http://schemas.openxmlformats.org/presentationml/2006/main" showMasterSp="0" showMasterPhAnim="0">
   <p:cSld>
     <p:spTree>
       <p:nvGrpSpPr>
-        <p:cNvPr id="55" name="Shape 55"/>
+        <p:cNvPr id="1" name="Shape 55"/>
         <p:cNvGrpSpPr/>
         <p:nvPr/>
       </p:nvGrpSpPr>
@@ -1036,9 +1066,11 @@
       <p:sp>
         <p:nvSpPr>
           <p:cNvPr id="56" name="Google Shape;56;g2d78cae0a27_0_0:notes"/>
-          <p:cNvSpPr/>
+          <p:cNvSpPr>
+            <a:spLocks noGrp="1" noRot="1" noChangeAspect="1"/>
+          </p:cNvSpPr>
           <p:nvPr>
-            <p:ph idx="2" type="sldImg"/>
+            <p:ph type="sldImg" idx="2"/>
           </p:nvPr>
         </p:nvSpPr>
         <p:spPr>
@@ -1047,9 +1079,13 @@
             <a:ext cx="1928700" cy="3429000"/>
           </a:xfrm>
           <a:custGeom>
-            <a:rect b="b" l="l" r="r" t="t"/>
+            <a:avLst/>
+            <a:gdLst/>
+            <a:ahLst/>
+            <a:cxnLst/>
+            <a:rect l="l" t="t" r="r" b="b"/>
             <a:pathLst>
-              <a:path extrusionOk="0" h="120000" w="120000">
+              <a:path w="120000" h="120000" extrusionOk="0">
                 <a:moveTo>
                   <a:pt x="0" y="0"/>
                 </a:moveTo>
@@ -1071,9 +1107,11 @@
       <p:sp>
         <p:nvSpPr>
           <p:cNvPr id="57" name="Google Shape;57;g2d78cae0a27_0_0:notes"/>
-          <p:cNvSpPr txBox="1"/>
+          <p:cNvSpPr txBox="1">
+            <a:spLocks noGrp="1"/>
+          </p:cNvSpPr>
           <p:nvPr>
-            <p:ph idx="1" type="body"/>
+            <p:ph type="body" idx="1"/>
           </p:nvPr>
         </p:nvSpPr>
         <p:spPr>
@@ -1086,12 +1124,12 @@
           </a:prstGeom>
         </p:spPr>
         <p:txBody>
-          <a:bodyPr anchorCtr="0" anchor="t" bIns="91425" lIns="91425" spcFirstLastPara="1" rIns="91425" wrap="square" tIns="91425">
+          <a:bodyPr spcFirstLastPara="1" wrap="square" lIns="91425" tIns="91425" rIns="91425" bIns="91425" anchor="t" anchorCtr="0">
             <a:noAutofit/>
           </a:bodyPr>
           <a:lstStyle/>
           <a:p>
-            <a:pPr indent="0" lvl="0" marL="0" rtl="0" algn="l">
+            <a:pPr marL="0" lvl="0" indent="0" algn="l" rtl="0">
               <a:spcBef>
                 <a:spcPts val="0"/>
               </a:spcBef>
@@ -1100,9 +1138,6 @@
               </a:spcAft>
               <a:buNone/>
             </a:pPr>
-            <a:r>
-              <a:t/>
-            </a:r>
             <a:endParaRPr/>
           </a:p>
         </p:txBody>
@@ -1116,11 +1151,11 @@
 </file>
 
 <file path=ppt/notesSlides/notesSlide3.xml><?xml version="1.0" encoding="utf-8"?>
-<p:notes xmlns:a="http://schemas.openxmlformats.org/drawingml/2006/main" xmlns:r="http://schemas.openxmlformats.org/officeDocument/2006/relationships" xmlns:mc="http://schemas.openxmlformats.org/markup-compatibility/2006" xmlns:mv="urn:schemas-microsoft-com:mac:vml" xmlns:p="http://schemas.openxmlformats.org/presentationml/2006/main" xmlns:c="http://schemas.openxmlformats.org/drawingml/2006/chart" xmlns:dgm="http://schemas.openxmlformats.org/drawingml/2006/diagram" xmlns:o="urn:schemas-microsoft-com:office:office" xmlns:v="urn:schemas-microsoft-com:vml" xmlns:pvml="urn:schemas-microsoft-com:office:powerpoint" xmlns:com="http://schemas.openxmlformats.org/drawingml/2006/compatibility" xmlns:p14="http://schemas.microsoft.com/office/powerpoint/2010/main" xmlns:p15="http://schemas.microsoft.com/office/powerpoint/2012/main" xmlns:ahyp="http://schemas.microsoft.com/office/drawing/2018/hyperlinkcolor" showMasterPhAnim="0" showMasterSp="0">
+<p:notes xmlns:a="http://schemas.openxmlformats.org/drawingml/2006/main" xmlns:r="http://schemas.openxmlformats.org/officeDocument/2006/relationships" xmlns:p="http://schemas.openxmlformats.org/presentationml/2006/main" showMasterSp="0" showMasterPhAnim="0">
   <p:cSld>
     <p:spTree>
       <p:nvGrpSpPr>
-        <p:cNvPr id="59" name="Shape 59"/>
+        <p:cNvPr id="1" name="Shape 59"/>
         <p:cNvGrpSpPr/>
         <p:nvPr/>
       </p:nvGrpSpPr>
@@ -1135,9 +1170,11 @@
       <p:sp>
         <p:nvSpPr>
           <p:cNvPr id="60" name="Google Shape;60;g2d78cae0a27_0_3:notes"/>
-          <p:cNvSpPr/>
+          <p:cNvSpPr>
+            <a:spLocks noGrp="1" noRot="1" noChangeAspect="1"/>
+          </p:cNvSpPr>
           <p:nvPr>
-            <p:ph idx="2" type="sldImg"/>
+            <p:ph type="sldImg" idx="2"/>
           </p:nvPr>
         </p:nvSpPr>
         <p:spPr>
@@ -1146,9 +1183,13 @@
             <a:ext cx="1928700" cy="3429000"/>
           </a:xfrm>
           <a:custGeom>
-            <a:rect b="b" l="l" r="r" t="t"/>
+            <a:avLst/>
+            <a:gdLst/>
+            <a:ahLst/>
+            <a:cxnLst/>
+            <a:rect l="l" t="t" r="r" b="b"/>
             <a:pathLst>
-              <a:path extrusionOk="0" h="120000" w="120000">
+              <a:path w="120000" h="120000" extrusionOk="0">
                 <a:moveTo>
                   <a:pt x="0" y="0"/>
                 </a:moveTo>
@@ -1170,9 +1211,11 @@
       <p:sp>
         <p:nvSpPr>
           <p:cNvPr id="61" name="Google Shape;61;g2d78cae0a27_0_3:notes"/>
-          <p:cNvSpPr txBox="1"/>
+          <p:cNvSpPr txBox="1">
+            <a:spLocks noGrp="1"/>
+          </p:cNvSpPr>
           <p:nvPr>
-            <p:ph idx="1" type="body"/>
+            <p:ph type="body" idx="1"/>
           </p:nvPr>
         </p:nvSpPr>
         <p:spPr>
@@ -1185,12 +1228,12 @@
           </a:prstGeom>
         </p:spPr>
         <p:txBody>
-          <a:bodyPr anchorCtr="0" anchor="t" bIns="91425" lIns="91425" spcFirstLastPara="1" rIns="91425" wrap="square" tIns="91425">
+          <a:bodyPr spcFirstLastPara="1" wrap="square" lIns="91425" tIns="91425" rIns="91425" bIns="91425" anchor="t" anchorCtr="0">
             <a:noAutofit/>
           </a:bodyPr>
           <a:lstStyle/>
           <a:p>
-            <a:pPr indent="0" lvl="0" marL="0" rtl="0" algn="l">
+            <a:pPr marL="0" lvl="0" indent="0" algn="l" rtl="0">
               <a:spcBef>
                 <a:spcPts val="0"/>
               </a:spcBef>
@@ -1199,9 +1242,6 @@
               </a:spcAft>
               <a:buNone/>
             </a:pPr>
-            <a:r>
-              <a:t/>
-            </a:r>
             <a:endParaRPr/>
           </a:p>
         </p:txBody>
@@ -1215,11 +1255,11 @@
 </file>
 
 <file path=ppt/notesSlides/notesSlide4.xml><?xml version="1.0" encoding="utf-8"?>
-<p:notes xmlns:a="http://schemas.openxmlformats.org/drawingml/2006/main" xmlns:r="http://schemas.openxmlformats.org/officeDocument/2006/relationships" xmlns:mc="http://schemas.openxmlformats.org/markup-compatibility/2006" xmlns:mv="urn:schemas-microsoft-com:mac:vml" xmlns:p="http://schemas.openxmlformats.org/presentationml/2006/main" xmlns:c="http://schemas.openxmlformats.org/drawingml/2006/chart" xmlns:dgm="http://schemas.openxmlformats.org/drawingml/2006/diagram" xmlns:o="urn:schemas-microsoft-com:office:office" xmlns:v="urn:schemas-microsoft-com:vml" xmlns:pvml="urn:schemas-microsoft-com:office:powerpoint" xmlns:com="http://schemas.openxmlformats.org/drawingml/2006/compatibility" xmlns:p14="http://schemas.microsoft.com/office/powerpoint/2010/main" xmlns:p15="http://schemas.microsoft.com/office/powerpoint/2012/main" xmlns:ahyp="http://schemas.microsoft.com/office/drawing/2018/hyperlinkcolor" showMasterPhAnim="0" showMasterSp="0">
+<p:notes xmlns:a="http://schemas.openxmlformats.org/drawingml/2006/main" xmlns:r="http://schemas.openxmlformats.org/officeDocument/2006/relationships" xmlns:p="http://schemas.openxmlformats.org/presentationml/2006/main" showMasterSp="0" showMasterPhAnim="0">
   <p:cSld>
     <p:spTree>
       <p:nvGrpSpPr>
-        <p:cNvPr id="66" name="Shape 66"/>
+        <p:cNvPr id="1" name="Shape 66"/>
         <p:cNvGrpSpPr/>
         <p:nvPr/>
       </p:nvGrpSpPr>
@@ -1234,20 +1274,26 @@
       <p:sp>
         <p:nvSpPr>
           <p:cNvPr id="67" name="Google Shape;67;g2d78cae0a27_0_6:notes"/>
-          <p:cNvSpPr/>
+          <p:cNvSpPr>
+            <a:spLocks noGrp="1" noRot="1" noChangeAspect="1"/>
+          </p:cNvSpPr>
           <p:nvPr>
-            <p:ph idx="2" type="sldImg"/>
+            <p:ph type="sldImg" idx="2"/>
           </p:nvPr>
         </p:nvSpPr>
         <p:spPr>
           <a:xfrm>
-            <a:off x="2464919" y="685800"/>
-            <a:ext cx="1928700" cy="3429000"/>
+            <a:off x="2465388" y="685800"/>
+            <a:ext cx="1928812" cy="3429000"/>
           </a:xfrm>
           <a:custGeom>
-            <a:rect b="b" l="l" r="r" t="t"/>
+            <a:avLst/>
+            <a:gdLst/>
+            <a:ahLst/>
+            <a:cxnLst/>
+            <a:rect l="l" t="t" r="r" b="b"/>
             <a:pathLst>
-              <a:path extrusionOk="0" h="120000" w="120000">
+              <a:path w="120000" h="120000" extrusionOk="0">
                 <a:moveTo>
                   <a:pt x="0" y="0"/>
                 </a:moveTo>
@@ -1269,9 +1315,11 @@
       <p:sp>
         <p:nvSpPr>
           <p:cNvPr id="68" name="Google Shape;68;g2d78cae0a27_0_6:notes"/>
-          <p:cNvSpPr txBox="1"/>
+          <p:cNvSpPr txBox="1">
+            <a:spLocks noGrp="1"/>
+          </p:cNvSpPr>
           <p:nvPr>
-            <p:ph idx="1" type="body"/>
+            <p:ph type="body" idx="1"/>
           </p:nvPr>
         </p:nvSpPr>
         <p:spPr>
@@ -1284,12 +1332,12 @@
           </a:prstGeom>
         </p:spPr>
         <p:txBody>
-          <a:bodyPr anchorCtr="0" anchor="t" bIns="91425" lIns="91425" spcFirstLastPara="1" rIns="91425" wrap="square" tIns="91425">
+          <a:bodyPr spcFirstLastPara="1" wrap="square" lIns="91425" tIns="91425" rIns="91425" bIns="91425" anchor="t" anchorCtr="0">
             <a:noAutofit/>
           </a:bodyPr>
           <a:lstStyle/>
           <a:p>
-            <a:pPr indent="0" lvl="0" marL="0" rtl="0" algn="l">
+            <a:pPr marL="0" lvl="0" indent="0" algn="l" rtl="0">
               <a:spcBef>
                 <a:spcPts val="0"/>
               </a:spcBef>
@@ -1298,9 +1346,6 @@
               </a:spcAft>
               <a:buNone/>
             </a:pPr>
-            <a:r>
-              <a:t/>
-            </a:r>
             <a:endParaRPr/>
           </a:p>
         </p:txBody>
@@ -1314,11 +1359,11 @@
 </file>
 
 <file path=ppt/notesSlides/notesSlide5.xml><?xml version="1.0" encoding="utf-8"?>
-<p:notes xmlns:a="http://schemas.openxmlformats.org/drawingml/2006/main" xmlns:r="http://schemas.openxmlformats.org/officeDocument/2006/relationships" xmlns:mc="http://schemas.openxmlformats.org/markup-compatibility/2006" xmlns:mv="urn:schemas-microsoft-com:mac:vml" xmlns:p="http://schemas.openxmlformats.org/presentationml/2006/main" xmlns:c="http://schemas.openxmlformats.org/drawingml/2006/chart" xmlns:dgm="http://schemas.openxmlformats.org/drawingml/2006/diagram" xmlns:o="urn:schemas-microsoft-com:office:office" xmlns:v="urn:schemas-microsoft-com:vml" xmlns:pvml="urn:schemas-microsoft-com:office:powerpoint" xmlns:com="http://schemas.openxmlformats.org/drawingml/2006/compatibility" xmlns:p14="http://schemas.microsoft.com/office/powerpoint/2010/main" xmlns:p15="http://schemas.microsoft.com/office/powerpoint/2012/main" xmlns:ahyp="http://schemas.microsoft.com/office/drawing/2018/hyperlinkcolor" showMasterPhAnim="0" showMasterSp="0">
+<p:notes xmlns:a="http://schemas.openxmlformats.org/drawingml/2006/main" xmlns:r="http://schemas.openxmlformats.org/officeDocument/2006/relationships" xmlns:p="http://schemas.openxmlformats.org/presentationml/2006/main" showMasterSp="0" showMasterPhAnim="0">
   <p:cSld>
     <p:spTree>
       <p:nvGrpSpPr>
-        <p:cNvPr id="73" name="Shape 73"/>
+        <p:cNvPr id="1" name="Shape 73"/>
         <p:cNvGrpSpPr/>
         <p:nvPr/>
       </p:nvGrpSpPr>
@@ -1333,9 +1378,11 @@
       <p:sp>
         <p:nvSpPr>
           <p:cNvPr id="74" name="Google Shape;74;g2d78cae0a27_0_9:notes"/>
-          <p:cNvSpPr/>
+          <p:cNvSpPr>
+            <a:spLocks noGrp="1" noRot="1" noChangeAspect="1"/>
+          </p:cNvSpPr>
           <p:nvPr>
-            <p:ph idx="2" type="sldImg"/>
+            <p:ph type="sldImg" idx="2"/>
           </p:nvPr>
         </p:nvSpPr>
         <p:spPr>
@@ -1344,9 +1391,13 @@
             <a:ext cx="1928700" cy="3429000"/>
           </a:xfrm>
           <a:custGeom>
-            <a:rect b="b" l="l" r="r" t="t"/>
+            <a:avLst/>
+            <a:gdLst/>
+            <a:ahLst/>
+            <a:cxnLst/>
+            <a:rect l="l" t="t" r="r" b="b"/>
             <a:pathLst>
-              <a:path extrusionOk="0" h="120000" w="120000">
+              <a:path w="120000" h="120000" extrusionOk="0">
                 <a:moveTo>
                   <a:pt x="0" y="0"/>
                 </a:moveTo>
@@ -1368,9 +1419,11 @@
       <p:sp>
         <p:nvSpPr>
           <p:cNvPr id="75" name="Google Shape;75;g2d78cae0a27_0_9:notes"/>
-          <p:cNvSpPr txBox="1"/>
+          <p:cNvSpPr txBox="1">
+            <a:spLocks noGrp="1"/>
+          </p:cNvSpPr>
           <p:nvPr>
-            <p:ph idx="1" type="body"/>
+            <p:ph type="body" idx="1"/>
           </p:nvPr>
         </p:nvSpPr>
         <p:spPr>
@@ -1383,12 +1436,12 @@
           </a:prstGeom>
         </p:spPr>
         <p:txBody>
-          <a:bodyPr anchorCtr="0" anchor="t" bIns="91425" lIns="91425" spcFirstLastPara="1" rIns="91425" wrap="square" tIns="91425">
+          <a:bodyPr spcFirstLastPara="1" wrap="square" lIns="91425" tIns="91425" rIns="91425" bIns="91425" anchor="t" anchorCtr="0">
             <a:noAutofit/>
           </a:bodyPr>
           <a:lstStyle/>
           <a:p>
-            <a:pPr indent="0" lvl="0" marL="0" rtl="0" algn="l">
+            <a:pPr marL="0" lvl="0" indent="0" algn="l" rtl="0">
               <a:spcBef>
                 <a:spcPts val="0"/>
               </a:spcBef>
@@ -1397,9 +1450,6 @@
               </a:spcAft>
               <a:buNone/>
             </a:pPr>
-            <a:r>
-              <a:t/>
-            </a:r>
             <a:endParaRPr/>
           </a:p>
         </p:txBody>
@@ -1413,11 +1463,11 @@
 </file>
 
 <file path=ppt/notesSlides/notesSlide6.xml><?xml version="1.0" encoding="utf-8"?>
-<p:notes xmlns:a="http://schemas.openxmlformats.org/drawingml/2006/main" xmlns:r="http://schemas.openxmlformats.org/officeDocument/2006/relationships" xmlns:mc="http://schemas.openxmlformats.org/markup-compatibility/2006" xmlns:mv="urn:schemas-microsoft-com:mac:vml" xmlns:p="http://schemas.openxmlformats.org/presentationml/2006/main" xmlns:c="http://schemas.openxmlformats.org/drawingml/2006/chart" xmlns:dgm="http://schemas.openxmlformats.org/drawingml/2006/diagram" xmlns:o="urn:schemas-microsoft-com:office:office" xmlns:v="urn:schemas-microsoft-com:vml" xmlns:pvml="urn:schemas-microsoft-com:office:powerpoint" xmlns:com="http://schemas.openxmlformats.org/drawingml/2006/compatibility" xmlns:p14="http://schemas.microsoft.com/office/powerpoint/2010/main" xmlns:p15="http://schemas.microsoft.com/office/powerpoint/2012/main" xmlns:ahyp="http://schemas.microsoft.com/office/drawing/2018/hyperlinkcolor" showMasterPhAnim="0" showMasterSp="0">
+<p:notes xmlns:a="http://schemas.openxmlformats.org/drawingml/2006/main" xmlns:r="http://schemas.openxmlformats.org/officeDocument/2006/relationships" xmlns:p="http://schemas.openxmlformats.org/presentationml/2006/main" showMasterSp="0" showMasterPhAnim="0">
   <p:cSld>
     <p:spTree>
       <p:nvGrpSpPr>
-        <p:cNvPr id="80" name="Shape 80"/>
+        <p:cNvPr id="1" name="Shape 80"/>
         <p:cNvGrpSpPr/>
         <p:nvPr/>
       </p:nvGrpSpPr>
@@ -1432,9 +1482,11 @@
       <p:sp>
         <p:nvSpPr>
           <p:cNvPr id="81" name="Google Shape;81;g2d78cae0a27_0_12:notes"/>
-          <p:cNvSpPr/>
+          <p:cNvSpPr>
+            <a:spLocks noGrp="1" noRot="1" noChangeAspect="1"/>
+          </p:cNvSpPr>
           <p:nvPr>
-            <p:ph idx="2" type="sldImg"/>
+            <p:ph type="sldImg" idx="2"/>
           </p:nvPr>
         </p:nvSpPr>
         <p:spPr>
@@ -1443,9 +1495,13 @@
             <a:ext cx="1928700" cy="3429000"/>
           </a:xfrm>
           <a:custGeom>
-            <a:rect b="b" l="l" r="r" t="t"/>
+            <a:avLst/>
+            <a:gdLst/>
+            <a:ahLst/>
+            <a:cxnLst/>
+            <a:rect l="l" t="t" r="r" b="b"/>
             <a:pathLst>
-              <a:path extrusionOk="0" h="120000" w="120000">
+              <a:path w="120000" h="120000" extrusionOk="0">
                 <a:moveTo>
                   <a:pt x="0" y="0"/>
                 </a:moveTo>
@@ -1467,9 +1523,11 @@
       <p:sp>
         <p:nvSpPr>
           <p:cNvPr id="82" name="Google Shape;82;g2d78cae0a27_0_12:notes"/>
-          <p:cNvSpPr txBox="1"/>
+          <p:cNvSpPr txBox="1">
+            <a:spLocks noGrp="1"/>
+          </p:cNvSpPr>
           <p:nvPr>
-            <p:ph idx="1" type="body"/>
+            <p:ph type="body" idx="1"/>
           </p:nvPr>
         </p:nvSpPr>
         <p:spPr>
@@ -1482,12 +1540,12 @@
           </a:prstGeom>
         </p:spPr>
         <p:txBody>
-          <a:bodyPr anchorCtr="0" anchor="t" bIns="91425" lIns="91425" spcFirstLastPara="1" rIns="91425" wrap="square" tIns="91425">
+          <a:bodyPr spcFirstLastPara="1" wrap="square" lIns="91425" tIns="91425" rIns="91425" bIns="91425" anchor="t" anchorCtr="0">
             <a:noAutofit/>
           </a:bodyPr>
           <a:lstStyle/>
           <a:p>
-            <a:pPr indent="0" lvl="0" marL="0" rtl="0" algn="l">
+            <a:pPr marL="0" lvl="0" indent="0" algn="l" rtl="0">
               <a:spcBef>
                 <a:spcPts val="0"/>
               </a:spcBef>
@@ -1496,9 +1554,6 @@
               </a:spcAft>
               <a:buNone/>
             </a:pPr>
-            <a:r>
-              <a:t/>
-            </a:r>
             <a:endParaRPr/>
           </a:p>
         </p:txBody>
@@ -1512,11 +1567,11 @@
 </file>
 
 <file path=ppt/notesSlides/notesSlide7.xml><?xml version="1.0" encoding="utf-8"?>
-<p:notes xmlns:a="http://schemas.openxmlformats.org/drawingml/2006/main" xmlns:r="http://schemas.openxmlformats.org/officeDocument/2006/relationships" xmlns:mc="http://schemas.openxmlformats.org/markup-compatibility/2006" xmlns:mv="urn:schemas-microsoft-com:mac:vml" xmlns:p="http://schemas.openxmlformats.org/presentationml/2006/main" xmlns:c="http://schemas.openxmlformats.org/drawingml/2006/chart" xmlns:dgm="http://schemas.openxmlformats.org/drawingml/2006/diagram" xmlns:o="urn:schemas-microsoft-com:office:office" xmlns:v="urn:schemas-microsoft-com:vml" xmlns:pvml="urn:schemas-microsoft-com:office:powerpoint" xmlns:com="http://schemas.openxmlformats.org/drawingml/2006/compatibility" xmlns:p14="http://schemas.microsoft.com/office/powerpoint/2010/main" xmlns:p15="http://schemas.microsoft.com/office/powerpoint/2012/main" xmlns:ahyp="http://schemas.microsoft.com/office/drawing/2018/hyperlinkcolor" showMasterPhAnim="0" showMasterSp="0">
+<p:notes xmlns:a="http://schemas.openxmlformats.org/drawingml/2006/main" xmlns:r="http://schemas.openxmlformats.org/officeDocument/2006/relationships" xmlns:p="http://schemas.openxmlformats.org/presentationml/2006/main" showMasterSp="0" showMasterPhAnim="0">
   <p:cSld>
     <p:spTree>
       <p:nvGrpSpPr>
-        <p:cNvPr id="87" name="Shape 87"/>
+        <p:cNvPr id="1" name="Shape 87"/>
         <p:cNvGrpSpPr/>
         <p:nvPr/>
       </p:nvGrpSpPr>
@@ -1531,9 +1586,11 @@
       <p:sp>
         <p:nvSpPr>
           <p:cNvPr id="88" name="Google Shape;88;g2d78cae0a27_0_15:notes"/>
-          <p:cNvSpPr/>
+          <p:cNvSpPr>
+            <a:spLocks noGrp="1" noRot="1" noChangeAspect="1"/>
+          </p:cNvSpPr>
           <p:nvPr>
-            <p:ph idx="2" type="sldImg"/>
+            <p:ph type="sldImg" idx="2"/>
           </p:nvPr>
         </p:nvSpPr>
         <p:spPr>
@@ -1542,9 +1599,13 @@
             <a:ext cx="1928700" cy="3429000"/>
           </a:xfrm>
           <a:custGeom>
-            <a:rect b="b" l="l" r="r" t="t"/>
+            <a:avLst/>
+            <a:gdLst/>
+            <a:ahLst/>
+            <a:cxnLst/>
+            <a:rect l="l" t="t" r="r" b="b"/>
             <a:pathLst>
-              <a:path extrusionOk="0" h="120000" w="120000">
+              <a:path w="120000" h="120000" extrusionOk="0">
                 <a:moveTo>
                   <a:pt x="0" y="0"/>
                 </a:moveTo>
@@ -1566,9 +1627,11 @@
       <p:sp>
         <p:nvSpPr>
           <p:cNvPr id="89" name="Google Shape;89;g2d78cae0a27_0_15:notes"/>
-          <p:cNvSpPr txBox="1"/>
+          <p:cNvSpPr txBox="1">
+            <a:spLocks noGrp="1"/>
+          </p:cNvSpPr>
           <p:nvPr>
-            <p:ph idx="1" type="body"/>
+            <p:ph type="body" idx="1"/>
           </p:nvPr>
         </p:nvSpPr>
         <p:spPr>
@@ -1581,12 +1644,12 @@
           </a:prstGeom>
         </p:spPr>
         <p:txBody>
-          <a:bodyPr anchorCtr="0" anchor="t" bIns="91425" lIns="91425" spcFirstLastPara="1" rIns="91425" wrap="square" tIns="91425">
+          <a:bodyPr spcFirstLastPara="1" wrap="square" lIns="91425" tIns="91425" rIns="91425" bIns="91425" anchor="t" anchorCtr="0">
             <a:noAutofit/>
           </a:bodyPr>
           <a:lstStyle/>
           <a:p>
-            <a:pPr indent="0" lvl="0" marL="0" rtl="0" algn="l">
+            <a:pPr marL="0" lvl="0" indent="0" algn="l" rtl="0">
               <a:spcBef>
                 <a:spcPts val="0"/>
               </a:spcBef>
@@ -1595,9 +1658,6 @@
               </a:spcAft>
               <a:buNone/>
             </a:pPr>
-            <a:r>
-              <a:t/>
-            </a:r>
             <a:endParaRPr/>
           </a:p>
         </p:txBody>
@@ -1611,11 +1671,11 @@
 </file>
 
 <file path=ppt/notesSlides/notesSlide8.xml><?xml version="1.0" encoding="utf-8"?>
-<p:notes xmlns:a="http://schemas.openxmlformats.org/drawingml/2006/main" xmlns:r="http://schemas.openxmlformats.org/officeDocument/2006/relationships" xmlns:mc="http://schemas.openxmlformats.org/markup-compatibility/2006" xmlns:mv="urn:schemas-microsoft-com:mac:vml" xmlns:p="http://schemas.openxmlformats.org/presentationml/2006/main" xmlns:c="http://schemas.openxmlformats.org/drawingml/2006/chart" xmlns:dgm="http://schemas.openxmlformats.org/drawingml/2006/diagram" xmlns:o="urn:schemas-microsoft-com:office:office" xmlns:v="urn:schemas-microsoft-com:vml" xmlns:pvml="urn:schemas-microsoft-com:office:powerpoint" xmlns:com="http://schemas.openxmlformats.org/drawingml/2006/compatibility" xmlns:p14="http://schemas.microsoft.com/office/powerpoint/2010/main" xmlns:p15="http://schemas.microsoft.com/office/powerpoint/2012/main" xmlns:ahyp="http://schemas.microsoft.com/office/drawing/2018/hyperlinkcolor" showMasterPhAnim="0" showMasterSp="0">
+<p:notes xmlns:a="http://schemas.openxmlformats.org/drawingml/2006/main" xmlns:r="http://schemas.openxmlformats.org/officeDocument/2006/relationships" xmlns:p="http://schemas.openxmlformats.org/presentationml/2006/main" showMasterSp="0" showMasterPhAnim="0">
   <p:cSld>
     <p:spTree>
       <p:nvGrpSpPr>
-        <p:cNvPr id="94" name="Shape 94"/>
+        <p:cNvPr id="1" name="Shape 94"/>
         <p:cNvGrpSpPr/>
         <p:nvPr/>
       </p:nvGrpSpPr>
@@ -1630,9 +1690,11 @@
       <p:sp>
         <p:nvSpPr>
           <p:cNvPr id="95" name="Google Shape;95;g2d78cae0a27_0_18:notes"/>
-          <p:cNvSpPr/>
+          <p:cNvSpPr>
+            <a:spLocks noGrp="1" noRot="1" noChangeAspect="1"/>
+          </p:cNvSpPr>
           <p:nvPr>
-            <p:ph idx="2" type="sldImg"/>
+            <p:ph type="sldImg" idx="2"/>
           </p:nvPr>
         </p:nvSpPr>
         <p:spPr>
@@ -1641,9 +1703,13 @@
             <a:ext cx="1928700" cy="3429000"/>
           </a:xfrm>
           <a:custGeom>
-            <a:rect b="b" l="l" r="r" t="t"/>
+            <a:avLst/>
+            <a:gdLst/>
+            <a:ahLst/>
+            <a:cxnLst/>
+            <a:rect l="l" t="t" r="r" b="b"/>
             <a:pathLst>
-              <a:path extrusionOk="0" h="120000" w="120000">
+              <a:path w="120000" h="120000" extrusionOk="0">
                 <a:moveTo>
                   <a:pt x="0" y="0"/>
                 </a:moveTo>
@@ -1665,9 +1731,11 @@
       <p:sp>
         <p:nvSpPr>
           <p:cNvPr id="96" name="Google Shape;96;g2d78cae0a27_0_18:notes"/>
-          <p:cNvSpPr txBox="1"/>
+          <p:cNvSpPr txBox="1">
+            <a:spLocks noGrp="1"/>
+          </p:cNvSpPr>
           <p:nvPr>
-            <p:ph idx="1" type="body"/>
+            <p:ph type="body" idx="1"/>
           </p:nvPr>
         </p:nvSpPr>
         <p:spPr>
@@ -1680,12 +1748,12 @@
           </a:prstGeom>
         </p:spPr>
         <p:txBody>
-          <a:bodyPr anchorCtr="0" anchor="t" bIns="91425" lIns="91425" spcFirstLastPara="1" rIns="91425" wrap="square" tIns="91425">
+          <a:bodyPr spcFirstLastPara="1" wrap="square" lIns="91425" tIns="91425" rIns="91425" bIns="91425" anchor="t" anchorCtr="0">
             <a:noAutofit/>
           </a:bodyPr>
           <a:lstStyle/>
           <a:p>
-            <a:pPr indent="0" lvl="0" marL="0" rtl="0" algn="l">
+            <a:pPr marL="0" lvl="0" indent="0" algn="l" rtl="0">
               <a:spcBef>
                 <a:spcPts val="0"/>
               </a:spcBef>
@@ -1694,9 +1762,6 @@
               </a:spcAft>
               <a:buNone/>
             </a:pPr>
-            <a:r>
-              <a:t/>
-            </a:r>
             <a:endParaRPr/>
           </a:p>
         </p:txBody>
@@ -1710,11 +1775,11 @@
 </file>
 
 <file path=ppt/notesSlides/notesSlide9.xml><?xml version="1.0" encoding="utf-8"?>
-<p:notes xmlns:a="http://schemas.openxmlformats.org/drawingml/2006/main" xmlns:r="http://schemas.openxmlformats.org/officeDocument/2006/relationships" xmlns:mc="http://schemas.openxmlformats.org/markup-compatibility/2006" xmlns:mv="urn:schemas-microsoft-com:mac:vml" xmlns:p="http://schemas.openxmlformats.org/presentationml/2006/main" xmlns:c="http://schemas.openxmlformats.org/drawingml/2006/chart" xmlns:dgm="http://schemas.openxmlformats.org/drawingml/2006/diagram" xmlns:o="urn:schemas-microsoft-com:office:office" xmlns:v="urn:schemas-microsoft-com:vml" xmlns:pvml="urn:schemas-microsoft-com:office:powerpoint" xmlns:com="http://schemas.openxmlformats.org/drawingml/2006/compatibility" xmlns:p14="http://schemas.microsoft.com/office/powerpoint/2010/main" xmlns:p15="http://schemas.microsoft.com/office/powerpoint/2012/main" xmlns:ahyp="http://schemas.microsoft.com/office/drawing/2018/hyperlinkcolor" showMasterPhAnim="0" showMasterSp="0">
+<p:notes xmlns:a="http://schemas.openxmlformats.org/drawingml/2006/main" xmlns:r="http://schemas.openxmlformats.org/officeDocument/2006/relationships" xmlns:p="http://schemas.openxmlformats.org/presentationml/2006/main" showMasterSp="0" showMasterPhAnim="0">
   <p:cSld>
     <p:spTree>
       <p:nvGrpSpPr>
-        <p:cNvPr id="101" name="Shape 101"/>
+        <p:cNvPr id="1" name="Shape 101"/>
         <p:cNvGrpSpPr/>
         <p:nvPr/>
       </p:nvGrpSpPr>
@@ -1729,9 +1794,11 @@
       <p:sp>
         <p:nvSpPr>
           <p:cNvPr id="102" name="Google Shape;102;g2d78cae0a27_0_21:notes"/>
-          <p:cNvSpPr/>
+          <p:cNvSpPr>
+            <a:spLocks noGrp="1" noRot="1" noChangeAspect="1"/>
+          </p:cNvSpPr>
           <p:nvPr>
-            <p:ph idx="2" type="sldImg"/>
+            <p:ph type="sldImg" idx="2"/>
           </p:nvPr>
         </p:nvSpPr>
         <p:spPr>
@@ -1740,9 +1807,13 @@
             <a:ext cx="1928700" cy="3429000"/>
           </a:xfrm>
           <a:custGeom>
-            <a:rect b="b" l="l" r="r" t="t"/>
+            <a:avLst/>
+            <a:gdLst/>
+            <a:ahLst/>
+            <a:cxnLst/>
+            <a:rect l="l" t="t" r="r" b="b"/>
             <a:pathLst>
-              <a:path extrusionOk="0" h="120000" w="120000">
+              <a:path w="120000" h="120000" extrusionOk="0">
                 <a:moveTo>
                   <a:pt x="0" y="0"/>
                 </a:moveTo>
@@ -1764,9 +1835,11 @@
       <p:sp>
         <p:nvSpPr>
           <p:cNvPr id="103" name="Google Shape;103;g2d78cae0a27_0_21:notes"/>
-          <p:cNvSpPr txBox="1"/>
+          <p:cNvSpPr txBox="1">
+            <a:spLocks noGrp="1"/>
+          </p:cNvSpPr>
           <p:nvPr>
-            <p:ph idx="1" type="body"/>
+            <p:ph type="body" idx="1"/>
           </p:nvPr>
         </p:nvSpPr>
         <p:spPr>
@@ -1779,12 +1852,12 @@
           </a:prstGeom>
         </p:spPr>
         <p:txBody>
-          <a:bodyPr anchorCtr="0" anchor="t" bIns="91425" lIns="91425" spcFirstLastPara="1" rIns="91425" wrap="square" tIns="91425">
+          <a:bodyPr spcFirstLastPara="1" wrap="square" lIns="91425" tIns="91425" rIns="91425" bIns="91425" anchor="t" anchorCtr="0">
             <a:noAutofit/>
           </a:bodyPr>
           <a:lstStyle/>
           <a:p>
-            <a:pPr indent="0" lvl="0" marL="0" rtl="0" algn="l">
+            <a:pPr marL="0" lvl="0" indent="0" algn="l" rtl="0">
               <a:spcBef>
                 <a:spcPts val="0"/>
               </a:spcBef>
@@ -1793,9 +1866,6 @@
               </a:spcAft>
               <a:buNone/>
             </a:pPr>
-            <a:r>
-              <a:t/>
-            </a:r>
             <a:endParaRPr/>
           </a:p>
         </p:txBody>
@@ -1809,11 +1879,11 @@
 </file>
 
 <file path=ppt/slideLayouts/slideLayout1.xml><?xml version="1.0" encoding="utf-8"?>
-<p:sldLayout xmlns:a="http://schemas.openxmlformats.org/drawingml/2006/main" xmlns:r="http://schemas.openxmlformats.org/officeDocument/2006/relationships" xmlns:mc="http://schemas.openxmlformats.org/markup-compatibility/2006" xmlns:mv="urn:schemas-microsoft-com:mac:vml" xmlns:p="http://schemas.openxmlformats.org/presentationml/2006/main" xmlns:c="http://schemas.openxmlformats.org/drawingml/2006/chart" xmlns:dgm="http://schemas.openxmlformats.org/drawingml/2006/diagram" xmlns:o="urn:schemas-microsoft-com:office:office" xmlns:v="urn:schemas-microsoft-com:vml" xmlns:pvml="urn:schemas-microsoft-com:office:powerpoint" xmlns:com="http://schemas.openxmlformats.org/drawingml/2006/compatibility" xmlns:p14="http://schemas.microsoft.com/office/powerpoint/2010/main" xmlns:p15="http://schemas.microsoft.com/office/powerpoint/2012/main" xmlns:ahyp="http://schemas.microsoft.com/office/drawing/2018/hyperlinkcolor" matchingName="Title slide" type="title">
+<p:sldLayout xmlns:a="http://schemas.openxmlformats.org/drawingml/2006/main" xmlns:r="http://schemas.openxmlformats.org/officeDocument/2006/relationships" xmlns:p="http://schemas.openxmlformats.org/presentationml/2006/main" matchingName="Title slide" type="title">
   <p:cSld name="TITLE">
     <p:spTree>
       <p:nvGrpSpPr>
-        <p:cNvPr id="9" name="Shape 9"/>
+        <p:cNvPr id="1" name="Shape 9"/>
         <p:cNvGrpSpPr/>
         <p:nvPr/>
       </p:nvGrpSpPr>
@@ -1828,7 +1898,9 @@
       <p:sp>
         <p:nvSpPr>
           <p:cNvPr id="10" name="Google Shape;10;p2"/>
-          <p:cNvSpPr txBox="1"/>
+          <p:cNvSpPr txBox="1">
+            <a:spLocks noGrp="1"/>
+          </p:cNvSpPr>
           <p:nvPr>
             <p:ph type="ctrTitle"/>
           </p:nvPr>
@@ -1843,7 +1915,7 @@
           </a:prstGeom>
         </p:spPr>
         <p:txBody>
-          <a:bodyPr anchorCtr="0" anchor="b" bIns="176925" lIns="176925" spcFirstLastPara="1" rIns="176925" wrap="square" tIns="176925">
+          <a:bodyPr spcFirstLastPara="1" wrap="square" lIns="176925" tIns="176925" rIns="176925" bIns="176925" anchor="b" anchorCtr="0">
             <a:normAutofit/>
           </a:bodyPr>
           <a:lstStyle>
@@ -1947,15 +2019,19 @@
               <a:defRPr sz="10100"/>
             </a:lvl9pPr>
           </a:lstStyle>
-          <a:p/>
+          <a:p>
+            <a:endParaRPr/>
+          </a:p>
         </p:txBody>
       </p:sp>
       <p:sp>
         <p:nvSpPr>
           <p:cNvPr id="11" name="Google Shape;11;p2"/>
-          <p:cNvSpPr txBox="1"/>
+          <p:cNvSpPr txBox="1">
+            <a:spLocks noGrp="1"/>
+          </p:cNvSpPr>
           <p:nvPr>
-            <p:ph idx="1" type="subTitle"/>
+            <p:ph type="subTitle" idx="1"/>
           </p:nvPr>
         </p:nvSpPr>
         <p:spPr>
@@ -1968,7 +2044,7 @@
           </a:prstGeom>
         </p:spPr>
         <p:txBody>
-          <a:bodyPr anchorCtr="0" anchor="t" bIns="176925" lIns="176925" spcFirstLastPara="1" rIns="176925" wrap="square" tIns="176925">
+          <a:bodyPr spcFirstLastPara="1" wrap="square" lIns="176925" tIns="176925" rIns="176925" bIns="176925" anchor="t" anchorCtr="0">
             <a:normAutofit/>
           </a:bodyPr>
           <a:lstStyle>
@@ -2099,15 +2175,19 @@
               <a:defRPr sz="5400"/>
             </a:lvl9pPr>
           </a:lstStyle>
-          <a:p/>
+          <a:p>
+            <a:endParaRPr/>
+          </a:p>
         </p:txBody>
       </p:sp>
       <p:sp>
         <p:nvSpPr>
           <p:cNvPr id="12" name="Google Shape;12;p2"/>
-          <p:cNvSpPr txBox="1"/>
+          <p:cNvSpPr txBox="1">
+            <a:spLocks noGrp="1"/>
+          </p:cNvSpPr>
           <p:nvPr>
-            <p:ph idx="12" type="sldNum"/>
+            <p:ph type="sldNum" idx="12"/>
           </p:nvPr>
         </p:nvSpPr>
         <p:spPr>
@@ -2120,7 +2200,7 @@
           </a:prstGeom>
         </p:spPr>
         <p:txBody>
-          <a:bodyPr anchorCtr="0" anchor="ctr" bIns="176925" lIns="176925" spcFirstLastPara="1" rIns="176925" wrap="square" tIns="176925">
+          <a:bodyPr spcFirstLastPara="1" wrap="square" lIns="176925" tIns="176925" rIns="176925" bIns="176925" anchor="ctr" anchorCtr="0">
             <a:normAutofit/>
           </a:bodyPr>
           <a:lstStyle>
@@ -2162,7 +2242,7 @@
             </a:lvl9pPr>
           </a:lstStyle>
           <a:p>
-            <a:pPr indent="0" lvl="0" marL="0" rtl="0" algn="r">
+            <a:pPr marL="0" lvl="0" indent="0" algn="r" rtl="0">
               <a:spcBef>
                 <a:spcPts val="0"/>
               </a:spcBef>
@@ -2188,11 +2268,11 @@
 </file>
 
 <file path=ppt/slideLayouts/slideLayout10.xml><?xml version="1.0" encoding="utf-8"?>
-<p:sldLayout xmlns:a="http://schemas.openxmlformats.org/drawingml/2006/main" xmlns:r="http://schemas.openxmlformats.org/officeDocument/2006/relationships" xmlns:mc="http://schemas.openxmlformats.org/markup-compatibility/2006" xmlns:mv="urn:schemas-microsoft-com:mac:vml" xmlns:p="http://schemas.openxmlformats.org/presentationml/2006/main" xmlns:c="http://schemas.openxmlformats.org/drawingml/2006/chart" xmlns:dgm="http://schemas.openxmlformats.org/drawingml/2006/diagram" xmlns:o="urn:schemas-microsoft-com:office:office" xmlns:v="urn:schemas-microsoft-com:vml" xmlns:pvml="urn:schemas-microsoft-com:office:powerpoint" xmlns:com="http://schemas.openxmlformats.org/drawingml/2006/compatibility" xmlns:p14="http://schemas.microsoft.com/office/powerpoint/2010/main" xmlns:p15="http://schemas.microsoft.com/office/powerpoint/2012/main" xmlns:ahyp="http://schemas.microsoft.com/office/drawing/2018/hyperlinkcolor" matchingName="Big number">
+<p:sldLayout xmlns:a="http://schemas.openxmlformats.org/drawingml/2006/main" xmlns:r="http://schemas.openxmlformats.org/officeDocument/2006/relationships" xmlns:p="http://schemas.openxmlformats.org/presentationml/2006/main" matchingName="Big number">
   <p:cSld name="BIG_NUMBER">
     <p:spTree>
       <p:nvGrpSpPr>
-        <p:cNvPr id="44" name="Shape 44"/>
+        <p:cNvPr id="1" name="Shape 44"/>
         <p:cNvGrpSpPr/>
         <p:nvPr/>
       </p:nvGrpSpPr>
@@ -2207,9 +2287,11 @@
       <p:sp>
         <p:nvSpPr>
           <p:cNvPr id="45" name="Google Shape;45;p11"/>
-          <p:cNvSpPr txBox="1"/>
+          <p:cNvSpPr txBox="1">
+            <a:spLocks noGrp="1"/>
+          </p:cNvSpPr>
           <p:nvPr>
-            <p:ph hasCustomPrompt="1" type="title"/>
+            <p:ph type="title" hasCustomPrompt="1"/>
           </p:nvPr>
         </p:nvSpPr>
         <p:spPr>
@@ -2222,7 +2304,7 @@
           </a:prstGeom>
         </p:spPr>
         <p:txBody>
-          <a:bodyPr anchorCtr="0" anchor="b" bIns="176925" lIns="176925" spcFirstLastPara="1" rIns="176925" wrap="square" tIns="176925">
+          <a:bodyPr spcFirstLastPara="1" wrap="square" lIns="176925" tIns="176925" rIns="176925" bIns="176925" anchor="b" anchorCtr="0">
             <a:normAutofit/>
           </a:bodyPr>
           <a:lstStyle>
@@ -2336,9 +2418,11 @@
       <p:sp>
         <p:nvSpPr>
           <p:cNvPr id="46" name="Google Shape;46;p11"/>
-          <p:cNvSpPr txBox="1"/>
+          <p:cNvSpPr txBox="1">
+            <a:spLocks noGrp="1"/>
+          </p:cNvSpPr>
           <p:nvPr>
-            <p:ph idx="1" type="body"/>
+            <p:ph type="body" idx="1"/>
           </p:nvPr>
         </p:nvSpPr>
         <p:spPr>
@@ -2351,11 +2435,11 @@
           </a:prstGeom>
         </p:spPr>
         <p:txBody>
-          <a:bodyPr anchorCtr="0" anchor="t" bIns="176925" lIns="176925" spcFirstLastPara="1" rIns="176925" wrap="square" tIns="176925">
+          <a:bodyPr spcFirstLastPara="1" wrap="square" lIns="176925" tIns="176925" rIns="176925" bIns="176925" anchor="t" anchorCtr="0">
             <a:normAutofit/>
           </a:bodyPr>
           <a:lstStyle>
-            <a:lvl1pPr indent="-450850" lvl="0" marL="457200" algn="ctr">
+            <a:lvl1pPr marL="457200" lvl="0" indent="-450850" algn="ctr">
               <a:spcBef>
                 <a:spcPts val="0"/>
               </a:spcBef>
@@ -2366,7 +2450,7 @@
               <a:buChar char="●"/>
               <a:defRPr/>
             </a:lvl1pPr>
-            <a:lvl2pPr indent="-400050" lvl="1" marL="914400" algn="ctr">
+            <a:lvl2pPr marL="914400" lvl="1" indent="-400050" algn="ctr">
               <a:spcBef>
                 <a:spcPts val="0"/>
               </a:spcBef>
@@ -2377,7 +2461,7 @@
               <a:buChar char="○"/>
               <a:defRPr/>
             </a:lvl2pPr>
-            <a:lvl3pPr indent="-400050" lvl="2" marL="1371600" algn="ctr">
+            <a:lvl3pPr marL="1371600" lvl="2" indent="-400050" algn="ctr">
               <a:spcBef>
                 <a:spcPts val="0"/>
               </a:spcBef>
@@ -2388,7 +2472,7 @@
               <a:buChar char="■"/>
               <a:defRPr/>
             </a:lvl3pPr>
-            <a:lvl4pPr indent="-400050" lvl="3" marL="1828800" algn="ctr">
+            <a:lvl4pPr marL="1828800" lvl="3" indent="-400050" algn="ctr">
               <a:spcBef>
                 <a:spcPts val="0"/>
               </a:spcBef>
@@ -2399,7 +2483,7 @@
               <a:buChar char="●"/>
               <a:defRPr/>
             </a:lvl4pPr>
-            <a:lvl5pPr indent="-400050" lvl="4" marL="2286000" algn="ctr">
+            <a:lvl5pPr marL="2286000" lvl="4" indent="-400050" algn="ctr">
               <a:spcBef>
                 <a:spcPts val="0"/>
               </a:spcBef>
@@ -2410,7 +2494,7 @@
               <a:buChar char="○"/>
               <a:defRPr/>
             </a:lvl5pPr>
-            <a:lvl6pPr indent="-400050" lvl="5" marL="2743200" algn="ctr">
+            <a:lvl6pPr marL="2743200" lvl="5" indent="-400050" algn="ctr">
               <a:spcBef>
                 <a:spcPts val="0"/>
               </a:spcBef>
@@ -2421,7 +2505,7 @@
               <a:buChar char="■"/>
               <a:defRPr/>
             </a:lvl6pPr>
-            <a:lvl7pPr indent="-400050" lvl="6" marL="3200400" algn="ctr">
+            <a:lvl7pPr marL="3200400" lvl="6" indent="-400050" algn="ctr">
               <a:spcBef>
                 <a:spcPts val="0"/>
               </a:spcBef>
@@ -2432,7 +2516,7 @@
               <a:buChar char="●"/>
               <a:defRPr/>
             </a:lvl7pPr>
-            <a:lvl8pPr indent="-400050" lvl="7" marL="3657600" algn="ctr">
+            <a:lvl8pPr marL="3657600" lvl="7" indent="-400050" algn="ctr">
               <a:spcBef>
                 <a:spcPts val="0"/>
               </a:spcBef>
@@ -2443,7 +2527,7 @@
               <a:buChar char="○"/>
               <a:defRPr/>
             </a:lvl8pPr>
-            <a:lvl9pPr indent="-400050" lvl="8" marL="4114800" algn="ctr">
+            <a:lvl9pPr marL="4114800" lvl="8" indent="-400050" algn="ctr">
               <a:spcBef>
                 <a:spcPts val="0"/>
               </a:spcBef>
@@ -2455,15 +2539,19 @@
               <a:defRPr/>
             </a:lvl9pPr>
           </a:lstStyle>
-          <a:p/>
+          <a:p>
+            <a:endParaRPr/>
+          </a:p>
         </p:txBody>
       </p:sp>
       <p:sp>
         <p:nvSpPr>
           <p:cNvPr id="47" name="Google Shape;47;p11"/>
-          <p:cNvSpPr txBox="1"/>
+          <p:cNvSpPr txBox="1">
+            <a:spLocks noGrp="1"/>
+          </p:cNvSpPr>
           <p:nvPr>
-            <p:ph idx="12" type="sldNum"/>
+            <p:ph type="sldNum" idx="12"/>
           </p:nvPr>
         </p:nvSpPr>
         <p:spPr>
@@ -2476,7 +2564,7 @@
           </a:prstGeom>
         </p:spPr>
         <p:txBody>
-          <a:bodyPr anchorCtr="0" anchor="ctr" bIns="176925" lIns="176925" spcFirstLastPara="1" rIns="176925" wrap="square" tIns="176925">
+          <a:bodyPr spcFirstLastPara="1" wrap="square" lIns="176925" tIns="176925" rIns="176925" bIns="176925" anchor="ctr" anchorCtr="0">
             <a:normAutofit/>
           </a:bodyPr>
           <a:lstStyle>
@@ -2518,7 +2606,7 @@
             </a:lvl9pPr>
           </a:lstStyle>
           <a:p>
-            <a:pPr indent="0" lvl="0" marL="0" rtl="0" algn="r">
+            <a:pPr marL="0" lvl="0" indent="0" algn="r" rtl="0">
               <a:spcBef>
                 <a:spcPts val="0"/>
               </a:spcBef>
@@ -2544,11 +2632,11 @@
 </file>
 
 <file path=ppt/slideLayouts/slideLayout11.xml><?xml version="1.0" encoding="utf-8"?>
-<p:sldLayout xmlns:a="http://schemas.openxmlformats.org/drawingml/2006/main" xmlns:r="http://schemas.openxmlformats.org/officeDocument/2006/relationships" xmlns:mc="http://schemas.openxmlformats.org/markup-compatibility/2006" xmlns:mv="urn:schemas-microsoft-com:mac:vml" xmlns:p="http://schemas.openxmlformats.org/presentationml/2006/main" xmlns:c="http://schemas.openxmlformats.org/drawingml/2006/chart" xmlns:dgm="http://schemas.openxmlformats.org/drawingml/2006/diagram" xmlns:o="urn:schemas-microsoft-com:office:office" xmlns:v="urn:schemas-microsoft-com:vml" xmlns:pvml="urn:schemas-microsoft-com:office:powerpoint" xmlns:com="http://schemas.openxmlformats.org/drawingml/2006/compatibility" xmlns:p14="http://schemas.microsoft.com/office/powerpoint/2010/main" xmlns:p15="http://schemas.microsoft.com/office/powerpoint/2012/main" xmlns:ahyp="http://schemas.microsoft.com/office/drawing/2018/hyperlinkcolor" matchingName="Blank" type="blank">
+<p:sldLayout xmlns:a="http://schemas.openxmlformats.org/drawingml/2006/main" xmlns:r="http://schemas.openxmlformats.org/officeDocument/2006/relationships" xmlns:p="http://schemas.openxmlformats.org/presentationml/2006/main" matchingName="Blank" type="blank">
   <p:cSld name="BLANK">
     <p:spTree>
       <p:nvGrpSpPr>
-        <p:cNvPr id="48" name="Shape 48"/>
+        <p:cNvPr id="1" name="Shape 48"/>
         <p:cNvGrpSpPr/>
         <p:nvPr/>
       </p:nvGrpSpPr>
@@ -2563,9 +2651,11 @@
       <p:sp>
         <p:nvSpPr>
           <p:cNvPr id="49" name="Google Shape;49;p12"/>
-          <p:cNvSpPr txBox="1"/>
+          <p:cNvSpPr txBox="1">
+            <a:spLocks noGrp="1"/>
+          </p:cNvSpPr>
           <p:nvPr>
-            <p:ph idx="12" type="sldNum"/>
+            <p:ph type="sldNum" idx="12"/>
           </p:nvPr>
         </p:nvSpPr>
         <p:spPr>
@@ -2578,7 +2668,7 @@
           </a:prstGeom>
         </p:spPr>
         <p:txBody>
-          <a:bodyPr anchorCtr="0" anchor="ctr" bIns="176925" lIns="176925" spcFirstLastPara="1" rIns="176925" wrap="square" tIns="176925">
+          <a:bodyPr spcFirstLastPara="1" wrap="square" lIns="176925" tIns="176925" rIns="176925" bIns="176925" anchor="ctr" anchorCtr="0">
             <a:normAutofit/>
           </a:bodyPr>
           <a:lstStyle>
@@ -2620,7 +2710,7 @@
             </a:lvl9pPr>
           </a:lstStyle>
           <a:p>
-            <a:pPr indent="0" lvl="0" marL="0" rtl="0" algn="r">
+            <a:pPr marL="0" lvl="0" indent="0" algn="r" rtl="0">
               <a:spcBef>
                 <a:spcPts val="0"/>
               </a:spcBef>
@@ -2646,11 +2736,11 @@
 </file>
 
 <file path=ppt/slideLayouts/slideLayout2.xml><?xml version="1.0" encoding="utf-8"?>
-<p:sldLayout xmlns:a="http://schemas.openxmlformats.org/drawingml/2006/main" xmlns:r="http://schemas.openxmlformats.org/officeDocument/2006/relationships" xmlns:mc="http://schemas.openxmlformats.org/markup-compatibility/2006" xmlns:mv="urn:schemas-microsoft-com:mac:vml" xmlns:p="http://schemas.openxmlformats.org/presentationml/2006/main" xmlns:c="http://schemas.openxmlformats.org/drawingml/2006/chart" xmlns:dgm="http://schemas.openxmlformats.org/drawingml/2006/diagram" xmlns:o="urn:schemas-microsoft-com:office:office" xmlns:v="urn:schemas-microsoft-com:vml" xmlns:pvml="urn:schemas-microsoft-com:office:powerpoint" xmlns:com="http://schemas.openxmlformats.org/drawingml/2006/compatibility" xmlns:p14="http://schemas.microsoft.com/office/powerpoint/2010/main" xmlns:p15="http://schemas.microsoft.com/office/powerpoint/2012/main" xmlns:ahyp="http://schemas.microsoft.com/office/drawing/2018/hyperlinkcolor" matchingName="Section header" type="secHead">
+<p:sldLayout xmlns:a="http://schemas.openxmlformats.org/drawingml/2006/main" xmlns:r="http://schemas.openxmlformats.org/officeDocument/2006/relationships" xmlns:p="http://schemas.openxmlformats.org/presentationml/2006/main" matchingName="Section header" type="secHead">
   <p:cSld name="SECTION_HEADER">
     <p:spTree>
       <p:nvGrpSpPr>
-        <p:cNvPr id="13" name="Shape 13"/>
+        <p:cNvPr id="1" name="Shape 13"/>
         <p:cNvGrpSpPr/>
         <p:nvPr/>
       </p:nvGrpSpPr>
@@ -2665,7 +2755,9 @@
       <p:sp>
         <p:nvSpPr>
           <p:cNvPr id="14" name="Google Shape;14;p3"/>
-          <p:cNvSpPr txBox="1"/>
+          <p:cNvSpPr txBox="1">
+            <a:spLocks noGrp="1"/>
+          </p:cNvSpPr>
           <p:nvPr>
             <p:ph type="title"/>
           </p:nvPr>
@@ -2680,7 +2772,7 @@
           </a:prstGeom>
         </p:spPr>
         <p:txBody>
-          <a:bodyPr anchorCtr="0" anchor="ctr" bIns="176925" lIns="176925" spcFirstLastPara="1" rIns="176925" wrap="square" tIns="176925">
+          <a:bodyPr spcFirstLastPara="1" wrap="square" lIns="176925" tIns="176925" rIns="176925" bIns="176925" anchor="ctr" anchorCtr="0">
             <a:normAutofit/>
           </a:bodyPr>
           <a:lstStyle>
@@ -2784,15 +2876,19 @@
               <a:defRPr sz="7000"/>
             </a:lvl9pPr>
           </a:lstStyle>
-          <a:p/>
+          <a:p>
+            <a:endParaRPr/>
+          </a:p>
         </p:txBody>
       </p:sp>
       <p:sp>
         <p:nvSpPr>
           <p:cNvPr id="15" name="Google Shape;15;p3"/>
-          <p:cNvSpPr txBox="1"/>
+          <p:cNvSpPr txBox="1">
+            <a:spLocks noGrp="1"/>
+          </p:cNvSpPr>
           <p:nvPr>
-            <p:ph idx="12" type="sldNum"/>
+            <p:ph type="sldNum" idx="12"/>
           </p:nvPr>
         </p:nvSpPr>
         <p:spPr>
@@ -2805,7 +2901,7 @@
           </a:prstGeom>
         </p:spPr>
         <p:txBody>
-          <a:bodyPr anchorCtr="0" anchor="ctr" bIns="176925" lIns="176925" spcFirstLastPara="1" rIns="176925" wrap="square" tIns="176925">
+          <a:bodyPr spcFirstLastPara="1" wrap="square" lIns="176925" tIns="176925" rIns="176925" bIns="176925" anchor="ctr" anchorCtr="0">
             <a:normAutofit/>
           </a:bodyPr>
           <a:lstStyle>
@@ -2847,7 +2943,7 @@
             </a:lvl9pPr>
           </a:lstStyle>
           <a:p>
-            <a:pPr indent="0" lvl="0" marL="0" rtl="0" algn="r">
+            <a:pPr marL="0" lvl="0" indent="0" algn="r" rtl="0">
               <a:spcBef>
                 <a:spcPts val="0"/>
               </a:spcBef>
@@ -2873,11 +2969,11 @@
 </file>
 
 <file path=ppt/slideLayouts/slideLayout3.xml><?xml version="1.0" encoding="utf-8"?>
-<p:sldLayout xmlns:a="http://schemas.openxmlformats.org/drawingml/2006/main" xmlns:r="http://schemas.openxmlformats.org/officeDocument/2006/relationships" xmlns:mc="http://schemas.openxmlformats.org/markup-compatibility/2006" xmlns:mv="urn:schemas-microsoft-com:mac:vml" xmlns:p="http://schemas.openxmlformats.org/presentationml/2006/main" xmlns:c="http://schemas.openxmlformats.org/drawingml/2006/chart" xmlns:dgm="http://schemas.openxmlformats.org/drawingml/2006/diagram" xmlns:o="urn:schemas-microsoft-com:office:office" xmlns:v="urn:schemas-microsoft-com:vml" xmlns:pvml="urn:schemas-microsoft-com:office:powerpoint" xmlns:com="http://schemas.openxmlformats.org/drawingml/2006/compatibility" xmlns:p14="http://schemas.microsoft.com/office/powerpoint/2010/main" xmlns:p15="http://schemas.microsoft.com/office/powerpoint/2012/main" xmlns:ahyp="http://schemas.microsoft.com/office/drawing/2018/hyperlinkcolor" matchingName="Title and body" type="tx">
+<p:sldLayout xmlns:a="http://schemas.openxmlformats.org/drawingml/2006/main" xmlns:r="http://schemas.openxmlformats.org/officeDocument/2006/relationships" xmlns:p="http://schemas.openxmlformats.org/presentationml/2006/main" matchingName="Title and body" type="tx">
   <p:cSld name="TITLE_AND_BODY">
     <p:spTree>
       <p:nvGrpSpPr>
-        <p:cNvPr id="16" name="Shape 16"/>
+        <p:cNvPr id="1" name="Shape 16"/>
         <p:cNvGrpSpPr/>
         <p:nvPr/>
       </p:nvGrpSpPr>
@@ -2892,7 +2988,9 @@
       <p:sp>
         <p:nvSpPr>
           <p:cNvPr id="17" name="Google Shape;17;p4"/>
-          <p:cNvSpPr txBox="1"/>
+          <p:cNvSpPr txBox="1">
+            <a:spLocks noGrp="1"/>
+          </p:cNvSpPr>
           <p:nvPr>
             <p:ph type="title"/>
           </p:nvPr>
@@ -2907,7 +3005,7 @@
           </a:prstGeom>
         </p:spPr>
         <p:txBody>
-          <a:bodyPr anchorCtr="0" anchor="t" bIns="176925" lIns="176925" spcFirstLastPara="1" rIns="176925" wrap="square" tIns="176925">
+          <a:bodyPr spcFirstLastPara="1" wrap="square" lIns="176925" tIns="176925" rIns="176925" bIns="176925" anchor="t" anchorCtr="0">
             <a:normAutofit/>
           </a:bodyPr>
           <a:lstStyle>
@@ -3011,15 +3109,19 @@
               <a:defRPr/>
             </a:lvl9pPr>
           </a:lstStyle>
-          <a:p/>
+          <a:p>
+            <a:endParaRPr/>
+          </a:p>
         </p:txBody>
       </p:sp>
       <p:sp>
         <p:nvSpPr>
           <p:cNvPr id="18" name="Google Shape;18;p4"/>
-          <p:cNvSpPr txBox="1"/>
+          <p:cNvSpPr txBox="1">
+            <a:spLocks noGrp="1"/>
+          </p:cNvSpPr>
           <p:nvPr>
-            <p:ph idx="1" type="body"/>
+            <p:ph type="body" idx="1"/>
           </p:nvPr>
         </p:nvSpPr>
         <p:spPr>
@@ -3032,11 +3134,11 @@
           </a:prstGeom>
         </p:spPr>
         <p:txBody>
-          <a:bodyPr anchorCtr="0" anchor="t" bIns="176925" lIns="176925" spcFirstLastPara="1" rIns="176925" wrap="square" tIns="176925">
+          <a:bodyPr spcFirstLastPara="1" wrap="square" lIns="176925" tIns="176925" rIns="176925" bIns="176925" anchor="t" anchorCtr="0">
             <a:normAutofit/>
           </a:bodyPr>
           <a:lstStyle>
-            <a:lvl1pPr indent="-450850" lvl="0" marL="457200">
+            <a:lvl1pPr marL="457200" lvl="0" indent="-450850">
               <a:spcBef>
                 <a:spcPts val="0"/>
               </a:spcBef>
@@ -3047,7 +3149,7 @@
               <a:buChar char="●"/>
               <a:defRPr/>
             </a:lvl1pPr>
-            <a:lvl2pPr indent="-400050" lvl="1" marL="914400">
+            <a:lvl2pPr marL="914400" lvl="1" indent="-400050">
               <a:spcBef>
                 <a:spcPts val="0"/>
               </a:spcBef>
@@ -3058,7 +3160,7 @@
               <a:buChar char="○"/>
               <a:defRPr/>
             </a:lvl2pPr>
-            <a:lvl3pPr indent="-400050" lvl="2" marL="1371600">
+            <a:lvl3pPr marL="1371600" lvl="2" indent="-400050">
               <a:spcBef>
                 <a:spcPts val="0"/>
               </a:spcBef>
@@ -3069,7 +3171,7 @@
               <a:buChar char="■"/>
               <a:defRPr/>
             </a:lvl3pPr>
-            <a:lvl4pPr indent="-400050" lvl="3" marL="1828800">
+            <a:lvl4pPr marL="1828800" lvl="3" indent="-400050">
               <a:spcBef>
                 <a:spcPts val="0"/>
               </a:spcBef>
@@ -3080,7 +3182,7 @@
               <a:buChar char="●"/>
               <a:defRPr/>
             </a:lvl4pPr>
-            <a:lvl5pPr indent="-400050" lvl="4" marL="2286000">
+            <a:lvl5pPr marL="2286000" lvl="4" indent="-400050">
               <a:spcBef>
                 <a:spcPts val="0"/>
               </a:spcBef>
@@ -3091,7 +3193,7 @@
               <a:buChar char="○"/>
               <a:defRPr/>
             </a:lvl5pPr>
-            <a:lvl6pPr indent="-400050" lvl="5" marL="2743200">
+            <a:lvl6pPr marL="2743200" lvl="5" indent="-400050">
               <a:spcBef>
                 <a:spcPts val="0"/>
               </a:spcBef>
@@ -3102,7 +3204,7 @@
               <a:buChar char="■"/>
               <a:defRPr/>
             </a:lvl6pPr>
-            <a:lvl7pPr indent="-400050" lvl="6" marL="3200400">
+            <a:lvl7pPr marL="3200400" lvl="6" indent="-400050">
               <a:spcBef>
                 <a:spcPts val="0"/>
               </a:spcBef>
@@ -3113,7 +3215,7 @@
               <a:buChar char="●"/>
               <a:defRPr/>
             </a:lvl7pPr>
-            <a:lvl8pPr indent="-400050" lvl="7" marL="3657600">
+            <a:lvl8pPr marL="3657600" lvl="7" indent="-400050">
               <a:spcBef>
                 <a:spcPts val="0"/>
               </a:spcBef>
@@ -3124,7 +3226,7 @@
               <a:buChar char="○"/>
               <a:defRPr/>
             </a:lvl8pPr>
-            <a:lvl9pPr indent="-400050" lvl="8" marL="4114800">
+            <a:lvl9pPr marL="4114800" lvl="8" indent="-400050">
               <a:spcBef>
                 <a:spcPts val="0"/>
               </a:spcBef>
@@ -3136,15 +3238,19 @@
               <a:defRPr/>
             </a:lvl9pPr>
           </a:lstStyle>
-          <a:p/>
+          <a:p>
+            <a:endParaRPr/>
+          </a:p>
         </p:txBody>
       </p:sp>
       <p:sp>
         <p:nvSpPr>
           <p:cNvPr id="19" name="Google Shape;19;p4"/>
-          <p:cNvSpPr txBox="1"/>
+          <p:cNvSpPr txBox="1">
+            <a:spLocks noGrp="1"/>
+          </p:cNvSpPr>
           <p:nvPr>
-            <p:ph idx="12" type="sldNum"/>
+            <p:ph type="sldNum" idx="12"/>
           </p:nvPr>
         </p:nvSpPr>
         <p:spPr>
@@ -3157,7 +3263,7 @@
           </a:prstGeom>
         </p:spPr>
         <p:txBody>
-          <a:bodyPr anchorCtr="0" anchor="ctr" bIns="176925" lIns="176925" spcFirstLastPara="1" rIns="176925" wrap="square" tIns="176925">
+          <a:bodyPr spcFirstLastPara="1" wrap="square" lIns="176925" tIns="176925" rIns="176925" bIns="176925" anchor="ctr" anchorCtr="0">
             <a:normAutofit/>
           </a:bodyPr>
           <a:lstStyle>
@@ -3199,7 +3305,7 @@
             </a:lvl9pPr>
           </a:lstStyle>
           <a:p>
-            <a:pPr indent="0" lvl="0" marL="0" rtl="0" algn="r">
+            <a:pPr marL="0" lvl="0" indent="0" algn="r" rtl="0">
               <a:spcBef>
                 <a:spcPts val="0"/>
               </a:spcBef>
@@ -3225,11 +3331,11 @@
 </file>
 
 <file path=ppt/slideLayouts/slideLayout4.xml><?xml version="1.0" encoding="utf-8"?>
-<p:sldLayout xmlns:a="http://schemas.openxmlformats.org/drawingml/2006/main" xmlns:r="http://schemas.openxmlformats.org/officeDocument/2006/relationships" xmlns:mc="http://schemas.openxmlformats.org/markup-compatibility/2006" xmlns:mv="urn:schemas-microsoft-com:mac:vml" xmlns:p="http://schemas.openxmlformats.org/presentationml/2006/main" xmlns:c="http://schemas.openxmlformats.org/drawingml/2006/chart" xmlns:dgm="http://schemas.openxmlformats.org/drawingml/2006/diagram" xmlns:o="urn:schemas-microsoft-com:office:office" xmlns:v="urn:schemas-microsoft-com:vml" xmlns:pvml="urn:schemas-microsoft-com:office:powerpoint" xmlns:com="http://schemas.openxmlformats.org/drawingml/2006/compatibility" xmlns:p14="http://schemas.microsoft.com/office/powerpoint/2010/main" xmlns:p15="http://schemas.microsoft.com/office/powerpoint/2012/main" xmlns:ahyp="http://schemas.microsoft.com/office/drawing/2018/hyperlinkcolor" matchingName="Title and two columns" type="twoColTx">
+<p:sldLayout xmlns:a="http://schemas.openxmlformats.org/drawingml/2006/main" xmlns:r="http://schemas.openxmlformats.org/officeDocument/2006/relationships" xmlns:p="http://schemas.openxmlformats.org/presentationml/2006/main" matchingName="Title and two columns" type="twoColTx">
   <p:cSld name="TITLE_AND_TWO_COLUMNS">
     <p:spTree>
       <p:nvGrpSpPr>
-        <p:cNvPr id="20" name="Shape 20"/>
+        <p:cNvPr id="1" name="Shape 20"/>
         <p:cNvGrpSpPr/>
         <p:nvPr/>
       </p:nvGrpSpPr>
@@ -3244,7 +3350,9 @@
       <p:sp>
         <p:nvSpPr>
           <p:cNvPr id="21" name="Google Shape;21;p5"/>
-          <p:cNvSpPr txBox="1"/>
+          <p:cNvSpPr txBox="1">
+            <a:spLocks noGrp="1"/>
+          </p:cNvSpPr>
           <p:nvPr>
             <p:ph type="title"/>
           </p:nvPr>
@@ -3259,7 +3367,7 @@
           </a:prstGeom>
         </p:spPr>
         <p:txBody>
-          <a:bodyPr anchorCtr="0" anchor="t" bIns="176925" lIns="176925" spcFirstLastPara="1" rIns="176925" wrap="square" tIns="176925">
+          <a:bodyPr spcFirstLastPara="1" wrap="square" lIns="176925" tIns="176925" rIns="176925" bIns="176925" anchor="t" anchorCtr="0">
             <a:normAutofit/>
           </a:bodyPr>
           <a:lstStyle>
@@ -3363,15 +3471,19 @@
               <a:defRPr/>
             </a:lvl9pPr>
           </a:lstStyle>
-          <a:p/>
+          <a:p>
+            <a:endParaRPr/>
+          </a:p>
         </p:txBody>
       </p:sp>
       <p:sp>
         <p:nvSpPr>
           <p:cNvPr id="22" name="Google Shape;22;p5"/>
-          <p:cNvSpPr txBox="1"/>
+          <p:cNvSpPr txBox="1">
+            <a:spLocks noGrp="1"/>
+          </p:cNvSpPr>
           <p:nvPr>
-            <p:ph idx="1" type="body"/>
+            <p:ph type="body" idx="1"/>
           </p:nvPr>
         </p:nvSpPr>
         <p:spPr>
@@ -3384,11 +3496,11 @@
           </a:prstGeom>
         </p:spPr>
         <p:txBody>
-          <a:bodyPr anchorCtr="0" anchor="t" bIns="176925" lIns="176925" spcFirstLastPara="1" rIns="176925" wrap="square" tIns="176925">
+          <a:bodyPr spcFirstLastPara="1" wrap="square" lIns="176925" tIns="176925" rIns="176925" bIns="176925" anchor="t" anchorCtr="0">
             <a:normAutofit/>
           </a:bodyPr>
           <a:lstStyle>
-            <a:lvl1pPr indent="-400050" lvl="0" marL="457200">
+            <a:lvl1pPr marL="457200" lvl="0" indent="-400050">
               <a:spcBef>
                 <a:spcPts val="0"/>
               </a:spcBef>
@@ -3399,7 +3511,7 @@
               <a:buChar char="●"/>
               <a:defRPr sz="2700"/>
             </a:lvl1pPr>
-            <a:lvl2pPr indent="-374650" lvl="1" marL="914400">
+            <a:lvl2pPr marL="914400" lvl="1" indent="-374650">
               <a:spcBef>
                 <a:spcPts val="0"/>
               </a:spcBef>
@@ -3410,7 +3522,7 @@
               <a:buChar char="○"/>
               <a:defRPr sz="2300"/>
             </a:lvl2pPr>
-            <a:lvl3pPr indent="-374650" lvl="2" marL="1371600">
+            <a:lvl3pPr marL="1371600" lvl="2" indent="-374650">
               <a:spcBef>
                 <a:spcPts val="0"/>
               </a:spcBef>
@@ -3421,7 +3533,7 @@
               <a:buChar char="■"/>
               <a:defRPr sz="2300"/>
             </a:lvl3pPr>
-            <a:lvl4pPr indent="-374650" lvl="3" marL="1828800">
+            <a:lvl4pPr marL="1828800" lvl="3" indent="-374650">
               <a:spcBef>
                 <a:spcPts val="0"/>
               </a:spcBef>
@@ -3432,7 +3544,7 @@
               <a:buChar char="●"/>
               <a:defRPr sz="2300"/>
             </a:lvl4pPr>
-            <a:lvl5pPr indent="-374650" lvl="4" marL="2286000">
+            <a:lvl5pPr marL="2286000" lvl="4" indent="-374650">
               <a:spcBef>
                 <a:spcPts val="0"/>
               </a:spcBef>
@@ -3443,7 +3555,7 @@
               <a:buChar char="○"/>
               <a:defRPr sz="2300"/>
             </a:lvl5pPr>
-            <a:lvl6pPr indent="-374650" lvl="5" marL="2743200">
+            <a:lvl6pPr marL="2743200" lvl="5" indent="-374650">
               <a:spcBef>
                 <a:spcPts val="0"/>
               </a:spcBef>
@@ -3454,7 +3566,7 @@
               <a:buChar char="■"/>
               <a:defRPr sz="2300"/>
             </a:lvl6pPr>
-            <a:lvl7pPr indent="-374650" lvl="6" marL="3200400">
+            <a:lvl7pPr marL="3200400" lvl="6" indent="-374650">
               <a:spcBef>
                 <a:spcPts val="0"/>
               </a:spcBef>
@@ -3465,7 +3577,7 @@
               <a:buChar char="●"/>
               <a:defRPr sz="2300"/>
             </a:lvl7pPr>
-            <a:lvl8pPr indent="-374650" lvl="7" marL="3657600">
+            <a:lvl8pPr marL="3657600" lvl="7" indent="-374650">
               <a:spcBef>
                 <a:spcPts val="0"/>
               </a:spcBef>
@@ -3476,7 +3588,7 @@
               <a:buChar char="○"/>
               <a:defRPr sz="2300"/>
             </a:lvl8pPr>
-            <a:lvl9pPr indent="-374650" lvl="8" marL="4114800">
+            <a:lvl9pPr marL="4114800" lvl="8" indent="-374650">
               <a:spcBef>
                 <a:spcPts val="0"/>
               </a:spcBef>
@@ -3488,15 +3600,19 @@
               <a:defRPr sz="2300"/>
             </a:lvl9pPr>
           </a:lstStyle>
-          <a:p/>
+          <a:p>
+            <a:endParaRPr/>
+          </a:p>
         </p:txBody>
       </p:sp>
       <p:sp>
         <p:nvSpPr>
           <p:cNvPr id="23" name="Google Shape;23;p5"/>
-          <p:cNvSpPr txBox="1"/>
+          <p:cNvSpPr txBox="1">
+            <a:spLocks noGrp="1"/>
+          </p:cNvSpPr>
           <p:nvPr>
-            <p:ph idx="2" type="body"/>
+            <p:ph type="body" idx="2"/>
           </p:nvPr>
         </p:nvSpPr>
         <p:spPr>
@@ -3509,11 +3625,11 @@
           </a:prstGeom>
         </p:spPr>
         <p:txBody>
-          <a:bodyPr anchorCtr="0" anchor="t" bIns="176925" lIns="176925" spcFirstLastPara="1" rIns="176925" wrap="square" tIns="176925">
+          <a:bodyPr spcFirstLastPara="1" wrap="square" lIns="176925" tIns="176925" rIns="176925" bIns="176925" anchor="t" anchorCtr="0">
             <a:normAutofit/>
           </a:bodyPr>
           <a:lstStyle>
-            <a:lvl1pPr indent="-400050" lvl="0" marL="457200">
+            <a:lvl1pPr marL="457200" lvl="0" indent="-400050">
               <a:spcBef>
                 <a:spcPts val="0"/>
               </a:spcBef>
@@ -3524,7 +3640,7 @@
               <a:buChar char="●"/>
               <a:defRPr sz="2700"/>
             </a:lvl1pPr>
-            <a:lvl2pPr indent="-374650" lvl="1" marL="914400">
+            <a:lvl2pPr marL="914400" lvl="1" indent="-374650">
               <a:spcBef>
                 <a:spcPts val="0"/>
               </a:spcBef>
@@ -3535,7 +3651,7 @@
               <a:buChar char="○"/>
               <a:defRPr sz="2300"/>
             </a:lvl2pPr>
-            <a:lvl3pPr indent="-374650" lvl="2" marL="1371600">
+            <a:lvl3pPr marL="1371600" lvl="2" indent="-374650">
               <a:spcBef>
                 <a:spcPts val="0"/>
               </a:spcBef>
@@ -3546,7 +3662,7 @@
               <a:buChar char="■"/>
               <a:defRPr sz="2300"/>
             </a:lvl3pPr>
-            <a:lvl4pPr indent="-374650" lvl="3" marL="1828800">
+            <a:lvl4pPr marL="1828800" lvl="3" indent="-374650">
               <a:spcBef>
                 <a:spcPts val="0"/>
               </a:spcBef>
@@ -3557,7 +3673,7 @@
               <a:buChar char="●"/>
               <a:defRPr sz="2300"/>
             </a:lvl4pPr>
-            <a:lvl5pPr indent="-374650" lvl="4" marL="2286000">
+            <a:lvl5pPr marL="2286000" lvl="4" indent="-374650">
               <a:spcBef>
                 <a:spcPts val="0"/>
               </a:spcBef>
@@ -3568,7 +3684,7 @@
               <a:buChar char="○"/>
               <a:defRPr sz="2300"/>
             </a:lvl5pPr>
-            <a:lvl6pPr indent="-374650" lvl="5" marL="2743200">
+            <a:lvl6pPr marL="2743200" lvl="5" indent="-374650">
               <a:spcBef>
                 <a:spcPts val="0"/>
               </a:spcBef>
@@ -3579,7 +3695,7 @@
               <a:buChar char="■"/>
               <a:defRPr sz="2300"/>
             </a:lvl6pPr>
-            <a:lvl7pPr indent="-374650" lvl="6" marL="3200400">
+            <a:lvl7pPr marL="3200400" lvl="6" indent="-374650">
               <a:spcBef>
                 <a:spcPts val="0"/>
               </a:spcBef>
@@ -3590,7 +3706,7 @@
               <a:buChar char="●"/>
               <a:defRPr sz="2300"/>
             </a:lvl7pPr>
-            <a:lvl8pPr indent="-374650" lvl="7" marL="3657600">
+            <a:lvl8pPr marL="3657600" lvl="7" indent="-374650">
               <a:spcBef>
                 <a:spcPts val="0"/>
               </a:spcBef>
@@ -3601,7 +3717,7 @@
               <a:buChar char="○"/>
               <a:defRPr sz="2300"/>
             </a:lvl8pPr>
-            <a:lvl9pPr indent="-374650" lvl="8" marL="4114800">
+            <a:lvl9pPr marL="4114800" lvl="8" indent="-374650">
               <a:spcBef>
                 <a:spcPts val="0"/>
               </a:spcBef>
@@ -3613,15 +3729,19 @@
               <a:defRPr sz="2300"/>
             </a:lvl9pPr>
           </a:lstStyle>
-          <a:p/>
+          <a:p>
+            <a:endParaRPr/>
+          </a:p>
         </p:txBody>
       </p:sp>
       <p:sp>
         <p:nvSpPr>
           <p:cNvPr id="24" name="Google Shape;24;p5"/>
-          <p:cNvSpPr txBox="1"/>
+          <p:cNvSpPr txBox="1">
+            <a:spLocks noGrp="1"/>
+          </p:cNvSpPr>
           <p:nvPr>
-            <p:ph idx="12" type="sldNum"/>
+            <p:ph type="sldNum" idx="12"/>
           </p:nvPr>
         </p:nvSpPr>
         <p:spPr>
@@ -3634,7 +3754,7 @@
           </a:prstGeom>
         </p:spPr>
         <p:txBody>
-          <a:bodyPr anchorCtr="0" anchor="ctr" bIns="176925" lIns="176925" spcFirstLastPara="1" rIns="176925" wrap="square" tIns="176925">
+          <a:bodyPr spcFirstLastPara="1" wrap="square" lIns="176925" tIns="176925" rIns="176925" bIns="176925" anchor="ctr" anchorCtr="0">
             <a:normAutofit/>
           </a:bodyPr>
           <a:lstStyle>
@@ -3676,7 +3796,7 @@
             </a:lvl9pPr>
           </a:lstStyle>
           <a:p>
-            <a:pPr indent="0" lvl="0" marL="0" rtl="0" algn="r">
+            <a:pPr marL="0" lvl="0" indent="0" algn="r" rtl="0">
               <a:spcBef>
                 <a:spcPts val="0"/>
               </a:spcBef>
@@ -3702,11 +3822,11 @@
 </file>
 
 <file path=ppt/slideLayouts/slideLayout5.xml><?xml version="1.0" encoding="utf-8"?>
-<p:sldLayout xmlns:a="http://schemas.openxmlformats.org/drawingml/2006/main" xmlns:r="http://schemas.openxmlformats.org/officeDocument/2006/relationships" xmlns:mc="http://schemas.openxmlformats.org/markup-compatibility/2006" xmlns:mv="urn:schemas-microsoft-com:mac:vml" xmlns:p="http://schemas.openxmlformats.org/presentationml/2006/main" xmlns:c="http://schemas.openxmlformats.org/drawingml/2006/chart" xmlns:dgm="http://schemas.openxmlformats.org/drawingml/2006/diagram" xmlns:o="urn:schemas-microsoft-com:office:office" xmlns:v="urn:schemas-microsoft-com:vml" xmlns:pvml="urn:schemas-microsoft-com:office:powerpoint" xmlns:com="http://schemas.openxmlformats.org/drawingml/2006/compatibility" xmlns:p14="http://schemas.microsoft.com/office/powerpoint/2010/main" xmlns:p15="http://schemas.microsoft.com/office/powerpoint/2012/main" xmlns:ahyp="http://schemas.microsoft.com/office/drawing/2018/hyperlinkcolor" matchingName="Title only" type="titleOnly">
+<p:sldLayout xmlns:a="http://schemas.openxmlformats.org/drawingml/2006/main" xmlns:r="http://schemas.openxmlformats.org/officeDocument/2006/relationships" xmlns:p="http://schemas.openxmlformats.org/presentationml/2006/main" matchingName="Title only" type="titleOnly">
   <p:cSld name="TITLE_ONLY">
     <p:spTree>
       <p:nvGrpSpPr>
-        <p:cNvPr id="25" name="Shape 25"/>
+        <p:cNvPr id="1" name="Shape 25"/>
         <p:cNvGrpSpPr/>
         <p:nvPr/>
       </p:nvGrpSpPr>
@@ -3721,7 +3841,9 @@
       <p:sp>
         <p:nvSpPr>
           <p:cNvPr id="26" name="Google Shape;26;p6"/>
-          <p:cNvSpPr txBox="1"/>
+          <p:cNvSpPr txBox="1">
+            <a:spLocks noGrp="1"/>
+          </p:cNvSpPr>
           <p:nvPr>
             <p:ph type="title"/>
           </p:nvPr>
@@ -3736,7 +3858,7 @@
           </a:prstGeom>
         </p:spPr>
         <p:txBody>
-          <a:bodyPr anchorCtr="0" anchor="t" bIns="176925" lIns="176925" spcFirstLastPara="1" rIns="176925" wrap="square" tIns="176925">
+          <a:bodyPr spcFirstLastPara="1" wrap="square" lIns="176925" tIns="176925" rIns="176925" bIns="176925" anchor="t" anchorCtr="0">
             <a:normAutofit/>
           </a:bodyPr>
           <a:lstStyle>
@@ -3840,15 +3962,19 @@
               <a:defRPr/>
             </a:lvl9pPr>
           </a:lstStyle>
-          <a:p/>
+          <a:p>
+            <a:endParaRPr/>
+          </a:p>
         </p:txBody>
       </p:sp>
       <p:sp>
         <p:nvSpPr>
           <p:cNvPr id="27" name="Google Shape;27;p6"/>
-          <p:cNvSpPr txBox="1"/>
+          <p:cNvSpPr txBox="1">
+            <a:spLocks noGrp="1"/>
+          </p:cNvSpPr>
           <p:nvPr>
-            <p:ph idx="12" type="sldNum"/>
+            <p:ph type="sldNum" idx="12"/>
           </p:nvPr>
         </p:nvSpPr>
         <p:spPr>
@@ -3861,7 +3987,7 @@
           </a:prstGeom>
         </p:spPr>
         <p:txBody>
-          <a:bodyPr anchorCtr="0" anchor="ctr" bIns="176925" lIns="176925" spcFirstLastPara="1" rIns="176925" wrap="square" tIns="176925">
+          <a:bodyPr spcFirstLastPara="1" wrap="square" lIns="176925" tIns="176925" rIns="176925" bIns="176925" anchor="ctr" anchorCtr="0">
             <a:normAutofit/>
           </a:bodyPr>
           <a:lstStyle>
@@ -3903,7 +4029,7 @@
             </a:lvl9pPr>
           </a:lstStyle>
           <a:p>
-            <a:pPr indent="0" lvl="0" marL="0" rtl="0" algn="r">
+            <a:pPr marL="0" lvl="0" indent="0" algn="r" rtl="0">
               <a:spcBef>
                 <a:spcPts val="0"/>
               </a:spcBef>
@@ -3929,11 +4055,11 @@
 </file>
 
 <file path=ppt/slideLayouts/slideLayout6.xml><?xml version="1.0" encoding="utf-8"?>
-<p:sldLayout xmlns:a="http://schemas.openxmlformats.org/drawingml/2006/main" xmlns:r="http://schemas.openxmlformats.org/officeDocument/2006/relationships" xmlns:mc="http://schemas.openxmlformats.org/markup-compatibility/2006" xmlns:mv="urn:schemas-microsoft-com:mac:vml" xmlns:p="http://schemas.openxmlformats.org/presentationml/2006/main" xmlns:c="http://schemas.openxmlformats.org/drawingml/2006/chart" xmlns:dgm="http://schemas.openxmlformats.org/drawingml/2006/diagram" xmlns:o="urn:schemas-microsoft-com:office:office" xmlns:v="urn:schemas-microsoft-com:vml" xmlns:pvml="urn:schemas-microsoft-com:office:powerpoint" xmlns:com="http://schemas.openxmlformats.org/drawingml/2006/compatibility" xmlns:p14="http://schemas.microsoft.com/office/powerpoint/2010/main" xmlns:p15="http://schemas.microsoft.com/office/powerpoint/2012/main" xmlns:ahyp="http://schemas.microsoft.com/office/drawing/2018/hyperlinkcolor" matchingName="One column text">
+<p:sldLayout xmlns:a="http://schemas.openxmlformats.org/drawingml/2006/main" xmlns:r="http://schemas.openxmlformats.org/officeDocument/2006/relationships" xmlns:p="http://schemas.openxmlformats.org/presentationml/2006/main" matchingName="One column text">
   <p:cSld name="ONE_COLUMN_TEXT">
     <p:spTree>
       <p:nvGrpSpPr>
-        <p:cNvPr id="28" name="Shape 28"/>
+        <p:cNvPr id="1" name="Shape 28"/>
         <p:cNvGrpSpPr/>
         <p:nvPr/>
       </p:nvGrpSpPr>
@@ -3948,7 +4074,9 @@
       <p:sp>
         <p:nvSpPr>
           <p:cNvPr id="29" name="Google Shape;29;p7"/>
-          <p:cNvSpPr txBox="1"/>
+          <p:cNvSpPr txBox="1">
+            <a:spLocks noGrp="1"/>
+          </p:cNvSpPr>
           <p:nvPr>
             <p:ph type="title"/>
           </p:nvPr>
@@ -3963,7 +4091,7 @@
           </a:prstGeom>
         </p:spPr>
         <p:txBody>
-          <a:bodyPr anchorCtr="0" anchor="b" bIns="176925" lIns="176925" spcFirstLastPara="1" rIns="176925" wrap="square" tIns="176925">
+          <a:bodyPr spcFirstLastPara="1" wrap="square" lIns="176925" tIns="176925" rIns="176925" bIns="176925" anchor="b" anchorCtr="0">
             <a:normAutofit/>
           </a:bodyPr>
           <a:lstStyle>
@@ -4067,15 +4195,19 @@
               <a:defRPr sz="4600"/>
             </a:lvl9pPr>
           </a:lstStyle>
-          <a:p/>
+          <a:p>
+            <a:endParaRPr/>
+          </a:p>
         </p:txBody>
       </p:sp>
       <p:sp>
         <p:nvSpPr>
           <p:cNvPr id="30" name="Google Shape;30;p7"/>
-          <p:cNvSpPr txBox="1"/>
+          <p:cNvSpPr txBox="1">
+            <a:spLocks noGrp="1"/>
+          </p:cNvSpPr>
           <p:nvPr>
-            <p:ph idx="1" type="body"/>
+            <p:ph type="body" idx="1"/>
           </p:nvPr>
         </p:nvSpPr>
         <p:spPr>
@@ -4088,11 +4220,11 @@
           </a:prstGeom>
         </p:spPr>
         <p:txBody>
-          <a:bodyPr anchorCtr="0" anchor="t" bIns="176925" lIns="176925" spcFirstLastPara="1" rIns="176925" wrap="square" tIns="176925">
+          <a:bodyPr spcFirstLastPara="1" wrap="square" lIns="176925" tIns="176925" rIns="176925" bIns="176925" anchor="t" anchorCtr="0">
             <a:normAutofit/>
           </a:bodyPr>
           <a:lstStyle>
-            <a:lvl1pPr indent="-374650" lvl="0" marL="457200">
+            <a:lvl1pPr marL="457200" lvl="0" indent="-374650">
               <a:spcBef>
                 <a:spcPts val="0"/>
               </a:spcBef>
@@ -4103,7 +4235,7 @@
               <a:buChar char="●"/>
               <a:defRPr sz="2300"/>
             </a:lvl1pPr>
-            <a:lvl2pPr indent="-374650" lvl="1" marL="914400">
+            <a:lvl2pPr marL="914400" lvl="1" indent="-374650">
               <a:spcBef>
                 <a:spcPts val="0"/>
               </a:spcBef>
@@ -4114,7 +4246,7 @@
               <a:buChar char="○"/>
               <a:defRPr sz="2300"/>
             </a:lvl2pPr>
-            <a:lvl3pPr indent="-374650" lvl="2" marL="1371600">
+            <a:lvl3pPr marL="1371600" lvl="2" indent="-374650">
               <a:spcBef>
                 <a:spcPts val="0"/>
               </a:spcBef>
@@ -4125,7 +4257,7 @@
               <a:buChar char="■"/>
               <a:defRPr sz="2300"/>
             </a:lvl3pPr>
-            <a:lvl4pPr indent="-374650" lvl="3" marL="1828800">
+            <a:lvl4pPr marL="1828800" lvl="3" indent="-374650">
               <a:spcBef>
                 <a:spcPts val="0"/>
               </a:spcBef>
@@ -4136,7 +4268,7 @@
               <a:buChar char="●"/>
               <a:defRPr sz="2300"/>
             </a:lvl4pPr>
-            <a:lvl5pPr indent="-374650" lvl="4" marL="2286000">
+            <a:lvl5pPr marL="2286000" lvl="4" indent="-374650">
               <a:spcBef>
                 <a:spcPts val="0"/>
               </a:spcBef>
@@ -4147,7 +4279,7 @@
               <a:buChar char="○"/>
               <a:defRPr sz="2300"/>
             </a:lvl5pPr>
-            <a:lvl6pPr indent="-374650" lvl="5" marL="2743200">
+            <a:lvl6pPr marL="2743200" lvl="5" indent="-374650">
               <a:spcBef>
                 <a:spcPts val="0"/>
               </a:spcBef>
@@ -4158,7 +4290,7 @@
               <a:buChar char="■"/>
               <a:defRPr sz="2300"/>
             </a:lvl6pPr>
-            <a:lvl7pPr indent="-374650" lvl="6" marL="3200400">
+            <a:lvl7pPr marL="3200400" lvl="6" indent="-374650">
               <a:spcBef>
                 <a:spcPts val="0"/>
               </a:spcBef>
@@ -4169,7 +4301,7 @@
               <a:buChar char="●"/>
               <a:defRPr sz="2300"/>
             </a:lvl7pPr>
-            <a:lvl8pPr indent="-374650" lvl="7" marL="3657600">
+            <a:lvl8pPr marL="3657600" lvl="7" indent="-374650">
               <a:spcBef>
                 <a:spcPts val="0"/>
               </a:spcBef>
@@ -4180,7 +4312,7 @@
               <a:buChar char="○"/>
               <a:defRPr sz="2300"/>
             </a:lvl8pPr>
-            <a:lvl9pPr indent="-374650" lvl="8" marL="4114800">
+            <a:lvl9pPr marL="4114800" lvl="8" indent="-374650">
               <a:spcBef>
                 <a:spcPts val="0"/>
               </a:spcBef>
@@ -4192,15 +4324,19 @@
               <a:defRPr sz="2300"/>
             </a:lvl9pPr>
           </a:lstStyle>
-          <a:p/>
+          <a:p>
+            <a:endParaRPr/>
+          </a:p>
         </p:txBody>
       </p:sp>
       <p:sp>
         <p:nvSpPr>
           <p:cNvPr id="31" name="Google Shape;31;p7"/>
-          <p:cNvSpPr txBox="1"/>
+          <p:cNvSpPr txBox="1">
+            <a:spLocks noGrp="1"/>
+          </p:cNvSpPr>
           <p:nvPr>
-            <p:ph idx="12" type="sldNum"/>
+            <p:ph type="sldNum" idx="12"/>
           </p:nvPr>
         </p:nvSpPr>
         <p:spPr>
@@ -4213,7 +4349,7 @@
           </a:prstGeom>
         </p:spPr>
         <p:txBody>
-          <a:bodyPr anchorCtr="0" anchor="ctr" bIns="176925" lIns="176925" spcFirstLastPara="1" rIns="176925" wrap="square" tIns="176925">
+          <a:bodyPr spcFirstLastPara="1" wrap="square" lIns="176925" tIns="176925" rIns="176925" bIns="176925" anchor="ctr" anchorCtr="0">
             <a:normAutofit/>
           </a:bodyPr>
           <a:lstStyle>
@@ -4255,7 +4391,7 @@
             </a:lvl9pPr>
           </a:lstStyle>
           <a:p>
-            <a:pPr indent="0" lvl="0" marL="0" rtl="0" algn="r">
+            <a:pPr marL="0" lvl="0" indent="0" algn="r" rtl="0">
               <a:spcBef>
                 <a:spcPts val="0"/>
               </a:spcBef>
@@ -4281,11 +4417,11 @@
 </file>
 
 <file path=ppt/slideLayouts/slideLayout7.xml><?xml version="1.0" encoding="utf-8"?>
-<p:sldLayout xmlns:a="http://schemas.openxmlformats.org/drawingml/2006/main" xmlns:r="http://schemas.openxmlformats.org/officeDocument/2006/relationships" xmlns:mc="http://schemas.openxmlformats.org/markup-compatibility/2006" xmlns:mv="urn:schemas-microsoft-com:mac:vml" xmlns:p="http://schemas.openxmlformats.org/presentationml/2006/main" xmlns:c="http://schemas.openxmlformats.org/drawingml/2006/chart" xmlns:dgm="http://schemas.openxmlformats.org/drawingml/2006/diagram" xmlns:o="urn:schemas-microsoft-com:office:office" xmlns:v="urn:schemas-microsoft-com:vml" xmlns:pvml="urn:schemas-microsoft-com:office:powerpoint" xmlns:com="http://schemas.openxmlformats.org/drawingml/2006/compatibility" xmlns:p14="http://schemas.microsoft.com/office/powerpoint/2010/main" xmlns:p15="http://schemas.microsoft.com/office/powerpoint/2012/main" xmlns:ahyp="http://schemas.microsoft.com/office/drawing/2018/hyperlinkcolor" matchingName="Main point">
+<p:sldLayout xmlns:a="http://schemas.openxmlformats.org/drawingml/2006/main" xmlns:r="http://schemas.openxmlformats.org/officeDocument/2006/relationships" xmlns:p="http://schemas.openxmlformats.org/presentationml/2006/main" matchingName="Main point">
   <p:cSld name="MAIN_POINT">
     <p:spTree>
       <p:nvGrpSpPr>
-        <p:cNvPr id="32" name="Shape 32"/>
+        <p:cNvPr id="1" name="Shape 32"/>
         <p:cNvGrpSpPr/>
         <p:nvPr/>
       </p:nvGrpSpPr>
@@ -4300,7 +4436,9 @@
       <p:sp>
         <p:nvSpPr>
           <p:cNvPr id="33" name="Google Shape;33;p8"/>
-          <p:cNvSpPr txBox="1"/>
+          <p:cNvSpPr txBox="1">
+            <a:spLocks noGrp="1"/>
+          </p:cNvSpPr>
           <p:nvPr>
             <p:ph type="title"/>
           </p:nvPr>
@@ -4315,7 +4453,7 @@
           </a:prstGeom>
         </p:spPr>
         <p:txBody>
-          <a:bodyPr anchorCtr="0" anchor="ctr" bIns="176925" lIns="176925" spcFirstLastPara="1" rIns="176925" wrap="square" tIns="176925">
+          <a:bodyPr spcFirstLastPara="1" wrap="square" lIns="176925" tIns="176925" rIns="176925" bIns="176925" anchor="ctr" anchorCtr="0">
             <a:normAutofit/>
           </a:bodyPr>
           <a:lstStyle>
@@ -4419,15 +4557,19 @@
               <a:defRPr sz="9300"/>
             </a:lvl9pPr>
           </a:lstStyle>
-          <a:p/>
+          <a:p>
+            <a:endParaRPr/>
+          </a:p>
         </p:txBody>
       </p:sp>
       <p:sp>
         <p:nvSpPr>
           <p:cNvPr id="34" name="Google Shape;34;p8"/>
-          <p:cNvSpPr txBox="1"/>
+          <p:cNvSpPr txBox="1">
+            <a:spLocks noGrp="1"/>
+          </p:cNvSpPr>
           <p:nvPr>
-            <p:ph idx="12" type="sldNum"/>
+            <p:ph type="sldNum" idx="12"/>
           </p:nvPr>
         </p:nvSpPr>
         <p:spPr>
@@ -4440,7 +4582,7 @@
           </a:prstGeom>
         </p:spPr>
         <p:txBody>
-          <a:bodyPr anchorCtr="0" anchor="ctr" bIns="176925" lIns="176925" spcFirstLastPara="1" rIns="176925" wrap="square" tIns="176925">
+          <a:bodyPr spcFirstLastPara="1" wrap="square" lIns="176925" tIns="176925" rIns="176925" bIns="176925" anchor="ctr" anchorCtr="0">
             <a:normAutofit/>
           </a:bodyPr>
           <a:lstStyle>
@@ -4482,7 +4624,7 @@
             </a:lvl9pPr>
           </a:lstStyle>
           <a:p>
-            <a:pPr indent="0" lvl="0" marL="0" rtl="0" algn="r">
+            <a:pPr marL="0" lvl="0" indent="0" algn="r" rtl="0">
               <a:spcBef>
                 <a:spcPts val="0"/>
               </a:spcBef>
@@ -4508,11 +4650,11 @@
 </file>
 
 <file path=ppt/slideLayouts/slideLayout8.xml><?xml version="1.0" encoding="utf-8"?>
-<p:sldLayout xmlns:a="http://schemas.openxmlformats.org/drawingml/2006/main" xmlns:r="http://schemas.openxmlformats.org/officeDocument/2006/relationships" xmlns:mc="http://schemas.openxmlformats.org/markup-compatibility/2006" xmlns:mv="urn:schemas-microsoft-com:mac:vml" xmlns:p="http://schemas.openxmlformats.org/presentationml/2006/main" xmlns:c="http://schemas.openxmlformats.org/drawingml/2006/chart" xmlns:dgm="http://schemas.openxmlformats.org/drawingml/2006/diagram" xmlns:o="urn:schemas-microsoft-com:office:office" xmlns:v="urn:schemas-microsoft-com:vml" xmlns:pvml="urn:schemas-microsoft-com:office:powerpoint" xmlns:com="http://schemas.openxmlformats.org/drawingml/2006/compatibility" xmlns:p14="http://schemas.microsoft.com/office/powerpoint/2010/main" xmlns:p15="http://schemas.microsoft.com/office/powerpoint/2012/main" xmlns:ahyp="http://schemas.microsoft.com/office/drawing/2018/hyperlinkcolor" matchingName="Section title and description">
+<p:sldLayout xmlns:a="http://schemas.openxmlformats.org/drawingml/2006/main" xmlns:r="http://schemas.openxmlformats.org/officeDocument/2006/relationships" xmlns:p="http://schemas.openxmlformats.org/presentationml/2006/main" matchingName="Section title and description">
   <p:cSld name="SECTION_TITLE_AND_DESCRIPTION">
     <p:spTree>
       <p:nvGrpSpPr>
-        <p:cNvPr id="35" name="Shape 35"/>
+        <p:cNvPr id="1" name="Shape 35"/>
         <p:cNvGrpSpPr/>
         <p:nvPr/>
       </p:nvGrpSpPr>
@@ -4546,12 +4688,12 @@
           </a:ln>
         </p:spPr>
         <p:txBody>
-          <a:bodyPr anchorCtr="0" anchor="ctr" bIns="176925" lIns="176925" spcFirstLastPara="1" rIns="176925" wrap="square" tIns="176925">
+          <a:bodyPr spcFirstLastPara="1" wrap="square" lIns="176925" tIns="176925" rIns="176925" bIns="176925" anchor="ctr" anchorCtr="0">
             <a:noAutofit/>
           </a:bodyPr>
           <a:lstStyle/>
           <a:p>
-            <a:pPr indent="0" lvl="0" marL="0" rtl="0" algn="l">
+            <a:pPr marL="0" lvl="0" indent="0" algn="l" rtl="0">
               <a:spcBef>
                 <a:spcPts val="0"/>
               </a:spcBef>
@@ -4560,9 +4702,6 @@
               </a:spcAft>
               <a:buNone/>
             </a:pPr>
-            <a:r>
-              <a:t/>
-            </a:r>
             <a:endParaRPr/>
           </a:p>
         </p:txBody>
@@ -4570,7 +4709,9 @@
       <p:sp>
         <p:nvSpPr>
           <p:cNvPr id="37" name="Google Shape;37;p9"/>
-          <p:cNvSpPr txBox="1"/>
+          <p:cNvSpPr txBox="1">
+            <a:spLocks noGrp="1"/>
+          </p:cNvSpPr>
           <p:nvPr>
             <p:ph type="title"/>
           </p:nvPr>
@@ -4585,7 +4726,7 @@
           </a:prstGeom>
         </p:spPr>
         <p:txBody>
-          <a:bodyPr anchorCtr="0" anchor="b" bIns="176925" lIns="176925" spcFirstLastPara="1" rIns="176925" wrap="square" tIns="176925">
+          <a:bodyPr spcFirstLastPara="1" wrap="square" lIns="176925" tIns="176925" rIns="176925" bIns="176925" anchor="b" anchorCtr="0">
             <a:normAutofit/>
           </a:bodyPr>
           <a:lstStyle>
@@ -4689,15 +4830,19 @@
               <a:defRPr sz="8100"/>
             </a:lvl9pPr>
           </a:lstStyle>
-          <a:p/>
+          <a:p>
+            <a:endParaRPr/>
+          </a:p>
         </p:txBody>
       </p:sp>
       <p:sp>
         <p:nvSpPr>
           <p:cNvPr id="38" name="Google Shape;38;p9"/>
-          <p:cNvSpPr txBox="1"/>
+          <p:cNvSpPr txBox="1">
+            <a:spLocks noGrp="1"/>
+          </p:cNvSpPr>
           <p:nvPr>
-            <p:ph idx="1" type="subTitle"/>
+            <p:ph type="subTitle" idx="1"/>
           </p:nvPr>
         </p:nvSpPr>
         <p:spPr>
@@ -4710,7 +4855,7 @@
           </a:prstGeom>
         </p:spPr>
         <p:txBody>
-          <a:bodyPr anchorCtr="0" anchor="t" bIns="176925" lIns="176925" spcFirstLastPara="1" rIns="176925" wrap="square" tIns="176925">
+          <a:bodyPr spcFirstLastPara="1" wrap="square" lIns="176925" tIns="176925" rIns="176925" bIns="176925" anchor="t" anchorCtr="0">
             <a:normAutofit/>
           </a:bodyPr>
           <a:lstStyle>
@@ -4841,15 +4986,19 @@
               <a:defRPr sz="4100"/>
             </a:lvl9pPr>
           </a:lstStyle>
-          <a:p/>
+          <a:p>
+            <a:endParaRPr/>
+          </a:p>
         </p:txBody>
       </p:sp>
       <p:sp>
         <p:nvSpPr>
           <p:cNvPr id="39" name="Google Shape;39;p9"/>
-          <p:cNvSpPr txBox="1"/>
+          <p:cNvSpPr txBox="1">
+            <a:spLocks noGrp="1"/>
+          </p:cNvSpPr>
           <p:nvPr>
-            <p:ph idx="2" type="body"/>
+            <p:ph type="body" idx="2"/>
           </p:nvPr>
         </p:nvSpPr>
         <p:spPr>
@@ -4862,11 +5011,11 @@
           </a:prstGeom>
         </p:spPr>
         <p:txBody>
-          <a:bodyPr anchorCtr="0" anchor="ctr" bIns="176925" lIns="176925" spcFirstLastPara="1" rIns="176925" wrap="square" tIns="176925">
+          <a:bodyPr spcFirstLastPara="1" wrap="square" lIns="176925" tIns="176925" rIns="176925" bIns="176925" anchor="ctr" anchorCtr="0">
             <a:normAutofit/>
           </a:bodyPr>
           <a:lstStyle>
-            <a:lvl1pPr indent="-450850" lvl="0" marL="457200">
+            <a:lvl1pPr marL="457200" lvl="0" indent="-450850">
               <a:spcBef>
                 <a:spcPts val="0"/>
               </a:spcBef>
@@ -4877,7 +5026,7 @@
               <a:buChar char="●"/>
               <a:defRPr/>
             </a:lvl1pPr>
-            <a:lvl2pPr indent="-400050" lvl="1" marL="914400">
+            <a:lvl2pPr marL="914400" lvl="1" indent="-400050">
               <a:spcBef>
                 <a:spcPts val="0"/>
               </a:spcBef>
@@ -4888,7 +5037,7 @@
               <a:buChar char="○"/>
               <a:defRPr/>
             </a:lvl2pPr>
-            <a:lvl3pPr indent="-400050" lvl="2" marL="1371600">
+            <a:lvl3pPr marL="1371600" lvl="2" indent="-400050">
               <a:spcBef>
                 <a:spcPts val="0"/>
               </a:spcBef>
@@ -4899,7 +5048,7 @@
               <a:buChar char="■"/>
               <a:defRPr/>
             </a:lvl3pPr>
-            <a:lvl4pPr indent="-400050" lvl="3" marL="1828800">
+            <a:lvl4pPr marL="1828800" lvl="3" indent="-400050">
               <a:spcBef>
                 <a:spcPts val="0"/>
               </a:spcBef>
@@ -4910,7 +5059,7 @@
               <a:buChar char="●"/>
               <a:defRPr/>
             </a:lvl4pPr>
-            <a:lvl5pPr indent="-400050" lvl="4" marL="2286000">
+            <a:lvl5pPr marL="2286000" lvl="4" indent="-400050">
               <a:spcBef>
                 <a:spcPts val="0"/>
               </a:spcBef>
@@ -4921,7 +5070,7 @@
               <a:buChar char="○"/>
               <a:defRPr/>
             </a:lvl5pPr>
-            <a:lvl6pPr indent="-400050" lvl="5" marL="2743200">
+            <a:lvl6pPr marL="2743200" lvl="5" indent="-400050">
               <a:spcBef>
                 <a:spcPts val="0"/>
               </a:spcBef>
@@ -4932,7 +5081,7 @@
               <a:buChar char="■"/>
               <a:defRPr/>
             </a:lvl6pPr>
-            <a:lvl7pPr indent="-400050" lvl="6" marL="3200400">
+            <a:lvl7pPr marL="3200400" lvl="6" indent="-400050">
               <a:spcBef>
                 <a:spcPts val="0"/>
               </a:spcBef>
@@ -4943,7 +5092,7 @@
               <a:buChar char="●"/>
               <a:defRPr/>
             </a:lvl7pPr>
-            <a:lvl8pPr indent="-400050" lvl="7" marL="3657600">
+            <a:lvl8pPr marL="3657600" lvl="7" indent="-400050">
               <a:spcBef>
                 <a:spcPts val="0"/>
               </a:spcBef>
@@ -4954,7 +5103,7 @@
               <a:buChar char="○"/>
               <a:defRPr/>
             </a:lvl8pPr>
-            <a:lvl9pPr indent="-400050" lvl="8" marL="4114800">
+            <a:lvl9pPr marL="4114800" lvl="8" indent="-400050">
               <a:spcBef>
                 <a:spcPts val="0"/>
               </a:spcBef>
@@ -4966,15 +5115,19 @@
               <a:defRPr/>
             </a:lvl9pPr>
           </a:lstStyle>
-          <a:p/>
+          <a:p>
+            <a:endParaRPr/>
+          </a:p>
         </p:txBody>
       </p:sp>
       <p:sp>
         <p:nvSpPr>
           <p:cNvPr id="40" name="Google Shape;40;p9"/>
-          <p:cNvSpPr txBox="1"/>
+          <p:cNvSpPr txBox="1">
+            <a:spLocks noGrp="1"/>
+          </p:cNvSpPr>
           <p:nvPr>
-            <p:ph idx="12" type="sldNum"/>
+            <p:ph type="sldNum" idx="12"/>
           </p:nvPr>
         </p:nvSpPr>
         <p:spPr>
@@ -4987,7 +5140,7 @@
           </a:prstGeom>
         </p:spPr>
         <p:txBody>
-          <a:bodyPr anchorCtr="0" anchor="ctr" bIns="176925" lIns="176925" spcFirstLastPara="1" rIns="176925" wrap="square" tIns="176925">
+          <a:bodyPr spcFirstLastPara="1" wrap="square" lIns="176925" tIns="176925" rIns="176925" bIns="176925" anchor="ctr" anchorCtr="0">
             <a:normAutofit/>
           </a:bodyPr>
           <a:lstStyle>
@@ -5029,7 +5182,7 @@
             </a:lvl9pPr>
           </a:lstStyle>
           <a:p>
-            <a:pPr indent="0" lvl="0" marL="0" rtl="0" algn="r">
+            <a:pPr marL="0" lvl="0" indent="0" algn="r" rtl="0">
               <a:spcBef>
                 <a:spcPts val="0"/>
               </a:spcBef>
@@ -5055,11 +5208,11 @@
 </file>
 
 <file path=ppt/slideLayouts/slideLayout9.xml><?xml version="1.0" encoding="utf-8"?>
-<p:sldLayout xmlns:a="http://schemas.openxmlformats.org/drawingml/2006/main" xmlns:r="http://schemas.openxmlformats.org/officeDocument/2006/relationships" xmlns:mc="http://schemas.openxmlformats.org/markup-compatibility/2006" xmlns:mv="urn:schemas-microsoft-com:mac:vml" xmlns:p="http://schemas.openxmlformats.org/presentationml/2006/main" xmlns:c="http://schemas.openxmlformats.org/drawingml/2006/chart" xmlns:dgm="http://schemas.openxmlformats.org/drawingml/2006/diagram" xmlns:o="urn:schemas-microsoft-com:office:office" xmlns:v="urn:schemas-microsoft-com:vml" xmlns:pvml="urn:schemas-microsoft-com:office:powerpoint" xmlns:com="http://schemas.openxmlformats.org/drawingml/2006/compatibility" xmlns:p14="http://schemas.microsoft.com/office/powerpoint/2010/main" xmlns:p15="http://schemas.microsoft.com/office/powerpoint/2012/main" xmlns:ahyp="http://schemas.microsoft.com/office/drawing/2018/hyperlinkcolor" matchingName="Caption">
+<p:sldLayout xmlns:a="http://schemas.openxmlformats.org/drawingml/2006/main" xmlns:r="http://schemas.openxmlformats.org/officeDocument/2006/relationships" xmlns:p="http://schemas.openxmlformats.org/presentationml/2006/main" matchingName="Caption">
   <p:cSld name="CAPTION_ONLY">
     <p:spTree>
       <p:nvGrpSpPr>
-        <p:cNvPr id="41" name="Shape 41"/>
+        <p:cNvPr id="1" name="Shape 41"/>
         <p:cNvGrpSpPr/>
         <p:nvPr/>
       </p:nvGrpSpPr>
@@ -5074,9 +5227,11 @@
       <p:sp>
         <p:nvSpPr>
           <p:cNvPr id="42" name="Google Shape;42;p10"/>
-          <p:cNvSpPr txBox="1"/>
+          <p:cNvSpPr txBox="1">
+            <a:spLocks noGrp="1"/>
+          </p:cNvSpPr>
           <p:nvPr>
-            <p:ph idx="1" type="body"/>
+            <p:ph type="body" idx="1"/>
           </p:nvPr>
         </p:nvSpPr>
         <p:spPr>
@@ -5089,11 +5244,11 @@
           </a:prstGeom>
         </p:spPr>
         <p:txBody>
-          <a:bodyPr anchorCtr="0" anchor="ctr" bIns="176925" lIns="176925" spcFirstLastPara="1" rIns="176925" wrap="square" tIns="176925">
+          <a:bodyPr spcFirstLastPara="1" wrap="square" lIns="176925" tIns="176925" rIns="176925" bIns="176925" anchor="ctr" anchorCtr="0">
             <a:normAutofit/>
           </a:bodyPr>
           <a:lstStyle>
-            <a:lvl1pPr indent="-228600" lvl="0" marL="457200">
+            <a:lvl1pPr marL="457200" lvl="0" indent="-228600">
               <a:lnSpc>
                 <a:spcPct val="100000"/>
               </a:lnSpc>
@@ -5108,15 +5263,19 @@
               <a:defRPr/>
             </a:lvl1pPr>
           </a:lstStyle>
-          <a:p/>
+          <a:p>
+            <a:endParaRPr/>
+          </a:p>
         </p:txBody>
       </p:sp>
       <p:sp>
         <p:nvSpPr>
           <p:cNvPr id="43" name="Google Shape;43;p10"/>
-          <p:cNvSpPr txBox="1"/>
+          <p:cNvSpPr txBox="1">
+            <a:spLocks noGrp="1"/>
+          </p:cNvSpPr>
           <p:nvPr>
-            <p:ph idx="12" type="sldNum"/>
+            <p:ph type="sldNum" idx="12"/>
           </p:nvPr>
         </p:nvSpPr>
         <p:spPr>
@@ -5129,7 +5288,7 @@
           </a:prstGeom>
         </p:spPr>
         <p:txBody>
-          <a:bodyPr anchorCtr="0" anchor="ctr" bIns="176925" lIns="176925" spcFirstLastPara="1" rIns="176925" wrap="square" tIns="176925">
+          <a:bodyPr spcFirstLastPara="1" wrap="square" lIns="176925" tIns="176925" rIns="176925" bIns="176925" anchor="ctr" anchorCtr="0">
             <a:normAutofit/>
           </a:bodyPr>
           <a:lstStyle>
@@ -5171,7 +5330,7 @@
             </a:lvl9pPr>
           </a:lstStyle>
           <a:p>
-            <a:pPr indent="0" lvl="0" marL="0" rtl="0" algn="r">
+            <a:pPr marL="0" lvl="0" indent="0" algn="r" rtl="0">
               <a:spcBef>
                 <a:spcPts val="0"/>
               </a:spcBef>
@@ -5197,18 +5356,19 @@
 </file>
 
 <file path=ppt/slideMasters/slideMaster1.xml><?xml version="1.0" encoding="utf-8"?>
-<p:sldMaster xmlns:a="http://schemas.openxmlformats.org/drawingml/2006/main" xmlns:r="http://schemas.openxmlformats.org/officeDocument/2006/relationships" xmlns:mc="http://schemas.openxmlformats.org/markup-compatibility/2006" xmlns:mv="urn:schemas-microsoft-com:mac:vml" xmlns:p="http://schemas.openxmlformats.org/presentationml/2006/main" xmlns:c="http://schemas.openxmlformats.org/drawingml/2006/chart" xmlns:dgm="http://schemas.openxmlformats.org/drawingml/2006/diagram" xmlns:o="urn:schemas-microsoft-com:office:office" xmlns:v="urn:schemas-microsoft-com:vml" xmlns:pvml="urn:schemas-microsoft-com:office:powerpoint" xmlns:com="http://schemas.openxmlformats.org/drawingml/2006/compatibility" xmlns:p14="http://schemas.microsoft.com/office/powerpoint/2010/main" xmlns:p15="http://schemas.microsoft.com/office/powerpoint/2012/main" xmlns:ahyp="http://schemas.microsoft.com/office/drawing/2018/hyperlinkcolor">
+<p:sldMaster xmlns:a="http://schemas.openxmlformats.org/drawingml/2006/main" xmlns:r="http://schemas.openxmlformats.org/officeDocument/2006/relationships" xmlns:p="http://schemas.openxmlformats.org/presentationml/2006/main">
   <p:cSld name="simple-light-2">
     <p:bg>
       <p:bgPr>
         <a:solidFill>
           <a:schemeClr val="lt1"/>
         </a:solidFill>
+        <a:effectLst/>
       </p:bgPr>
     </p:bg>
     <p:spTree>
       <p:nvGrpSpPr>
-        <p:cNvPr id="5" name="Shape 5"/>
+        <p:cNvPr id="1" name="Shape 5"/>
         <p:cNvGrpSpPr/>
         <p:nvPr/>
       </p:nvGrpSpPr>
@@ -5223,7 +5383,9 @@
       <p:sp>
         <p:nvSpPr>
           <p:cNvPr id="6" name="Google Shape;6;p1"/>
-          <p:cNvSpPr txBox="1"/>
+          <p:cNvSpPr txBox="1">
+            <a:spLocks noGrp="1"/>
+          </p:cNvSpPr>
           <p:nvPr>
             <p:ph type="title"/>
           </p:nvPr>
@@ -5242,7 +5404,7 @@
           </a:ln>
         </p:spPr>
         <p:txBody>
-          <a:bodyPr anchorCtr="0" anchor="t" bIns="176925" lIns="176925" spcFirstLastPara="1" rIns="176925" wrap="square" tIns="176925">
+          <a:bodyPr spcFirstLastPara="1" wrap="square" lIns="176925" tIns="176925" rIns="176925" bIns="176925" anchor="t" anchorCtr="0">
             <a:normAutofit/>
           </a:bodyPr>
           <a:lstStyle>
@@ -5409,15 +5571,19 @@
               </a:defRPr>
             </a:lvl9pPr>
           </a:lstStyle>
-          <a:p/>
+          <a:p>
+            <a:endParaRPr/>
+          </a:p>
         </p:txBody>
       </p:sp>
       <p:sp>
         <p:nvSpPr>
           <p:cNvPr id="7" name="Google Shape;7;p1"/>
-          <p:cNvSpPr txBox="1"/>
+          <p:cNvSpPr txBox="1">
+            <a:spLocks noGrp="1"/>
+          </p:cNvSpPr>
           <p:nvPr>
-            <p:ph idx="1" type="body"/>
+            <p:ph type="body" idx="1"/>
           </p:nvPr>
         </p:nvSpPr>
         <p:spPr>
@@ -5434,11 +5600,11 @@
           </a:ln>
         </p:spPr>
         <p:txBody>
-          <a:bodyPr anchorCtr="0" anchor="t" bIns="176925" lIns="176925" spcFirstLastPara="1" rIns="176925" wrap="square" tIns="176925">
+          <a:bodyPr spcFirstLastPara="1" wrap="square" lIns="176925" tIns="176925" rIns="176925" bIns="176925" anchor="t" anchorCtr="0">
             <a:normAutofit/>
           </a:bodyPr>
           <a:lstStyle>
-            <a:lvl1pPr indent="-450850" lvl="0" marL="457200">
+            <a:lvl1pPr marL="457200" lvl="0" indent="-450850">
               <a:lnSpc>
                 <a:spcPct val="115000"/>
               </a:lnSpc>
@@ -5459,7 +5625,7 @@
                 </a:solidFill>
               </a:defRPr>
             </a:lvl1pPr>
-            <a:lvl2pPr indent="-400050" lvl="1" marL="914400">
+            <a:lvl2pPr marL="914400" lvl="1" indent="-400050">
               <a:lnSpc>
                 <a:spcPct val="115000"/>
               </a:lnSpc>
@@ -5480,7 +5646,7 @@
                 </a:solidFill>
               </a:defRPr>
             </a:lvl2pPr>
-            <a:lvl3pPr indent="-400050" lvl="2" marL="1371600">
+            <a:lvl3pPr marL="1371600" lvl="2" indent="-400050">
               <a:lnSpc>
                 <a:spcPct val="115000"/>
               </a:lnSpc>
@@ -5501,7 +5667,7 @@
                 </a:solidFill>
               </a:defRPr>
             </a:lvl3pPr>
-            <a:lvl4pPr indent="-400050" lvl="3" marL="1828800">
+            <a:lvl4pPr marL="1828800" lvl="3" indent="-400050">
               <a:lnSpc>
                 <a:spcPct val="115000"/>
               </a:lnSpc>
@@ -5522,7 +5688,7 @@
                 </a:solidFill>
               </a:defRPr>
             </a:lvl4pPr>
-            <a:lvl5pPr indent="-400050" lvl="4" marL="2286000">
+            <a:lvl5pPr marL="2286000" lvl="4" indent="-400050">
               <a:lnSpc>
                 <a:spcPct val="115000"/>
               </a:lnSpc>
@@ -5543,7 +5709,7 @@
                 </a:solidFill>
               </a:defRPr>
             </a:lvl5pPr>
-            <a:lvl6pPr indent="-400050" lvl="5" marL="2743200">
+            <a:lvl6pPr marL="2743200" lvl="5" indent="-400050">
               <a:lnSpc>
                 <a:spcPct val="115000"/>
               </a:lnSpc>
@@ -5564,7 +5730,7 @@
                 </a:solidFill>
               </a:defRPr>
             </a:lvl6pPr>
-            <a:lvl7pPr indent="-400050" lvl="6" marL="3200400">
+            <a:lvl7pPr marL="3200400" lvl="6" indent="-400050">
               <a:lnSpc>
                 <a:spcPct val="115000"/>
               </a:lnSpc>
@@ -5585,7 +5751,7 @@
                 </a:solidFill>
               </a:defRPr>
             </a:lvl7pPr>
-            <a:lvl8pPr indent="-400050" lvl="7" marL="3657600">
+            <a:lvl8pPr marL="3657600" lvl="7" indent="-400050">
               <a:lnSpc>
                 <a:spcPct val="115000"/>
               </a:lnSpc>
@@ -5606,7 +5772,7 @@
                 </a:solidFill>
               </a:defRPr>
             </a:lvl8pPr>
-            <a:lvl9pPr indent="-400050" lvl="8" marL="4114800">
+            <a:lvl9pPr marL="4114800" lvl="8" indent="-400050">
               <a:lnSpc>
                 <a:spcPct val="115000"/>
               </a:lnSpc>
@@ -5628,15 +5794,19 @@
               </a:defRPr>
             </a:lvl9pPr>
           </a:lstStyle>
-          <a:p/>
+          <a:p>
+            <a:endParaRPr/>
+          </a:p>
         </p:txBody>
       </p:sp>
       <p:sp>
         <p:nvSpPr>
           <p:cNvPr id="8" name="Google Shape;8;p1"/>
-          <p:cNvSpPr txBox="1"/>
+          <p:cNvSpPr txBox="1">
+            <a:spLocks noGrp="1"/>
+          </p:cNvSpPr>
           <p:nvPr>
-            <p:ph idx="12" type="sldNum"/>
+            <p:ph type="sldNum" idx="12"/>
           </p:nvPr>
         </p:nvSpPr>
         <p:spPr>
@@ -5653,7 +5823,7 @@
           </a:ln>
         </p:spPr>
         <p:txBody>
-          <a:bodyPr anchorCtr="0" anchor="ctr" bIns="176925" lIns="176925" spcFirstLastPara="1" rIns="176925" wrap="square" tIns="176925">
+          <a:bodyPr spcFirstLastPara="1" wrap="square" lIns="176925" tIns="176925" rIns="176925" bIns="176925" anchor="ctr" anchorCtr="0">
             <a:normAutofit/>
           </a:bodyPr>
           <a:lstStyle>
@@ -5731,7 +5901,7 @@
             </a:lvl9pPr>
           </a:lstStyle>
           <a:p>
-            <a:pPr indent="0" lvl="0" marL="0" rtl="0" algn="r">
+            <a:pPr marL="0" lvl="0" indent="0" algn="r" rtl="0">
               <a:spcBef>
                 <a:spcPts val="0"/>
               </a:spcBef>
@@ -5750,7 +5920,7 @@
       </p:sp>
     </p:spTree>
   </p:cSld>
-  <p:clrMap accent1="accent1" accent2="accent2" accent3="accent3" accent4="accent4" accent5="accent5" accent6="accent6" bg1="lt1" bg2="dk2" tx1="dk1" tx2="lt2" folHlink="folHlink" hlink="hlink"/>
+  <p:clrMap bg1="lt1" tx1="dk1" bg2="dk2" tx2="lt2" accent1="accent1" accent2="accent2" accent3="accent3" accent4="accent4" accent5="accent5" accent6="accent6" hlink="hlink" folHlink="folHlink"/>
   <p:sldLayoutIdLst>
     <p:sldLayoutId id="2147483648" r:id="rId1"/>
     <p:sldLayoutId id="2147483649" r:id="rId2"/>
@@ -5764,10 +5934,10 @@
     <p:sldLayoutId id="2147483657" r:id="rId10"/>
     <p:sldLayoutId id="2147483658" r:id="rId11"/>
   </p:sldLayoutIdLst>
-  <p:hf dt="0" ftr="0" hdr="0" sldNum="0"/>
+  <p:hf sldNum="0" hdr="0" ftr="0" dt="0"/>
   <p:txStyles>
     <p:titleStyle>
-      <a:defPPr lvl="0" marR="0" rtl="0" algn="l">
+      <a:defPPr marR="0" lvl="0" algn="l" rtl="0">
         <a:lnSpc>
           <a:spcPct val="100000"/>
         </a:lnSpc>
@@ -5778,7 +5948,7 @@
           <a:spcPts val="0"/>
         </a:spcAft>
       </a:defPPr>
-      <a:lvl1pPr lvl="0" marR="0" rtl="0" algn="l">
+      <a:lvl1pPr marR="0" lvl="0" algn="l" rtl="0">
         <a:lnSpc>
           <a:spcPct val="100000"/>
         </a:lnSpc>
@@ -5792,7 +5962,7 @@
           <a:srgbClr val="000000"/>
         </a:buClr>
         <a:buFont typeface="Arial"/>
-        <a:defRPr b="0" i="0" spc="0" sz="1400" u="none" cap="none" strike="noStrike">
+        <a:defRPr sz="1400" b="0" i="0" u="none" strike="noStrike" cap="none" spc="0">
           <a:solidFill>
             <a:srgbClr val="000000"/>
           </a:solidFill>
@@ -5802,7 +5972,7 @@
           <a:sym typeface="Arial"/>
         </a:defRPr>
       </a:lvl1pPr>
-      <a:lvl2pPr lvl="1" marR="0" rtl="0" algn="l">
+      <a:lvl2pPr marR="0" lvl="1" algn="l" rtl="0">
         <a:lnSpc>
           <a:spcPct val="100000"/>
         </a:lnSpc>
@@ -5816,7 +5986,7 @@
           <a:srgbClr val="000000"/>
         </a:buClr>
         <a:buFont typeface="Arial"/>
-        <a:defRPr b="0" i="0" spc="0" sz="1400" u="none" cap="none" strike="noStrike">
+        <a:defRPr sz="1400" b="0" i="0" u="none" strike="noStrike" cap="none" spc="0">
           <a:solidFill>
             <a:srgbClr val="000000"/>
           </a:solidFill>
@@ -5826,7 +5996,7 @@
           <a:sym typeface="Arial"/>
         </a:defRPr>
       </a:lvl2pPr>
-      <a:lvl3pPr lvl="2" marR="0" rtl="0" algn="l">
+      <a:lvl3pPr marR="0" lvl="2" algn="l" rtl="0">
         <a:lnSpc>
           <a:spcPct val="100000"/>
         </a:lnSpc>
@@ -5840,7 +6010,7 @@
           <a:srgbClr val="000000"/>
         </a:buClr>
         <a:buFont typeface="Arial"/>
-        <a:defRPr b="0" i="0" spc="0" sz="1400" u="none" cap="none" strike="noStrike">
+        <a:defRPr sz="1400" b="0" i="0" u="none" strike="noStrike" cap="none" spc="0">
           <a:solidFill>
             <a:srgbClr val="000000"/>
           </a:solidFill>
@@ -5850,7 +6020,7 @@
           <a:sym typeface="Arial"/>
         </a:defRPr>
       </a:lvl3pPr>
-      <a:lvl4pPr lvl="3" marR="0" rtl="0" algn="l">
+      <a:lvl4pPr marR="0" lvl="3" algn="l" rtl="0">
         <a:lnSpc>
           <a:spcPct val="100000"/>
         </a:lnSpc>
@@ -5864,7 +6034,7 @@
           <a:srgbClr val="000000"/>
         </a:buClr>
         <a:buFont typeface="Arial"/>
-        <a:defRPr b="0" i="0" spc="0" sz="1400" u="none" cap="none" strike="noStrike">
+        <a:defRPr sz="1400" b="0" i="0" u="none" strike="noStrike" cap="none" spc="0">
           <a:solidFill>
             <a:srgbClr val="000000"/>
           </a:solidFill>
@@ -5874,7 +6044,7 @@
           <a:sym typeface="Arial"/>
         </a:defRPr>
       </a:lvl4pPr>
-      <a:lvl5pPr lvl="4" marR="0" rtl="0" algn="l">
+      <a:lvl5pPr marR="0" lvl="4" algn="l" rtl="0">
         <a:lnSpc>
           <a:spcPct val="100000"/>
         </a:lnSpc>
@@ -5888,7 +6058,7 @@
           <a:srgbClr val="000000"/>
         </a:buClr>
         <a:buFont typeface="Arial"/>
-        <a:defRPr b="0" i="0" spc="0" sz="1400" u="none" cap="none" strike="noStrike">
+        <a:defRPr sz="1400" b="0" i="0" u="none" strike="noStrike" cap="none" spc="0">
           <a:solidFill>
             <a:srgbClr val="000000"/>
           </a:solidFill>
@@ -5898,7 +6068,7 @@
           <a:sym typeface="Arial"/>
         </a:defRPr>
       </a:lvl5pPr>
-      <a:lvl6pPr lvl="5" marR="0" rtl="0" algn="l">
+      <a:lvl6pPr marR="0" lvl="5" algn="l" rtl="0">
         <a:lnSpc>
           <a:spcPct val="100000"/>
         </a:lnSpc>
@@ -5912,7 +6082,7 @@
           <a:srgbClr val="000000"/>
         </a:buClr>
         <a:buFont typeface="Arial"/>
-        <a:defRPr b="0" i="0" spc="0" sz="1400" u="none" cap="none" strike="noStrike">
+        <a:defRPr sz="1400" b="0" i="0" u="none" strike="noStrike" cap="none" spc="0">
           <a:solidFill>
             <a:srgbClr val="000000"/>
           </a:solidFill>
@@ -5922,7 +6092,7 @@
           <a:sym typeface="Arial"/>
         </a:defRPr>
       </a:lvl6pPr>
-      <a:lvl7pPr lvl="6" marR="0" rtl="0" algn="l">
+      <a:lvl7pPr marR="0" lvl="6" algn="l" rtl="0">
         <a:lnSpc>
           <a:spcPct val="100000"/>
         </a:lnSpc>
@@ -5936,7 +6106,7 @@
           <a:srgbClr val="000000"/>
         </a:buClr>
         <a:buFont typeface="Arial"/>
-        <a:defRPr b="0" i="0" spc="0" sz="1400" u="none" cap="none" strike="noStrike">
+        <a:defRPr sz="1400" b="0" i="0" u="none" strike="noStrike" cap="none" spc="0">
           <a:solidFill>
             <a:srgbClr val="000000"/>
           </a:solidFill>
@@ -5946,7 +6116,7 @@
           <a:sym typeface="Arial"/>
         </a:defRPr>
       </a:lvl7pPr>
-      <a:lvl8pPr lvl="7" marR="0" rtl="0" algn="l">
+      <a:lvl8pPr marR="0" lvl="7" algn="l" rtl="0">
         <a:lnSpc>
           <a:spcPct val="100000"/>
         </a:lnSpc>
@@ -5960,7 +6130,7 @@
           <a:srgbClr val="000000"/>
         </a:buClr>
         <a:buFont typeface="Arial"/>
-        <a:defRPr b="0" i="0" spc="0" sz="1400" u="none" cap="none" strike="noStrike">
+        <a:defRPr sz="1400" b="0" i="0" u="none" strike="noStrike" cap="none" spc="0">
           <a:solidFill>
             <a:srgbClr val="000000"/>
           </a:solidFill>
@@ -5970,7 +6140,7 @@
           <a:sym typeface="Arial"/>
         </a:defRPr>
       </a:lvl8pPr>
-      <a:lvl9pPr lvl="8" marR="0" rtl="0" algn="l">
+      <a:lvl9pPr marR="0" lvl="8" algn="l" rtl="0">
         <a:lnSpc>
           <a:spcPct val="100000"/>
         </a:lnSpc>
@@ -5984,7 +6154,7 @@
           <a:srgbClr val="000000"/>
         </a:buClr>
         <a:buFont typeface="Arial"/>
-        <a:defRPr b="0" i="0" spc="0" sz="1400" u="none" cap="none" strike="noStrike">
+        <a:defRPr sz="1400" b="0" i="0" u="none" strike="noStrike" cap="none" spc="0">
           <a:solidFill>
             <a:srgbClr val="000000"/>
           </a:solidFill>
@@ -5996,7 +6166,7 @@
       </a:lvl9pPr>
     </p:titleStyle>
     <p:bodyStyle>
-      <a:defPPr lvl="0" marR="0" rtl="0" algn="l">
+      <a:defPPr marR="0" lvl="0" algn="l" rtl="0">
         <a:lnSpc>
           <a:spcPct val="100000"/>
         </a:lnSpc>
@@ -6007,7 +6177,7 @@
           <a:spcPts val="0"/>
         </a:spcAft>
       </a:defPPr>
-      <a:lvl1pPr lvl="0" marR="0" rtl="0" algn="l">
+      <a:lvl1pPr marR="0" lvl="0" algn="l" rtl="0">
         <a:lnSpc>
           <a:spcPct val="100000"/>
         </a:lnSpc>
@@ -6021,7 +6191,7 @@
           <a:srgbClr val="000000"/>
         </a:buClr>
         <a:buFont typeface="Arial"/>
-        <a:defRPr b="0" i="0" spc="0" sz="1400" u="none" cap="none" strike="noStrike">
+        <a:defRPr sz="1400" b="0" i="0" u="none" strike="noStrike" cap="none" spc="0">
           <a:solidFill>
             <a:srgbClr val="000000"/>
           </a:solidFill>
@@ -6031,7 +6201,7 @@
           <a:sym typeface="Arial"/>
         </a:defRPr>
       </a:lvl1pPr>
-      <a:lvl2pPr lvl="1" marR="0" rtl="0" algn="l">
+      <a:lvl2pPr marR="0" lvl="1" algn="l" rtl="0">
         <a:lnSpc>
           <a:spcPct val="100000"/>
         </a:lnSpc>
@@ -6045,7 +6215,7 @@
           <a:srgbClr val="000000"/>
         </a:buClr>
         <a:buFont typeface="Arial"/>
-        <a:defRPr b="0" i="0" spc="0" sz="1400" u="none" cap="none" strike="noStrike">
+        <a:defRPr sz="1400" b="0" i="0" u="none" strike="noStrike" cap="none" spc="0">
           <a:solidFill>
             <a:srgbClr val="000000"/>
           </a:solidFill>
@@ -6055,7 +6225,7 @@
           <a:sym typeface="Arial"/>
         </a:defRPr>
       </a:lvl2pPr>
-      <a:lvl3pPr lvl="2" marR="0" rtl="0" algn="l">
+      <a:lvl3pPr marR="0" lvl="2" algn="l" rtl="0">
         <a:lnSpc>
           <a:spcPct val="100000"/>
         </a:lnSpc>
@@ -6069,7 +6239,7 @@
           <a:srgbClr val="000000"/>
         </a:buClr>
         <a:buFont typeface="Arial"/>
-        <a:defRPr b="0" i="0" spc="0" sz="1400" u="none" cap="none" strike="noStrike">
+        <a:defRPr sz="1400" b="0" i="0" u="none" strike="noStrike" cap="none" spc="0">
           <a:solidFill>
             <a:srgbClr val="000000"/>
           </a:solidFill>
@@ -6079,7 +6249,7 @@
           <a:sym typeface="Arial"/>
         </a:defRPr>
       </a:lvl3pPr>
-      <a:lvl4pPr lvl="3" marR="0" rtl="0" algn="l">
+      <a:lvl4pPr marR="0" lvl="3" algn="l" rtl="0">
         <a:lnSpc>
           <a:spcPct val="100000"/>
         </a:lnSpc>
@@ -6093,7 +6263,7 @@
           <a:srgbClr val="000000"/>
         </a:buClr>
         <a:buFont typeface="Arial"/>
-        <a:defRPr b="0" i="0" spc="0" sz="1400" u="none" cap="none" strike="noStrike">
+        <a:defRPr sz="1400" b="0" i="0" u="none" strike="noStrike" cap="none" spc="0">
           <a:solidFill>
             <a:srgbClr val="000000"/>
           </a:solidFill>
@@ -6103,7 +6273,7 @@
           <a:sym typeface="Arial"/>
         </a:defRPr>
       </a:lvl4pPr>
-      <a:lvl5pPr lvl="4" marR="0" rtl="0" algn="l">
+      <a:lvl5pPr marR="0" lvl="4" algn="l" rtl="0">
         <a:lnSpc>
           <a:spcPct val="100000"/>
         </a:lnSpc>
@@ -6117,7 +6287,7 @@
           <a:srgbClr val="000000"/>
         </a:buClr>
         <a:buFont typeface="Arial"/>
-        <a:defRPr b="0" i="0" spc="0" sz="1400" u="none" cap="none" strike="noStrike">
+        <a:defRPr sz="1400" b="0" i="0" u="none" strike="noStrike" cap="none" spc="0">
           <a:solidFill>
             <a:srgbClr val="000000"/>
           </a:solidFill>
@@ -6127,7 +6297,7 @@
           <a:sym typeface="Arial"/>
         </a:defRPr>
       </a:lvl5pPr>
-      <a:lvl6pPr lvl="5" marR="0" rtl="0" algn="l">
+      <a:lvl6pPr marR="0" lvl="5" algn="l" rtl="0">
         <a:lnSpc>
           <a:spcPct val="100000"/>
         </a:lnSpc>
@@ -6141,7 +6311,7 @@
           <a:srgbClr val="000000"/>
         </a:buClr>
         <a:buFont typeface="Arial"/>
-        <a:defRPr b="0" i="0" spc="0" sz="1400" u="none" cap="none" strike="noStrike">
+        <a:defRPr sz="1400" b="0" i="0" u="none" strike="noStrike" cap="none" spc="0">
           <a:solidFill>
             <a:srgbClr val="000000"/>
           </a:solidFill>
@@ -6151,7 +6321,7 @@
           <a:sym typeface="Arial"/>
         </a:defRPr>
       </a:lvl6pPr>
-      <a:lvl7pPr lvl="6" marR="0" rtl="0" algn="l">
+      <a:lvl7pPr marR="0" lvl="6" algn="l" rtl="0">
         <a:lnSpc>
           <a:spcPct val="100000"/>
         </a:lnSpc>
@@ -6165,7 +6335,7 @@
           <a:srgbClr val="000000"/>
         </a:buClr>
         <a:buFont typeface="Arial"/>
-        <a:defRPr b="0" i="0" spc="0" sz="1400" u="none" cap="none" strike="noStrike">
+        <a:defRPr sz="1400" b="0" i="0" u="none" strike="noStrike" cap="none" spc="0">
           <a:solidFill>
             <a:srgbClr val="000000"/>
           </a:solidFill>
@@ -6175,7 +6345,7 @@
           <a:sym typeface="Arial"/>
         </a:defRPr>
       </a:lvl7pPr>
-      <a:lvl8pPr lvl="7" marR="0" rtl="0" algn="l">
+      <a:lvl8pPr marR="0" lvl="7" algn="l" rtl="0">
         <a:lnSpc>
           <a:spcPct val="100000"/>
         </a:lnSpc>
@@ -6189,7 +6359,7 @@
           <a:srgbClr val="000000"/>
         </a:buClr>
         <a:buFont typeface="Arial"/>
-        <a:defRPr b="0" i="0" spc="0" sz="1400" u="none" cap="none" strike="noStrike">
+        <a:defRPr sz="1400" b="0" i="0" u="none" strike="noStrike" cap="none" spc="0">
           <a:solidFill>
             <a:srgbClr val="000000"/>
           </a:solidFill>
@@ -6199,7 +6369,7 @@
           <a:sym typeface="Arial"/>
         </a:defRPr>
       </a:lvl8pPr>
-      <a:lvl9pPr lvl="8" marR="0" rtl="0" algn="l">
+      <a:lvl9pPr marR="0" lvl="8" algn="l" rtl="0">
         <a:lnSpc>
           <a:spcPct val="100000"/>
         </a:lnSpc>
@@ -6213,7 +6383,7 @@
           <a:srgbClr val="000000"/>
         </a:buClr>
         <a:buFont typeface="Arial"/>
-        <a:defRPr b="0" i="0" spc="0" sz="1400" u="none" cap="none" strike="noStrike">
+        <a:defRPr sz="1400" b="0" i="0" u="none" strike="noStrike" cap="none" spc="0">
           <a:solidFill>
             <a:srgbClr val="000000"/>
           </a:solidFill>
@@ -6225,7 +6395,7 @@
       </a:lvl9pPr>
     </p:bodyStyle>
     <p:otherStyle>
-      <a:defPPr lvl="0" marR="0" rtl="0" algn="l">
+      <a:defPPr marR="0" lvl="0" algn="l" rtl="0">
         <a:lnSpc>
           <a:spcPct val="100000"/>
         </a:lnSpc>
@@ -6236,7 +6406,7 @@
           <a:spcPts val="0"/>
         </a:spcAft>
       </a:defPPr>
-      <a:lvl1pPr lvl="0" marR="0" rtl="0" algn="l">
+      <a:lvl1pPr marR="0" lvl="0" algn="l" rtl="0">
         <a:lnSpc>
           <a:spcPct val="100000"/>
         </a:lnSpc>
@@ -6250,7 +6420,7 @@
           <a:srgbClr val="000000"/>
         </a:buClr>
         <a:buFont typeface="Arial"/>
-        <a:defRPr b="0" i="0" spc="0" sz="1400" u="none" cap="none" strike="noStrike">
+        <a:defRPr sz="1400" b="0" i="0" u="none" strike="noStrike" cap="none" spc="0">
           <a:solidFill>
             <a:srgbClr val="000000"/>
           </a:solidFill>
@@ -6260,7 +6430,7 @@
           <a:sym typeface="Arial"/>
         </a:defRPr>
       </a:lvl1pPr>
-      <a:lvl2pPr lvl="1" marR="0" rtl="0" algn="l">
+      <a:lvl2pPr marR="0" lvl="1" algn="l" rtl="0">
         <a:lnSpc>
           <a:spcPct val="100000"/>
         </a:lnSpc>
@@ -6274,7 +6444,7 @@
           <a:srgbClr val="000000"/>
         </a:buClr>
         <a:buFont typeface="Arial"/>
-        <a:defRPr b="0" i="0" spc="0" sz="1400" u="none" cap="none" strike="noStrike">
+        <a:defRPr sz="1400" b="0" i="0" u="none" strike="noStrike" cap="none" spc="0">
           <a:solidFill>
             <a:srgbClr val="000000"/>
           </a:solidFill>
@@ -6284,7 +6454,7 @@
           <a:sym typeface="Arial"/>
         </a:defRPr>
       </a:lvl2pPr>
-      <a:lvl3pPr lvl="2" marR="0" rtl="0" algn="l">
+      <a:lvl3pPr marR="0" lvl="2" algn="l" rtl="0">
         <a:lnSpc>
           <a:spcPct val="100000"/>
         </a:lnSpc>
@@ -6298,7 +6468,7 @@
           <a:srgbClr val="000000"/>
         </a:buClr>
         <a:buFont typeface="Arial"/>
-        <a:defRPr b="0" i="0" spc="0" sz="1400" u="none" cap="none" strike="noStrike">
+        <a:defRPr sz="1400" b="0" i="0" u="none" strike="noStrike" cap="none" spc="0">
           <a:solidFill>
             <a:srgbClr val="000000"/>
           </a:solidFill>
@@ -6308,7 +6478,7 @@
           <a:sym typeface="Arial"/>
         </a:defRPr>
       </a:lvl3pPr>
-      <a:lvl4pPr lvl="3" marR="0" rtl="0" algn="l">
+      <a:lvl4pPr marR="0" lvl="3" algn="l" rtl="0">
         <a:lnSpc>
           <a:spcPct val="100000"/>
         </a:lnSpc>
@@ -6322,7 +6492,7 @@
           <a:srgbClr val="000000"/>
         </a:buClr>
         <a:buFont typeface="Arial"/>
-        <a:defRPr b="0" i="0" spc="0" sz="1400" u="none" cap="none" strike="noStrike">
+        <a:defRPr sz="1400" b="0" i="0" u="none" strike="noStrike" cap="none" spc="0">
           <a:solidFill>
             <a:srgbClr val="000000"/>
           </a:solidFill>
@@ -6332,7 +6502,7 @@
           <a:sym typeface="Arial"/>
         </a:defRPr>
       </a:lvl4pPr>
-      <a:lvl5pPr lvl="4" marR="0" rtl="0" algn="l">
+      <a:lvl5pPr marR="0" lvl="4" algn="l" rtl="0">
         <a:lnSpc>
           <a:spcPct val="100000"/>
         </a:lnSpc>
@@ -6346,7 +6516,7 @@
           <a:srgbClr val="000000"/>
         </a:buClr>
         <a:buFont typeface="Arial"/>
-        <a:defRPr b="0" i="0" spc="0" sz="1400" u="none" cap="none" strike="noStrike">
+        <a:defRPr sz="1400" b="0" i="0" u="none" strike="noStrike" cap="none" spc="0">
           <a:solidFill>
             <a:srgbClr val="000000"/>
           </a:solidFill>
@@ -6356,7 +6526,7 @@
           <a:sym typeface="Arial"/>
         </a:defRPr>
       </a:lvl5pPr>
-      <a:lvl6pPr lvl="5" marR="0" rtl="0" algn="l">
+      <a:lvl6pPr marR="0" lvl="5" algn="l" rtl="0">
         <a:lnSpc>
           <a:spcPct val="100000"/>
         </a:lnSpc>
@@ -6370,7 +6540,7 @@
           <a:srgbClr val="000000"/>
         </a:buClr>
         <a:buFont typeface="Arial"/>
-        <a:defRPr b="0" i="0" spc="0" sz="1400" u="none" cap="none" strike="noStrike">
+        <a:defRPr sz="1400" b="0" i="0" u="none" strike="noStrike" cap="none" spc="0">
           <a:solidFill>
             <a:srgbClr val="000000"/>
           </a:solidFill>
@@ -6380,7 +6550,7 @@
           <a:sym typeface="Arial"/>
         </a:defRPr>
       </a:lvl6pPr>
-      <a:lvl7pPr lvl="6" marR="0" rtl="0" algn="l">
+      <a:lvl7pPr marR="0" lvl="6" algn="l" rtl="0">
         <a:lnSpc>
           <a:spcPct val="100000"/>
         </a:lnSpc>
@@ -6394,7 +6564,7 @@
           <a:srgbClr val="000000"/>
         </a:buClr>
         <a:buFont typeface="Arial"/>
-        <a:defRPr b="0" i="0" spc="0" sz="1400" u="none" cap="none" strike="noStrike">
+        <a:defRPr sz="1400" b="0" i="0" u="none" strike="noStrike" cap="none" spc="0">
           <a:solidFill>
             <a:srgbClr val="000000"/>
           </a:solidFill>
@@ -6404,7 +6574,7 @@
           <a:sym typeface="Arial"/>
         </a:defRPr>
       </a:lvl7pPr>
-      <a:lvl8pPr lvl="7" marR="0" rtl="0" algn="l">
+      <a:lvl8pPr marR="0" lvl="7" algn="l" rtl="0">
         <a:lnSpc>
           <a:spcPct val="100000"/>
         </a:lnSpc>
@@ -6418,7 +6588,7 @@
           <a:srgbClr val="000000"/>
         </a:buClr>
         <a:buFont typeface="Arial"/>
-        <a:defRPr b="0" i="0" spc="0" sz="1400" u="none" cap="none" strike="noStrike">
+        <a:defRPr sz="1400" b="0" i="0" u="none" strike="noStrike" cap="none" spc="0">
           <a:solidFill>
             <a:srgbClr val="000000"/>
           </a:solidFill>
@@ -6428,7 +6598,7 @@
           <a:sym typeface="Arial"/>
         </a:defRPr>
       </a:lvl8pPr>
-      <a:lvl9pPr lvl="8" marR="0" rtl="0" algn="l">
+      <a:lvl9pPr marR="0" lvl="8" algn="l" rtl="0">
         <a:lnSpc>
           <a:spcPct val="100000"/>
         </a:lnSpc>
@@ -6442,7 +6612,7 @@
           <a:srgbClr val="000000"/>
         </a:buClr>
         <a:buFont typeface="Arial"/>
-        <a:defRPr b="0" i="0" spc="0" sz="1400" u="none" cap="none" strike="noStrike">
+        <a:defRPr sz="1400" b="0" i="0" u="none" strike="noStrike" cap="none" spc="0">
           <a:solidFill>
             <a:srgbClr val="000000"/>
           </a:solidFill>
@@ -6458,7 +6628,7 @@
 </file>
 
 <file path=ppt/slides/slide1.xml><?xml version="1.0" encoding="utf-8"?>
-<p:sld xmlns:a="http://schemas.openxmlformats.org/drawingml/2006/main" xmlns:r="http://schemas.openxmlformats.org/officeDocument/2006/relationships" xmlns:mc="http://schemas.openxmlformats.org/markup-compatibility/2006" xmlns:mv="urn:schemas-microsoft-com:mac:vml" xmlns:p="http://schemas.openxmlformats.org/presentationml/2006/main" xmlns:c="http://schemas.openxmlformats.org/drawingml/2006/chart" xmlns:dgm="http://schemas.openxmlformats.org/drawingml/2006/diagram" xmlns:o="urn:schemas-microsoft-com:office:office" xmlns:v="urn:schemas-microsoft-com:vml" xmlns:pvml="urn:schemas-microsoft-com:office:powerpoint" xmlns:com="http://schemas.openxmlformats.org/drawingml/2006/compatibility" xmlns:p14="http://schemas.microsoft.com/office/powerpoint/2010/main" xmlns:p15="http://schemas.microsoft.com/office/powerpoint/2012/main" xmlns:ahyp="http://schemas.microsoft.com/office/drawing/2018/hyperlinkcolor">
+<p:sld xmlns:a="http://schemas.openxmlformats.org/drawingml/2006/main" xmlns:r="http://schemas.openxmlformats.org/officeDocument/2006/relationships" xmlns:p="http://schemas.openxmlformats.org/presentationml/2006/main">
   <p:cSld>
     <p:bg>
       <p:bgPr>
@@ -6470,11 +6640,12 @@
             <a:fillRect/>
           </a:stretch>
         </a:blipFill>
+        <a:effectLst/>
       </p:bgPr>
     </p:bg>
     <p:spTree>
       <p:nvGrpSpPr>
-        <p:cNvPr id="53" name="Shape 53"/>
+        <p:cNvPr id="1" name="Shape 53"/>
         <p:cNvGrpSpPr/>
         <p:nvPr/>
       </p:nvGrpSpPr>
@@ -6506,12 +6677,12 @@
           </a:ln>
         </p:spPr>
         <p:txBody>
-          <a:bodyPr anchorCtr="0" anchor="t" bIns="91425" lIns="91425" spcFirstLastPara="1" rIns="91425" wrap="square" tIns="91425">
+          <a:bodyPr spcFirstLastPara="1" wrap="square" lIns="91425" tIns="91425" rIns="91425" bIns="91425" anchor="t" anchorCtr="0">
             <a:noAutofit/>
           </a:bodyPr>
           <a:lstStyle/>
           <a:p>
-            <a:pPr indent="0" lvl="0" marL="0" rtl="0" algn="l">
+            <a:pPr marL="0" lvl="0" indent="0" algn="l" rtl="0">
               <a:spcBef>
                 <a:spcPts val="0"/>
               </a:spcBef>
@@ -6521,7 +6692,7 @@
               <a:buNone/>
             </a:pPr>
             <a:r>
-              <a:rPr b="1" lang="en" sz="3600">
+              <a:rPr lang="en" sz="3600" b="1">
                 <a:solidFill>
                   <a:srgbClr val="FFFFFF"/>
                 </a:solidFill>
@@ -6532,7 +6703,7 @@
               </a:rPr>
               <a:t>&lt;&lt;NOMBRE COMPLETO&gt;&gt;</a:t>
             </a:r>
-            <a:endParaRPr b="1" sz="3600">
+            <a:endParaRPr sz="3600" b="1">
               <a:solidFill>
                 <a:srgbClr val="FFFFFF"/>
               </a:solidFill>
@@ -6553,7 +6724,7 @@
 </file>
 
 <file path=ppt/slides/slide10.xml><?xml version="1.0" encoding="utf-8"?>
-<p:sld xmlns:a="http://schemas.openxmlformats.org/drawingml/2006/main" xmlns:r="http://schemas.openxmlformats.org/officeDocument/2006/relationships" xmlns:mc="http://schemas.openxmlformats.org/markup-compatibility/2006" xmlns:mv="urn:schemas-microsoft-com:mac:vml" xmlns:p="http://schemas.openxmlformats.org/presentationml/2006/main" xmlns:c="http://schemas.openxmlformats.org/drawingml/2006/chart" xmlns:dgm="http://schemas.openxmlformats.org/drawingml/2006/diagram" xmlns:o="urn:schemas-microsoft-com:office:office" xmlns:v="urn:schemas-microsoft-com:vml" xmlns:pvml="urn:schemas-microsoft-com:office:powerpoint" xmlns:com="http://schemas.openxmlformats.org/drawingml/2006/compatibility" xmlns:p14="http://schemas.microsoft.com/office/powerpoint/2010/main" xmlns:p15="http://schemas.microsoft.com/office/powerpoint/2012/main" xmlns:ahyp="http://schemas.microsoft.com/office/drawing/2018/hyperlinkcolor">
+<p:sld xmlns:a="http://schemas.openxmlformats.org/drawingml/2006/main" xmlns:r="http://schemas.openxmlformats.org/officeDocument/2006/relationships" xmlns:p="http://schemas.openxmlformats.org/presentationml/2006/main">
   <p:cSld>
     <p:bg>
       <p:bgPr>
@@ -6565,11 +6736,12 @@
             <a:fillRect/>
           </a:stretch>
         </a:blipFill>
+        <a:effectLst/>
       </p:bgPr>
     </p:bg>
     <p:spTree>
       <p:nvGrpSpPr>
-        <p:cNvPr id="108" name="Shape 108"/>
+        <p:cNvPr id="1" name="Shape 108"/>
         <p:cNvGrpSpPr/>
         <p:nvPr/>
       </p:nvGrpSpPr>
@@ -6601,12 +6773,12 @@
           </a:ln>
         </p:spPr>
         <p:txBody>
-          <a:bodyPr anchorCtr="0" anchor="t" bIns="91425" lIns="91425" spcFirstLastPara="1" rIns="91425" wrap="square" tIns="91425">
+          <a:bodyPr spcFirstLastPara="1" wrap="square" lIns="91425" tIns="91425" rIns="91425" bIns="91425" anchor="t" anchorCtr="0">
             <a:noAutofit/>
           </a:bodyPr>
           <a:lstStyle/>
           <a:p>
-            <a:pPr indent="0" lvl="0" marL="0" rtl="0" algn="l">
+            <a:pPr marL="0" lvl="0" indent="0" algn="l" rtl="0">
               <a:spcBef>
                 <a:spcPts val="0"/>
               </a:spcBef>
@@ -6616,7 +6788,7 @@
               <a:buNone/>
             </a:pPr>
             <a:r>
-              <a:rPr lang="en" sz="2800">
+              <a:rPr lang="en" sz="2800" dirty="0">
                 <a:solidFill>
                   <a:srgbClr val="FCBE41"/>
                 </a:solidFill>
@@ -6625,33 +6797,9 @@
                 <a:cs typeface="Archivo SemiBold"/>
                 <a:sym typeface="Archivo SemiBold"/>
               </a:rPr>
-              <a:t>&lt;</a:t>
+              <a:t>&lt;&lt;¿Cuál fue la carrera que elegiste para esta actividad?&gt;&gt;</a:t>
             </a:r>
-            <a:r>
-              <a:rPr lang="en" sz="2800">
-                <a:solidFill>
-                  <a:srgbClr val="FCBE41"/>
-                </a:solidFill>
-                <a:latin typeface="Archivo SemiBold"/>
-                <a:ea typeface="Archivo SemiBold"/>
-                <a:cs typeface="Archivo SemiBold"/>
-                <a:sym typeface="Archivo SemiBold"/>
-              </a:rPr>
-              <a:t>&lt;C¿Cuál fue la carrera que elegiste para esta actividad?</a:t>
-            </a:r>
-            <a:r>
-              <a:rPr lang="en" sz="2800">
-                <a:solidFill>
-                  <a:srgbClr val="FCBE41"/>
-                </a:solidFill>
-                <a:latin typeface="Archivo SemiBold"/>
-                <a:ea typeface="Archivo SemiBold"/>
-                <a:cs typeface="Archivo SemiBold"/>
-                <a:sym typeface="Archivo SemiBold"/>
-              </a:rPr>
-              <a:t>&gt;&gt;</a:t>
-            </a:r>
-            <a:endParaRPr sz="2800">
+            <a:endParaRPr sz="2800" dirty="0">
               <a:solidFill>
                 <a:srgbClr val="FCBE41"/>
               </a:solidFill>
@@ -6662,7 +6810,7 @@
             </a:endParaRPr>
           </a:p>
           <a:p>
-            <a:pPr indent="0" lvl="0" marL="0" rtl="0" algn="l">
+            <a:pPr marL="0" lvl="0" indent="0" algn="l" rtl="0">
               <a:spcBef>
                 <a:spcPts val="0"/>
               </a:spcBef>
@@ -6671,10 +6819,7 @@
               </a:spcAft>
               <a:buNone/>
             </a:pPr>
-            <a:r>
-              <a:t/>
-            </a:r>
-            <a:endParaRPr sz="2800">
+            <a:endParaRPr sz="2800" dirty="0">
               <a:solidFill>
                 <a:srgbClr val="FCBE41"/>
               </a:solidFill>
@@ -6706,12 +6851,12 @@
           </a:ln>
         </p:spPr>
         <p:txBody>
-          <a:bodyPr anchorCtr="0" anchor="t" bIns="91425" lIns="91425" spcFirstLastPara="1" rIns="91425" wrap="square" tIns="91425">
+          <a:bodyPr spcFirstLastPara="1" wrap="square" lIns="91425" tIns="91425" rIns="91425" bIns="91425" anchor="t" anchorCtr="0">
             <a:noAutofit/>
           </a:bodyPr>
           <a:lstStyle/>
           <a:p>
-            <a:pPr indent="0" lvl="0" marL="0" rtl="0" algn="l">
+            <a:pPr marL="0" lvl="0" indent="0" algn="l" rtl="0">
               <a:spcBef>
                 <a:spcPts val="0"/>
               </a:spcBef>
@@ -6730,31 +6875,7 @@
                 <a:cs typeface="Archivo SemiBold"/>
                 <a:sym typeface="Archivo SemiBold"/>
               </a:rPr>
-              <a:t>&lt;&lt;</a:t>
-            </a:r>
-            <a:r>
-              <a:rPr lang="en" sz="2800">
-                <a:solidFill>
-                  <a:srgbClr val="FCBE41"/>
-                </a:solidFill>
-                <a:latin typeface="Archivo SemiBold"/>
-                <a:ea typeface="Archivo SemiBold"/>
-                <a:cs typeface="Archivo SemiBold"/>
-                <a:sym typeface="Archivo SemiBold"/>
-              </a:rPr>
-              <a:t>¿Qué pregunta decidiste abordar?</a:t>
-            </a:r>
-            <a:r>
-              <a:rPr lang="en" sz="2800">
-                <a:solidFill>
-                  <a:srgbClr val="FCBE41"/>
-                </a:solidFill>
-                <a:latin typeface="Archivo SemiBold"/>
-                <a:ea typeface="Archivo SemiBold"/>
-                <a:cs typeface="Archivo SemiBold"/>
-                <a:sym typeface="Archivo SemiBold"/>
-              </a:rPr>
-              <a:t>&gt;&gt;</a:t>
+              <a:t>&lt;&lt;¿Qué pregunta decidiste abordar?&gt;&gt;</a:t>
             </a:r>
             <a:endParaRPr sz="2800">
               <a:solidFill>
@@ -6767,7 +6888,7 @@
             </a:endParaRPr>
           </a:p>
           <a:p>
-            <a:pPr indent="0" lvl="0" marL="0" rtl="0" algn="l">
+            <a:pPr marL="0" lvl="0" indent="0" algn="l" rtl="0">
               <a:spcBef>
                 <a:spcPts val="0"/>
               </a:spcBef>
@@ -6776,9 +6897,6 @@
               </a:spcAft>
               <a:buNone/>
             </a:pPr>
-            <a:r>
-              <a:t/>
-            </a:r>
             <a:endParaRPr sz="2800">
               <a:solidFill>
                 <a:srgbClr val="FCBE41"/>
@@ -6811,12 +6929,12 @@
           </a:ln>
         </p:spPr>
         <p:txBody>
-          <a:bodyPr anchorCtr="0" anchor="t" bIns="91425" lIns="91425" spcFirstLastPara="1" rIns="91425" wrap="square" tIns="91425">
+          <a:bodyPr spcFirstLastPara="1" wrap="square" lIns="91425" tIns="91425" rIns="91425" bIns="91425" anchor="t" anchorCtr="0">
             <a:noAutofit/>
           </a:bodyPr>
           <a:lstStyle/>
           <a:p>
-            <a:pPr indent="0" lvl="0" marL="0" rtl="0" algn="l">
+            <a:pPr marL="0" lvl="0" indent="0" algn="l" rtl="0">
               <a:spcBef>
                 <a:spcPts val="0"/>
               </a:spcBef>
@@ -6835,31 +6953,7 @@
                 <a:cs typeface="Archivo SemiBold"/>
                 <a:sym typeface="Archivo SemiBold"/>
               </a:rPr>
-              <a:t>&lt;&lt;</a:t>
-            </a:r>
-            <a:r>
-              <a:rPr lang="en" sz="2800">
-                <a:solidFill>
-                  <a:srgbClr val="FCBE41"/>
-                </a:solidFill>
-                <a:latin typeface="Archivo SemiBold"/>
-                <a:ea typeface="Archivo SemiBold"/>
-                <a:cs typeface="Archivo SemiBold"/>
-                <a:sym typeface="Archivo SemiBold"/>
-              </a:rPr>
-              <a:t>¿Qué crees que te permitió aprender?</a:t>
-            </a:r>
-            <a:r>
-              <a:rPr lang="en" sz="2800">
-                <a:solidFill>
-                  <a:srgbClr val="FCBE41"/>
-                </a:solidFill>
-                <a:latin typeface="Archivo SemiBold"/>
-                <a:ea typeface="Archivo SemiBold"/>
-                <a:cs typeface="Archivo SemiBold"/>
-                <a:sym typeface="Archivo SemiBold"/>
-              </a:rPr>
-              <a:t>&gt;&gt;</a:t>
+              <a:t>&lt;&lt;¿Qué crees que te permitió aprender?&gt;&gt;</a:t>
             </a:r>
             <a:endParaRPr sz="2800">
               <a:solidFill>
@@ -6872,7 +6966,7 @@
             </a:endParaRPr>
           </a:p>
           <a:p>
-            <a:pPr indent="0" lvl="0" marL="0" rtl="0" algn="l">
+            <a:pPr marL="0" lvl="0" indent="0" algn="l" rtl="0">
               <a:spcBef>
                 <a:spcPts val="0"/>
               </a:spcBef>
@@ -6881,9 +6975,6 @@
               </a:spcAft>
               <a:buNone/>
             </a:pPr>
-            <a:r>
-              <a:t/>
-            </a:r>
             <a:endParaRPr sz="2800">
               <a:solidFill>
                 <a:srgbClr val="FCBE41"/>
@@ -6916,12 +7007,12 @@
           </a:ln>
         </p:spPr>
         <p:txBody>
-          <a:bodyPr anchorCtr="0" anchor="t" bIns="91425" lIns="91425" spcFirstLastPara="1" rIns="91425" wrap="square" tIns="91425">
+          <a:bodyPr spcFirstLastPara="1" wrap="square" lIns="91425" tIns="91425" rIns="91425" bIns="91425" anchor="t" anchorCtr="0">
             <a:noAutofit/>
           </a:bodyPr>
           <a:lstStyle/>
           <a:p>
-            <a:pPr indent="0" lvl="0" marL="0" rtl="0" algn="l">
+            <a:pPr marL="0" lvl="0" indent="0" algn="l" rtl="0">
               <a:spcBef>
                 <a:spcPts val="0"/>
               </a:spcBef>
@@ -6940,31 +7031,7 @@
                 <a:cs typeface="Archivo SemiBold"/>
                 <a:sym typeface="Archivo SemiBold"/>
               </a:rPr>
-              <a:t>&lt;&lt;</a:t>
-            </a:r>
-            <a:r>
-              <a:rPr lang="en" sz="2800">
-                <a:solidFill>
-                  <a:srgbClr val="FCBE41"/>
-                </a:solidFill>
-                <a:latin typeface="Archivo SemiBold"/>
-                <a:ea typeface="Archivo SemiBold"/>
-                <a:cs typeface="Archivo SemiBold"/>
-                <a:sym typeface="Archivo SemiBold"/>
-              </a:rPr>
-              <a:t>¿Harías alguna modificación a tu prototipo luego de testearlo con tu compañero/a? En caso de que sí, ¿cuáles? y en caso de que no ¿por qué?</a:t>
-            </a:r>
-            <a:r>
-              <a:rPr lang="en" sz="2800">
-                <a:solidFill>
-                  <a:srgbClr val="FCBE41"/>
-                </a:solidFill>
-                <a:latin typeface="Archivo SemiBold"/>
-                <a:ea typeface="Archivo SemiBold"/>
-                <a:cs typeface="Archivo SemiBold"/>
-                <a:sym typeface="Archivo SemiBold"/>
-              </a:rPr>
-              <a:t>&gt;&gt;</a:t>
+              <a:t>&lt;&lt;¿Harías alguna modificación a tu prototipo luego de testearlo con tu compañero/a? En caso de que sí, ¿cuáles? y en caso de que no ¿por qué?&gt;&gt;</a:t>
             </a:r>
             <a:endParaRPr sz="2800">
               <a:solidFill>
@@ -6977,7 +7044,7 @@
             </a:endParaRPr>
           </a:p>
           <a:p>
-            <a:pPr indent="0" lvl="0" marL="0" rtl="0" algn="l">
+            <a:pPr marL="0" lvl="0" indent="0" algn="l" rtl="0">
               <a:spcBef>
                 <a:spcPts val="0"/>
               </a:spcBef>
@@ -6986,9 +7053,6 @@
               </a:spcAft>
               <a:buNone/>
             </a:pPr>
-            <a:r>
-              <a:t/>
-            </a:r>
             <a:endParaRPr sz="2800">
               <a:solidFill>
                 <a:srgbClr val="FCBE41"/>
@@ -7010,7 +7074,7 @@
 </file>
 
 <file path=ppt/slides/slide11.xml><?xml version="1.0" encoding="utf-8"?>
-<p:sld xmlns:a="http://schemas.openxmlformats.org/drawingml/2006/main" xmlns:r="http://schemas.openxmlformats.org/officeDocument/2006/relationships" xmlns:mc="http://schemas.openxmlformats.org/markup-compatibility/2006" xmlns:mv="urn:schemas-microsoft-com:mac:vml" xmlns:p="http://schemas.openxmlformats.org/presentationml/2006/main" xmlns:c="http://schemas.openxmlformats.org/drawingml/2006/chart" xmlns:dgm="http://schemas.openxmlformats.org/drawingml/2006/diagram" xmlns:o="urn:schemas-microsoft-com:office:office" xmlns:v="urn:schemas-microsoft-com:vml" xmlns:pvml="urn:schemas-microsoft-com:office:powerpoint" xmlns:com="http://schemas.openxmlformats.org/drawingml/2006/compatibility" xmlns:p14="http://schemas.microsoft.com/office/powerpoint/2010/main" xmlns:p15="http://schemas.microsoft.com/office/powerpoint/2012/main" xmlns:ahyp="http://schemas.microsoft.com/office/drawing/2018/hyperlinkcolor">
+<p:sld xmlns:a="http://schemas.openxmlformats.org/drawingml/2006/main" xmlns:r="http://schemas.openxmlformats.org/officeDocument/2006/relationships" xmlns:p="http://schemas.openxmlformats.org/presentationml/2006/main">
   <p:cSld>
     <p:bg>
       <p:bgPr>
@@ -7022,11 +7086,12 @@
             <a:fillRect/>
           </a:stretch>
         </a:blipFill>
+        <a:effectLst/>
       </p:bgPr>
     </p:bg>
     <p:spTree>
       <p:nvGrpSpPr>
-        <p:cNvPr id="116" name="Shape 116"/>
+        <p:cNvPr id="1" name="Shape 116"/>
         <p:cNvGrpSpPr/>
         <p:nvPr/>
       </p:nvGrpSpPr>
@@ -7047,7 +7112,7 @@
 </file>
 
 <file path=ppt/slides/slide2.xml><?xml version="1.0" encoding="utf-8"?>
-<p:sld xmlns:a="http://schemas.openxmlformats.org/drawingml/2006/main" xmlns:r="http://schemas.openxmlformats.org/officeDocument/2006/relationships" xmlns:mc="http://schemas.openxmlformats.org/markup-compatibility/2006" xmlns:mv="urn:schemas-microsoft-com:mac:vml" xmlns:p="http://schemas.openxmlformats.org/presentationml/2006/main" xmlns:c="http://schemas.openxmlformats.org/drawingml/2006/chart" xmlns:dgm="http://schemas.openxmlformats.org/drawingml/2006/diagram" xmlns:o="urn:schemas-microsoft-com:office:office" xmlns:v="urn:schemas-microsoft-com:vml" xmlns:pvml="urn:schemas-microsoft-com:office:powerpoint" xmlns:com="http://schemas.openxmlformats.org/drawingml/2006/compatibility" xmlns:p14="http://schemas.microsoft.com/office/powerpoint/2010/main" xmlns:p15="http://schemas.microsoft.com/office/powerpoint/2012/main" xmlns:ahyp="http://schemas.microsoft.com/office/drawing/2018/hyperlinkcolor">
+<p:sld xmlns:a="http://schemas.openxmlformats.org/drawingml/2006/main" xmlns:r="http://schemas.openxmlformats.org/officeDocument/2006/relationships" xmlns:p="http://schemas.openxmlformats.org/presentationml/2006/main">
   <p:cSld>
     <p:bg>
       <p:bgPr>
@@ -7059,11 +7124,12 @@
             <a:fillRect/>
           </a:stretch>
         </a:blipFill>
+        <a:effectLst/>
       </p:bgPr>
     </p:bg>
     <p:spTree>
       <p:nvGrpSpPr>
-        <p:cNvPr id="58" name="Shape 58"/>
+        <p:cNvPr id="1" name="Shape 58"/>
         <p:cNvGrpSpPr/>
         <p:nvPr/>
       </p:nvGrpSpPr>
@@ -7084,7 +7150,7 @@
 </file>
 
 <file path=ppt/slides/slide3.xml><?xml version="1.0" encoding="utf-8"?>
-<p:sld xmlns:a="http://schemas.openxmlformats.org/drawingml/2006/main" xmlns:r="http://schemas.openxmlformats.org/officeDocument/2006/relationships" xmlns:mc="http://schemas.openxmlformats.org/markup-compatibility/2006" xmlns:mv="urn:schemas-microsoft-com:mac:vml" xmlns:p="http://schemas.openxmlformats.org/presentationml/2006/main" xmlns:c="http://schemas.openxmlformats.org/drawingml/2006/chart" xmlns:dgm="http://schemas.openxmlformats.org/drawingml/2006/diagram" xmlns:o="urn:schemas-microsoft-com:office:office" xmlns:v="urn:schemas-microsoft-com:vml" xmlns:pvml="urn:schemas-microsoft-com:office:powerpoint" xmlns:com="http://schemas.openxmlformats.org/drawingml/2006/compatibility" xmlns:p14="http://schemas.microsoft.com/office/powerpoint/2010/main" xmlns:p15="http://schemas.microsoft.com/office/powerpoint/2012/main" xmlns:ahyp="http://schemas.microsoft.com/office/drawing/2018/hyperlinkcolor">
+<p:sld xmlns:a="http://schemas.openxmlformats.org/drawingml/2006/main" xmlns:r="http://schemas.openxmlformats.org/officeDocument/2006/relationships" xmlns:p="http://schemas.openxmlformats.org/presentationml/2006/main">
   <p:cSld>
     <p:bg>
       <p:bgPr>
@@ -7096,11 +7162,12 @@
             <a:fillRect/>
           </a:stretch>
         </a:blipFill>
+        <a:effectLst/>
       </p:bgPr>
     </p:bg>
     <p:spTree>
       <p:nvGrpSpPr>
-        <p:cNvPr id="62" name="Shape 62"/>
+        <p:cNvPr id="1" name="Shape 62"/>
         <p:cNvGrpSpPr/>
         <p:nvPr/>
       </p:nvGrpSpPr>
@@ -7132,12 +7199,12 @@
           </a:ln>
         </p:spPr>
         <p:txBody>
-          <a:bodyPr anchorCtr="0" anchor="t" bIns="91425" lIns="91425" spcFirstLastPara="1" rIns="91425" wrap="square" tIns="91425">
+          <a:bodyPr spcFirstLastPara="1" wrap="square" lIns="91425" tIns="91425" rIns="91425" bIns="91425" anchor="t" anchorCtr="0">
             <a:noAutofit/>
           </a:bodyPr>
           <a:lstStyle/>
           <a:p>
-            <a:pPr indent="0" lvl="0" marL="0" rtl="0" algn="l">
+            <a:pPr marL="0" lvl="0" indent="0" algn="l" rtl="0">
               <a:spcBef>
                 <a:spcPts val="0"/>
               </a:spcBef>
@@ -7147,7 +7214,7 @@
               <a:buNone/>
             </a:pPr>
             <a:r>
-              <a:rPr b="1" lang="en" sz="3400">
+              <a:rPr lang="en" sz="3400" b="1" dirty="0">
                 <a:solidFill>
                   <a:srgbClr val="FCBE41"/>
                 </a:solidFill>
@@ -7156,33 +7223,9 @@
                 <a:cs typeface="Archivo"/>
                 <a:sym typeface="Archivo"/>
               </a:rPr>
-              <a:t>&lt;&lt;</a:t>
+              <a:t>&lt;&lt;Carrera 1&gt;&gt;</a:t>
             </a:r>
-            <a:r>
-              <a:rPr b="1" lang="en" sz="3400">
-                <a:solidFill>
-                  <a:srgbClr val="FCBE41"/>
-                </a:solidFill>
-                <a:latin typeface="Archivo"/>
-                <a:ea typeface="Archivo"/>
-                <a:cs typeface="Archivo"/>
-                <a:sym typeface="Archivo"/>
-              </a:rPr>
-              <a:t>Carrera 1</a:t>
-            </a:r>
-            <a:r>
-              <a:rPr b="1" lang="en" sz="3400">
-                <a:solidFill>
-                  <a:srgbClr val="FCBE41"/>
-                </a:solidFill>
-                <a:latin typeface="Archivo"/>
-                <a:ea typeface="Archivo"/>
-                <a:cs typeface="Archivo"/>
-                <a:sym typeface="Archivo"/>
-              </a:rPr>
-              <a:t>&gt;&gt;</a:t>
-            </a:r>
-            <a:endParaRPr b="1" sz="3400">
+            <a:endParaRPr sz="3400" b="1" dirty="0">
               <a:solidFill>
                 <a:srgbClr val="FCBE41"/>
               </a:solidFill>
@@ -7193,7 +7236,7 @@
             </a:endParaRPr>
           </a:p>
           <a:p>
-            <a:pPr indent="0" lvl="0" marL="0" rtl="0" algn="l">
+            <a:pPr marL="0" lvl="0" indent="0" algn="l" rtl="0">
               <a:spcBef>
                 <a:spcPts val="0"/>
               </a:spcBef>
@@ -7202,10 +7245,7 @@
               </a:spcAft>
               <a:buNone/>
             </a:pPr>
-            <a:r>
-              <a:t/>
-            </a:r>
-            <a:endParaRPr b="1" sz="3400">
+            <a:endParaRPr sz="3400" b="1" dirty="0">
               <a:solidFill>
                 <a:srgbClr val="FCBE41"/>
               </a:solidFill>
@@ -7237,12 +7277,12 @@
           </a:ln>
         </p:spPr>
         <p:txBody>
-          <a:bodyPr anchorCtr="0" anchor="t" bIns="91425" lIns="91425" spcFirstLastPara="1" rIns="91425" wrap="square" tIns="91425">
+          <a:bodyPr spcFirstLastPara="1" wrap="square" lIns="91425" tIns="91425" rIns="91425" bIns="91425" anchor="t" anchorCtr="0">
             <a:noAutofit/>
           </a:bodyPr>
           <a:lstStyle/>
           <a:p>
-            <a:pPr indent="0" lvl="0" marL="0" rtl="0" algn="l">
+            <a:pPr marL="0" lvl="0" indent="0" algn="l" rtl="0">
               <a:spcBef>
                 <a:spcPts val="0"/>
               </a:spcBef>
@@ -7261,31 +7301,7 @@
                 <a:cs typeface="Archivo SemiBold"/>
                 <a:sym typeface="Archivo SemiBold"/>
               </a:rPr>
-              <a:t>&lt;&lt;</a:t>
-            </a:r>
-            <a:r>
-              <a:rPr lang="en" sz="2800">
-                <a:solidFill>
-                  <a:srgbClr val="FCBE41"/>
-                </a:solidFill>
-                <a:latin typeface="Archivo SemiBold"/>
-                <a:ea typeface="Archivo SemiBold"/>
-                <a:cs typeface="Archivo SemiBold"/>
-                <a:sym typeface="Archivo SemiBold"/>
-              </a:rPr>
-              <a:t>Aspecto 1</a:t>
-            </a:r>
-            <a:r>
-              <a:rPr lang="en" sz="2800">
-                <a:solidFill>
-                  <a:srgbClr val="FCBE41"/>
-                </a:solidFill>
-                <a:latin typeface="Archivo SemiBold"/>
-                <a:ea typeface="Archivo SemiBold"/>
-                <a:cs typeface="Archivo SemiBold"/>
-                <a:sym typeface="Archivo SemiBold"/>
-              </a:rPr>
-              <a:t>&gt;&gt;</a:t>
+              <a:t>&lt;&lt;Aspecto 1&gt;&gt;</a:t>
             </a:r>
             <a:endParaRPr sz="2800">
               <a:solidFill>
@@ -7298,7 +7314,7 @@
             </a:endParaRPr>
           </a:p>
           <a:p>
-            <a:pPr indent="0" lvl="0" marL="0" rtl="0" algn="l">
+            <a:pPr marL="0" lvl="0" indent="0" algn="l" rtl="0">
               <a:spcBef>
                 <a:spcPts val="0"/>
               </a:spcBef>
@@ -7307,9 +7323,6 @@
               </a:spcAft>
               <a:buNone/>
             </a:pPr>
-            <a:r>
-              <a:t/>
-            </a:r>
             <a:endParaRPr sz="2800">
               <a:solidFill>
                 <a:srgbClr val="FCBE41"/>
@@ -7342,12 +7355,12 @@
           </a:ln>
         </p:spPr>
         <p:txBody>
-          <a:bodyPr anchorCtr="0" anchor="t" bIns="91425" lIns="91425" spcFirstLastPara="1" rIns="91425" wrap="square" tIns="91425">
+          <a:bodyPr spcFirstLastPara="1" wrap="square" lIns="91425" tIns="91425" rIns="91425" bIns="91425" anchor="t" anchorCtr="0">
             <a:noAutofit/>
           </a:bodyPr>
           <a:lstStyle/>
           <a:p>
-            <a:pPr indent="0" lvl="0" marL="0" rtl="0" algn="l">
+            <a:pPr marL="0" lvl="0" indent="0" algn="l" rtl="0">
               <a:spcBef>
                 <a:spcPts val="0"/>
               </a:spcBef>
@@ -7379,7 +7392,7 @@
             </a:endParaRPr>
           </a:p>
           <a:p>
-            <a:pPr indent="0" lvl="0" marL="0" rtl="0" algn="l">
+            <a:pPr marL="0" lvl="0" indent="0" algn="l" rtl="0">
               <a:spcBef>
                 <a:spcPts val="0"/>
               </a:spcBef>
@@ -7388,9 +7401,6 @@
               </a:spcAft>
               <a:buNone/>
             </a:pPr>
-            <a:r>
-              <a:t/>
-            </a:r>
             <a:endParaRPr sz="2800">
               <a:solidFill>
                 <a:srgbClr val="FCBE41"/>
@@ -7412,7 +7422,7 @@
 </file>
 
 <file path=ppt/slides/slide4.xml><?xml version="1.0" encoding="utf-8"?>
-<p:sld xmlns:a="http://schemas.openxmlformats.org/drawingml/2006/main" xmlns:r="http://schemas.openxmlformats.org/officeDocument/2006/relationships" xmlns:mc="http://schemas.openxmlformats.org/markup-compatibility/2006" xmlns:mv="urn:schemas-microsoft-com:mac:vml" xmlns:p="http://schemas.openxmlformats.org/presentationml/2006/main" xmlns:c="http://schemas.openxmlformats.org/drawingml/2006/chart" xmlns:dgm="http://schemas.openxmlformats.org/drawingml/2006/diagram" xmlns:o="urn:schemas-microsoft-com:office:office" xmlns:v="urn:schemas-microsoft-com:vml" xmlns:pvml="urn:schemas-microsoft-com:office:powerpoint" xmlns:com="http://schemas.openxmlformats.org/drawingml/2006/compatibility" xmlns:p14="http://schemas.microsoft.com/office/powerpoint/2010/main" xmlns:p15="http://schemas.microsoft.com/office/powerpoint/2012/main" xmlns:ahyp="http://schemas.microsoft.com/office/drawing/2018/hyperlinkcolor">
+<p:sld xmlns:a="http://schemas.openxmlformats.org/drawingml/2006/main" xmlns:r="http://schemas.openxmlformats.org/officeDocument/2006/relationships" xmlns:p="http://schemas.openxmlformats.org/presentationml/2006/main">
   <p:cSld>
     <p:bg>
       <p:bgPr>
@@ -7424,11 +7434,12 @@
             <a:fillRect/>
           </a:stretch>
         </a:blipFill>
+        <a:effectLst/>
       </p:bgPr>
     </p:bg>
     <p:spTree>
       <p:nvGrpSpPr>
-        <p:cNvPr id="69" name="Shape 69"/>
+        <p:cNvPr id="1" name="Shape 69"/>
         <p:cNvGrpSpPr/>
         <p:nvPr/>
       </p:nvGrpSpPr>
@@ -7460,12 +7471,12 @@
           </a:ln>
         </p:spPr>
         <p:txBody>
-          <a:bodyPr anchorCtr="0" anchor="t" bIns="91425" lIns="91425" spcFirstLastPara="1" rIns="91425" wrap="square" tIns="91425">
+          <a:bodyPr spcFirstLastPara="1" wrap="square" lIns="91425" tIns="91425" rIns="91425" bIns="91425" anchor="t" anchorCtr="0">
             <a:noAutofit/>
           </a:bodyPr>
           <a:lstStyle/>
           <a:p>
-            <a:pPr indent="0" lvl="0" marL="0" rtl="0" algn="l">
+            <a:pPr marL="0" lvl="0" indent="0" algn="l" rtl="0">
               <a:spcBef>
                 <a:spcPts val="0"/>
               </a:spcBef>
@@ -7475,7 +7486,7 @@
               <a:buNone/>
             </a:pPr>
             <a:r>
-              <a:rPr lang="en" sz="3000">
+              <a:rPr lang="en" sz="3000" dirty="0">
                 <a:solidFill>
                   <a:schemeClr val="lt1"/>
                 </a:solidFill>
@@ -7486,7 +7497,7 @@
               </a:rPr>
               <a:t>&lt;&lt;Ficha tecnica Texto descriptivo 1&gt;&gt;</a:t>
             </a:r>
-            <a:endParaRPr sz="3000">
+            <a:endParaRPr sz="3000" dirty="0">
               <a:solidFill>
                 <a:schemeClr val="lt1"/>
               </a:solidFill>
@@ -7518,12 +7529,12 @@
           </a:ln>
         </p:spPr>
         <p:txBody>
-          <a:bodyPr anchorCtr="0" anchor="t" bIns="91425" lIns="91425" spcFirstLastPara="1" rIns="91425" wrap="square" tIns="91425">
+          <a:bodyPr spcFirstLastPara="1" wrap="square" lIns="91425" tIns="91425" rIns="91425" bIns="91425" anchor="t" anchorCtr="0">
             <a:noAutofit/>
           </a:bodyPr>
           <a:lstStyle/>
           <a:p>
-            <a:pPr indent="0" lvl="0" marL="0" rtl="0" algn="l">
+            <a:pPr marL="0" lvl="0" indent="0" algn="l" rtl="0">
               <a:spcBef>
                 <a:spcPts val="0"/>
               </a:spcBef>
@@ -7542,31 +7553,7 @@
                 <a:cs typeface="Archivo Medium"/>
                 <a:sym typeface="Archivo Medium"/>
               </a:rPr>
-              <a:t>&lt;&lt;</a:t>
-            </a:r>
-            <a:r>
-              <a:rPr lang="en" sz="2800">
-                <a:solidFill>
-                  <a:schemeClr val="lt1"/>
-                </a:solidFill>
-                <a:latin typeface="Archivo Medium"/>
-                <a:ea typeface="Archivo Medium"/>
-                <a:cs typeface="Archivo Medium"/>
-                <a:sym typeface="Archivo Medium"/>
-              </a:rPr>
-              <a:t>Ficha tecnica Área de estudio 1</a:t>
-            </a:r>
-            <a:r>
-              <a:rPr lang="en" sz="2800">
-                <a:solidFill>
-                  <a:schemeClr val="lt1"/>
-                </a:solidFill>
-                <a:latin typeface="Archivo Medium"/>
-                <a:ea typeface="Archivo Medium"/>
-                <a:cs typeface="Archivo Medium"/>
-                <a:sym typeface="Archivo Medium"/>
-              </a:rPr>
-              <a:t>&gt;&gt;</a:t>
+              <a:t>&lt;&lt;Ficha tecnica Área de estudio 1&gt;&gt;</a:t>
             </a:r>
             <a:endParaRPr sz="2800">
               <a:solidFill>
@@ -7579,7 +7566,7 @@
             </a:endParaRPr>
           </a:p>
           <a:p>
-            <a:pPr indent="0" lvl="0" marL="0" rtl="0" algn="l">
+            <a:pPr marL="0" lvl="0" indent="0" algn="l" rtl="0">
               <a:spcBef>
                 <a:spcPts val="0"/>
               </a:spcBef>
@@ -7588,9 +7575,6 @@
               </a:spcAft>
               <a:buNone/>
             </a:pPr>
-            <a:r>
-              <a:t/>
-            </a:r>
             <a:endParaRPr sz="2800">
               <a:solidFill>
                 <a:schemeClr val="lt1"/>
@@ -7623,12 +7607,12 @@
           </a:ln>
         </p:spPr>
         <p:txBody>
-          <a:bodyPr anchorCtr="0" anchor="t" bIns="91425" lIns="91425" spcFirstLastPara="1" rIns="91425" wrap="square" tIns="91425">
+          <a:bodyPr spcFirstLastPara="1" wrap="square" lIns="91425" tIns="91425" rIns="91425" bIns="91425" anchor="t" anchorCtr="0">
             <a:noAutofit/>
           </a:bodyPr>
           <a:lstStyle/>
           <a:p>
-            <a:pPr indent="0" lvl="0" marL="0" rtl="0" algn="l">
+            <a:pPr marL="0" lvl="0" indent="0" algn="l" rtl="0">
               <a:spcBef>
                 <a:spcPts val="0"/>
               </a:spcBef>
@@ -7660,7 +7644,7 @@
             </a:endParaRPr>
           </a:p>
           <a:p>
-            <a:pPr indent="0" lvl="0" marL="0" rtl="0" algn="l">
+            <a:pPr marL="0" lvl="0" indent="0" algn="l" rtl="0">
               <a:spcBef>
                 <a:spcPts val="0"/>
               </a:spcBef>
@@ -7669,9 +7653,6 @@
               </a:spcAft>
               <a:buNone/>
             </a:pPr>
-            <a:r>
-              <a:t/>
-            </a:r>
             <a:endParaRPr sz="2800">
               <a:solidFill>
                 <a:schemeClr val="lt1"/>
@@ -7693,7 +7674,7 @@
 </file>
 
 <file path=ppt/slides/slide5.xml><?xml version="1.0" encoding="utf-8"?>
-<p:sld xmlns:a="http://schemas.openxmlformats.org/drawingml/2006/main" xmlns:r="http://schemas.openxmlformats.org/officeDocument/2006/relationships" xmlns:mc="http://schemas.openxmlformats.org/markup-compatibility/2006" xmlns:mv="urn:schemas-microsoft-com:mac:vml" xmlns:p="http://schemas.openxmlformats.org/presentationml/2006/main" xmlns:c="http://schemas.openxmlformats.org/drawingml/2006/chart" xmlns:dgm="http://schemas.openxmlformats.org/drawingml/2006/diagram" xmlns:o="urn:schemas-microsoft-com:office:office" xmlns:v="urn:schemas-microsoft-com:vml" xmlns:pvml="urn:schemas-microsoft-com:office:powerpoint" xmlns:com="http://schemas.openxmlformats.org/drawingml/2006/compatibility" xmlns:p14="http://schemas.microsoft.com/office/powerpoint/2010/main" xmlns:p15="http://schemas.microsoft.com/office/powerpoint/2012/main" xmlns:ahyp="http://schemas.microsoft.com/office/drawing/2018/hyperlinkcolor">
+<p:sld xmlns:a="http://schemas.openxmlformats.org/drawingml/2006/main" xmlns:r="http://schemas.openxmlformats.org/officeDocument/2006/relationships" xmlns:p="http://schemas.openxmlformats.org/presentationml/2006/main">
   <p:cSld>
     <p:bg>
       <p:bgPr>
@@ -7705,11 +7686,12 @@
             <a:fillRect/>
           </a:stretch>
         </a:blipFill>
+        <a:effectLst/>
       </p:bgPr>
     </p:bg>
     <p:spTree>
       <p:nvGrpSpPr>
-        <p:cNvPr id="76" name="Shape 76"/>
+        <p:cNvPr id="1" name="Shape 76"/>
         <p:cNvGrpSpPr/>
         <p:nvPr/>
       </p:nvGrpSpPr>
@@ -7741,12 +7723,12 @@
           </a:ln>
         </p:spPr>
         <p:txBody>
-          <a:bodyPr anchorCtr="0" anchor="t" bIns="91425" lIns="91425" spcFirstLastPara="1" rIns="91425" wrap="square" tIns="91425">
+          <a:bodyPr spcFirstLastPara="1" wrap="square" lIns="91425" tIns="91425" rIns="91425" bIns="91425" anchor="t" anchorCtr="0">
             <a:noAutofit/>
           </a:bodyPr>
           <a:lstStyle/>
           <a:p>
-            <a:pPr indent="0" lvl="0" marL="0" rtl="0" algn="l">
+            <a:pPr marL="0" lvl="0" indent="0" algn="l" rtl="0">
               <a:spcBef>
                 <a:spcPts val="0"/>
               </a:spcBef>
@@ -7756,7 +7738,7 @@
               <a:buNone/>
             </a:pPr>
             <a:r>
-              <a:rPr b="1" lang="en" sz="3400">
+              <a:rPr lang="en" sz="3400" b="1">
                 <a:solidFill>
                   <a:srgbClr val="FCBE41"/>
                 </a:solidFill>
@@ -7765,21 +7747,9 @@
                 <a:cs typeface="Archivo"/>
                 <a:sym typeface="Archivo"/>
               </a:rPr>
-              <a:t>&lt;&lt;</a:t>
+              <a:t>&lt;&lt;Carrera 2&gt;&gt;</a:t>
             </a:r>
-            <a:r>
-              <a:rPr b="1" lang="en" sz="3400">
-                <a:solidFill>
-                  <a:srgbClr val="FCBE41"/>
-                </a:solidFill>
-                <a:latin typeface="Archivo"/>
-                <a:ea typeface="Archivo"/>
-                <a:cs typeface="Archivo"/>
-                <a:sym typeface="Archivo"/>
-              </a:rPr>
-              <a:t>Carrera 2&gt;&gt;</a:t>
-            </a:r>
-            <a:endParaRPr b="1" sz="3400">
+            <a:endParaRPr sz="3400" b="1">
               <a:solidFill>
                 <a:srgbClr val="FCBE41"/>
               </a:solidFill>
@@ -7790,7 +7760,7 @@
             </a:endParaRPr>
           </a:p>
           <a:p>
-            <a:pPr indent="0" lvl="0" marL="0" rtl="0" algn="l">
+            <a:pPr marL="0" lvl="0" indent="0" algn="l" rtl="0">
               <a:spcBef>
                 <a:spcPts val="0"/>
               </a:spcBef>
@@ -7799,10 +7769,7 @@
               </a:spcAft>
               <a:buNone/>
             </a:pPr>
-            <a:r>
-              <a:t/>
-            </a:r>
-            <a:endParaRPr b="1" sz="3400">
+            <a:endParaRPr sz="3400" b="1">
               <a:solidFill>
                 <a:srgbClr val="FCBE41"/>
               </a:solidFill>
@@ -7834,12 +7801,12 @@
           </a:ln>
         </p:spPr>
         <p:txBody>
-          <a:bodyPr anchorCtr="0" anchor="t" bIns="91425" lIns="91425" spcFirstLastPara="1" rIns="91425" wrap="square" tIns="91425">
+          <a:bodyPr spcFirstLastPara="1" wrap="square" lIns="91425" tIns="91425" rIns="91425" bIns="91425" anchor="t" anchorCtr="0">
             <a:noAutofit/>
           </a:bodyPr>
           <a:lstStyle/>
           <a:p>
-            <a:pPr indent="0" lvl="0" marL="0" rtl="0" algn="l">
+            <a:pPr marL="0" lvl="0" indent="0" algn="l" rtl="0">
               <a:spcBef>
                 <a:spcPts val="0"/>
               </a:spcBef>
@@ -7858,31 +7825,7 @@
                 <a:cs typeface="Archivo SemiBold"/>
                 <a:sym typeface="Archivo SemiBold"/>
               </a:rPr>
-              <a:t>&lt;&lt;</a:t>
-            </a:r>
-            <a:r>
-              <a:rPr lang="en" sz="2800">
-                <a:solidFill>
-                  <a:srgbClr val="FCBE41"/>
-                </a:solidFill>
-                <a:latin typeface="Archivo SemiBold"/>
-                <a:ea typeface="Archivo SemiBold"/>
-                <a:cs typeface="Archivo SemiBold"/>
-                <a:sym typeface="Archivo SemiBold"/>
-              </a:rPr>
-              <a:t>Aspecto 2</a:t>
-            </a:r>
-            <a:r>
-              <a:rPr lang="en" sz="2800">
-                <a:solidFill>
-                  <a:srgbClr val="FCBE41"/>
-                </a:solidFill>
-                <a:latin typeface="Archivo SemiBold"/>
-                <a:ea typeface="Archivo SemiBold"/>
-                <a:cs typeface="Archivo SemiBold"/>
-                <a:sym typeface="Archivo SemiBold"/>
-              </a:rPr>
-              <a:t>&gt;&gt;</a:t>
+              <a:t>&lt;&lt;Aspecto 2&gt;&gt;</a:t>
             </a:r>
             <a:endParaRPr sz="2800">
               <a:solidFill>
@@ -7895,7 +7838,7 @@
             </a:endParaRPr>
           </a:p>
           <a:p>
-            <a:pPr indent="0" lvl="0" marL="0" rtl="0" algn="l">
+            <a:pPr marL="0" lvl="0" indent="0" algn="l" rtl="0">
               <a:spcBef>
                 <a:spcPts val="0"/>
               </a:spcBef>
@@ -7904,9 +7847,6 @@
               </a:spcAft>
               <a:buNone/>
             </a:pPr>
-            <a:r>
-              <a:t/>
-            </a:r>
             <a:endParaRPr sz="2800">
               <a:solidFill>
                 <a:srgbClr val="FCBE41"/>
@@ -7939,12 +7879,12 @@
           </a:ln>
         </p:spPr>
         <p:txBody>
-          <a:bodyPr anchorCtr="0" anchor="t" bIns="91425" lIns="91425" spcFirstLastPara="1" rIns="91425" wrap="square" tIns="91425">
+          <a:bodyPr spcFirstLastPara="1" wrap="square" lIns="91425" tIns="91425" rIns="91425" bIns="91425" anchor="t" anchorCtr="0">
             <a:noAutofit/>
           </a:bodyPr>
           <a:lstStyle/>
           <a:p>
-            <a:pPr indent="0" lvl="0" marL="0" rtl="0" algn="l">
+            <a:pPr marL="0" lvl="0" indent="0" algn="l" rtl="0">
               <a:spcBef>
                 <a:spcPts val="0"/>
               </a:spcBef>
@@ -7963,31 +7903,7 @@
                 <a:cs typeface="Archivo SemiBold"/>
                 <a:sym typeface="Archivo SemiBold"/>
               </a:rPr>
-              <a:t>&lt;&lt;</a:t>
-            </a:r>
-            <a:r>
-              <a:rPr lang="en" sz="2800">
-                <a:solidFill>
-                  <a:srgbClr val="FCBE41"/>
-                </a:solidFill>
-                <a:latin typeface="Archivo SemiBold"/>
-                <a:ea typeface="Archivo SemiBold"/>
-                <a:cs typeface="Archivo SemiBold"/>
-                <a:sym typeface="Archivo SemiBold"/>
-              </a:rPr>
-              <a:t>Futuro 2</a:t>
-            </a:r>
-            <a:r>
-              <a:rPr lang="en" sz="2800">
-                <a:solidFill>
-                  <a:srgbClr val="FCBE41"/>
-                </a:solidFill>
-                <a:latin typeface="Archivo SemiBold"/>
-                <a:ea typeface="Archivo SemiBold"/>
-                <a:cs typeface="Archivo SemiBold"/>
-                <a:sym typeface="Archivo SemiBold"/>
-              </a:rPr>
-              <a:t>&gt;&gt;</a:t>
+              <a:t>&lt;&lt;Futuro 2&gt;&gt;</a:t>
             </a:r>
             <a:endParaRPr sz="2800">
               <a:solidFill>
@@ -8000,7 +7916,7 @@
             </a:endParaRPr>
           </a:p>
           <a:p>
-            <a:pPr indent="0" lvl="0" marL="0" rtl="0" algn="l">
+            <a:pPr marL="0" lvl="0" indent="0" algn="l" rtl="0">
               <a:spcBef>
                 <a:spcPts val="0"/>
               </a:spcBef>
@@ -8009,9 +7925,6 @@
               </a:spcAft>
               <a:buNone/>
             </a:pPr>
-            <a:r>
-              <a:t/>
-            </a:r>
             <a:endParaRPr sz="2800">
               <a:solidFill>
                 <a:srgbClr val="FCBE41"/>
@@ -8033,7 +7946,7 @@
 </file>
 
 <file path=ppt/slides/slide6.xml><?xml version="1.0" encoding="utf-8"?>
-<p:sld xmlns:a="http://schemas.openxmlformats.org/drawingml/2006/main" xmlns:r="http://schemas.openxmlformats.org/officeDocument/2006/relationships" xmlns:mc="http://schemas.openxmlformats.org/markup-compatibility/2006" xmlns:mv="urn:schemas-microsoft-com:mac:vml" xmlns:p="http://schemas.openxmlformats.org/presentationml/2006/main" xmlns:c="http://schemas.openxmlformats.org/drawingml/2006/chart" xmlns:dgm="http://schemas.openxmlformats.org/drawingml/2006/diagram" xmlns:o="urn:schemas-microsoft-com:office:office" xmlns:v="urn:schemas-microsoft-com:vml" xmlns:pvml="urn:schemas-microsoft-com:office:powerpoint" xmlns:com="http://schemas.openxmlformats.org/drawingml/2006/compatibility" xmlns:p14="http://schemas.microsoft.com/office/powerpoint/2010/main" xmlns:p15="http://schemas.microsoft.com/office/powerpoint/2012/main" xmlns:ahyp="http://schemas.microsoft.com/office/drawing/2018/hyperlinkcolor">
+<p:sld xmlns:a="http://schemas.openxmlformats.org/drawingml/2006/main" xmlns:r="http://schemas.openxmlformats.org/officeDocument/2006/relationships" xmlns:p="http://schemas.openxmlformats.org/presentationml/2006/main">
   <p:cSld>
     <p:bg>
       <p:bgPr>
@@ -8045,11 +7958,12 @@
             <a:fillRect/>
           </a:stretch>
         </a:blipFill>
+        <a:effectLst/>
       </p:bgPr>
     </p:bg>
     <p:spTree>
       <p:nvGrpSpPr>
-        <p:cNvPr id="83" name="Shape 83"/>
+        <p:cNvPr id="1" name="Shape 83"/>
         <p:cNvGrpSpPr/>
         <p:nvPr/>
       </p:nvGrpSpPr>
@@ -8081,12 +7995,12 @@
           </a:ln>
         </p:spPr>
         <p:txBody>
-          <a:bodyPr anchorCtr="0" anchor="t" bIns="91425" lIns="91425" spcFirstLastPara="1" rIns="91425" wrap="square" tIns="91425">
+          <a:bodyPr spcFirstLastPara="1" wrap="square" lIns="91425" tIns="91425" rIns="91425" bIns="91425" anchor="t" anchorCtr="0">
             <a:noAutofit/>
           </a:bodyPr>
           <a:lstStyle/>
           <a:p>
-            <a:pPr indent="0" lvl="0" marL="0" rtl="0" algn="l">
+            <a:pPr marL="0" lvl="0" indent="0" algn="l" rtl="0">
               <a:spcBef>
                 <a:spcPts val="0"/>
               </a:spcBef>
@@ -8105,31 +8019,7 @@
                 <a:cs typeface="Archivo Medium"/>
                 <a:sym typeface="Archivo Medium"/>
               </a:rPr>
-              <a:t>&lt;&lt;</a:t>
-            </a:r>
-            <a:r>
-              <a:rPr lang="en" sz="3000">
-                <a:solidFill>
-                  <a:schemeClr val="lt1"/>
-                </a:solidFill>
-                <a:latin typeface="Archivo Medium"/>
-                <a:ea typeface="Archivo Medium"/>
-                <a:cs typeface="Archivo Medium"/>
-                <a:sym typeface="Archivo Medium"/>
-              </a:rPr>
-              <a:t>Ficha tecnica Texto descriptivo 2</a:t>
-            </a:r>
-            <a:r>
-              <a:rPr lang="en" sz="3000">
-                <a:solidFill>
-                  <a:schemeClr val="lt1"/>
-                </a:solidFill>
-                <a:latin typeface="Archivo Medium"/>
-                <a:ea typeface="Archivo Medium"/>
-                <a:cs typeface="Archivo Medium"/>
-                <a:sym typeface="Archivo Medium"/>
-              </a:rPr>
-              <a:t>&gt;&gt;</a:t>
+              <a:t>&lt;&lt;Ficha tecnica Texto descriptivo 2&gt;&gt;</a:t>
             </a:r>
             <a:endParaRPr sz="3000">
               <a:solidFill>
@@ -8163,12 +8053,12 @@
           </a:ln>
         </p:spPr>
         <p:txBody>
-          <a:bodyPr anchorCtr="0" anchor="t" bIns="91425" lIns="91425" spcFirstLastPara="1" rIns="91425" wrap="square" tIns="91425">
+          <a:bodyPr spcFirstLastPara="1" wrap="square" lIns="91425" tIns="91425" rIns="91425" bIns="91425" anchor="t" anchorCtr="0">
             <a:noAutofit/>
           </a:bodyPr>
           <a:lstStyle/>
           <a:p>
-            <a:pPr indent="0" lvl="0" marL="0" rtl="0" algn="l">
+            <a:pPr marL="0" lvl="0" indent="0" algn="l" rtl="0">
               <a:spcBef>
                 <a:spcPts val="0"/>
               </a:spcBef>
@@ -8187,31 +8077,7 @@
                 <a:cs typeface="Archivo Medium"/>
                 <a:sym typeface="Archivo Medium"/>
               </a:rPr>
-              <a:t>&lt;&lt;</a:t>
-            </a:r>
-            <a:r>
-              <a:rPr lang="en" sz="2800">
-                <a:solidFill>
-                  <a:schemeClr val="lt1"/>
-                </a:solidFill>
-                <a:latin typeface="Archivo Medium"/>
-                <a:ea typeface="Archivo Medium"/>
-                <a:cs typeface="Archivo Medium"/>
-                <a:sym typeface="Archivo Medium"/>
-              </a:rPr>
-              <a:t>Ficha tecnica Área de estudio 2</a:t>
-            </a:r>
-            <a:r>
-              <a:rPr lang="en" sz="2800">
-                <a:solidFill>
-                  <a:schemeClr val="lt1"/>
-                </a:solidFill>
-                <a:latin typeface="Archivo Medium"/>
-                <a:ea typeface="Archivo Medium"/>
-                <a:cs typeface="Archivo Medium"/>
-                <a:sym typeface="Archivo Medium"/>
-              </a:rPr>
-              <a:t>&gt;&gt;</a:t>
+              <a:t>&lt;&lt;Ficha tecnica Área de estudio 2&gt;&gt;</a:t>
             </a:r>
             <a:endParaRPr sz="2800">
               <a:solidFill>
@@ -8224,7 +8090,7 @@
             </a:endParaRPr>
           </a:p>
           <a:p>
-            <a:pPr indent="0" lvl="0" marL="0" rtl="0" algn="l">
+            <a:pPr marL="0" lvl="0" indent="0" algn="l" rtl="0">
               <a:spcBef>
                 <a:spcPts val="0"/>
               </a:spcBef>
@@ -8233,9 +8099,6 @@
               </a:spcAft>
               <a:buNone/>
             </a:pPr>
-            <a:r>
-              <a:t/>
-            </a:r>
             <a:endParaRPr sz="2800">
               <a:solidFill>
                 <a:schemeClr val="lt1"/>
@@ -8268,12 +8131,12 @@
           </a:ln>
         </p:spPr>
         <p:txBody>
-          <a:bodyPr anchorCtr="0" anchor="t" bIns="91425" lIns="91425" spcFirstLastPara="1" rIns="91425" wrap="square" tIns="91425">
+          <a:bodyPr spcFirstLastPara="1" wrap="square" lIns="91425" tIns="91425" rIns="91425" bIns="91425" anchor="t" anchorCtr="0">
             <a:noAutofit/>
           </a:bodyPr>
           <a:lstStyle/>
           <a:p>
-            <a:pPr indent="0" lvl="0" marL="0" rtl="0" algn="l">
+            <a:pPr marL="0" lvl="0" indent="0" algn="l" rtl="0">
               <a:spcBef>
                 <a:spcPts val="0"/>
               </a:spcBef>
@@ -8292,31 +8155,7 @@
                 <a:cs typeface="Archivo Medium"/>
                 <a:sym typeface="Archivo Medium"/>
               </a:rPr>
-              <a:t>&lt;&lt;</a:t>
-            </a:r>
-            <a:r>
-              <a:rPr lang="en" sz="2800">
-                <a:solidFill>
-                  <a:schemeClr val="lt1"/>
-                </a:solidFill>
-                <a:latin typeface="Archivo Medium"/>
-                <a:ea typeface="Archivo Medium"/>
-                <a:cs typeface="Archivo Medium"/>
-                <a:sym typeface="Archivo Medium"/>
-              </a:rPr>
-              <a:t>Ficha tecnica Duración 2</a:t>
-            </a:r>
-            <a:r>
-              <a:rPr lang="en" sz="2800">
-                <a:solidFill>
-                  <a:schemeClr val="lt1"/>
-                </a:solidFill>
-                <a:latin typeface="Archivo Medium"/>
-                <a:ea typeface="Archivo Medium"/>
-                <a:cs typeface="Archivo Medium"/>
-                <a:sym typeface="Archivo Medium"/>
-              </a:rPr>
-              <a:t>&gt;&gt;</a:t>
+              <a:t>&lt;&lt;Ficha tecnica Duración 2&gt;&gt;</a:t>
             </a:r>
             <a:endParaRPr sz="2800">
               <a:solidFill>
@@ -8329,7 +8168,7 @@
             </a:endParaRPr>
           </a:p>
           <a:p>
-            <a:pPr indent="0" lvl="0" marL="0" rtl="0" algn="l">
+            <a:pPr marL="0" lvl="0" indent="0" algn="l" rtl="0">
               <a:spcBef>
                 <a:spcPts val="0"/>
               </a:spcBef>
@@ -8338,9 +8177,6 @@
               </a:spcAft>
               <a:buNone/>
             </a:pPr>
-            <a:r>
-              <a:t/>
-            </a:r>
             <a:endParaRPr sz="2800">
               <a:solidFill>
                 <a:schemeClr val="lt1"/>
@@ -8362,7 +8198,7 @@
 </file>
 
 <file path=ppt/slides/slide7.xml><?xml version="1.0" encoding="utf-8"?>
-<p:sld xmlns:a="http://schemas.openxmlformats.org/drawingml/2006/main" xmlns:r="http://schemas.openxmlformats.org/officeDocument/2006/relationships" xmlns:mc="http://schemas.openxmlformats.org/markup-compatibility/2006" xmlns:mv="urn:schemas-microsoft-com:mac:vml" xmlns:p="http://schemas.openxmlformats.org/presentationml/2006/main" xmlns:c="http://schemas.openxmlformats.org/drawingml/2006/chart" xmlns:dgm="http://schemas.openxmlformats.org/drawingml/2006/diagram" xmlns:o="urn:schemas-microsoft-com:office:office" xmlns:v="urn:schemas-microsoft-com:vml" xmlns:pvml="urn:schemas-microsoft-com:office:powerpoint" xmlns:com="http://schemas.openxmlformats.org/drawingml/2006/compatibility" xmlns:p14="http://schemas.microsoft.com/office/powerpoint/2010/main" xmlns:p15="http://schemas.microsoft.com/office/powerpoint/2012/main" xmlns:ahyp="http://schemas.microsoft.com/office/drawing/2018/hyperlinkcolor">
+<p:sld xmlns:a="http://schemas.openxmlformats.org/drawingml/2006/main" xmlns:r="http://schemas.openxmlformats.org/officeDocument/2006/relationships" xmlns:p="http://schemas.openxmlformats.org/presentationml/2006/main">
   <p:cSld>
     <p:bg>
       <p:bgPr>
@@ -8374,11 +8210,12 @@
             <a:fillRect/>
           </a:stretch>
         </a:blipFill>
+        <a:effectLst/>
       </p:bgPr>
     </p:bg>
     <p:spTree>
       <p:nvGrpSpPr>
-        <p:cNvPr id="90" name="Shape 90"/>
+        <p:cNvPr id="1" name="Shape 90"/>
         <p:cNvGrpSpPr/>
         <p:nvPr/>
       </p:nvGrpSpPr>
@@ -8410,12 +8247,12 @@
           </a:ln>
         </p:spPr>
         <p:txBody>
-          <a:bodyPr anchorCtr="0" anchor="t" bIns="91425" lIns="91425" spcFirstLastPara="1" rIns="91425" wrap="square" tIns="91425">
+          <a:bodyPr spcFirstLastPara="1" wrap="square" lIns="91425" tIns="91425" rIns="91425" bIns="91425" anchor="t" anchorCtr="0">
             <a:noAutofit/>
           </a:bodyPr>
           <a:lstStyle/>
           <a:p>
-            <a:pPr indent="0" lvl="0" marL="0" rtl="0" algn="l">
+            <a:pPr marL="0" lvl="0" indent="0" algn="l" rtl="0">
               <a:spcBef>
                 <a:spcPts val="0"/>
               </a:spcBef>
@@ -8425,7 +8262,7 @@
               <a:buNone/>
             </a:pPr>
             <a:r>
-              <a:rPr b="1" lang="en" sz="3400">
+              <a:rPr lang="en" sz="3400" b="1">
                 <a:solidFill>
                   <a:srgbClr val="FCBE41"/>
                 </a:solidFill>
@@ -8434,33 +8271,9 @@
                 <a:cs typeface="Archivo"/>
                 <a:sym typeface="Archivo"/>
               </a:rPr>
-              <a:t>&lt;&lt;</a:t>
+              <a:t>&lt;&lt;Carrera 3&gt;&gt;</a:t>
             </a:r>
-            <a:r>
-              <a:rPr b="1" lang="en" sz="3400">
-                <a:solidFill>
-                  <a:srgbClr val="FCBE41"/>
-                </a:solidFill>
-                <a:latin typeface="Archivo"/>
-                <a:ea typeface="Archivo"/>
-                <a:cs typeface="Archivo"/>
-                <a:sym typeface="Archivo"/>
-              </a:rPr>
-              <a:t>Carrera 3</a:t>
-            </a:r>
-            <a:r>
-              <a:rPr b="1" lang="en" sz="3400">
-                <a:solidFill>
-                  <a:srgbClr val="FCBE41"/>
-                </a:solidFill>
-                <a:latin typeface="Archivo"/>
-                <a:ea typeface="Archivo"/>
-                <a:cs typeface="Archivo"/>
-                <a:sym typeface="Archivo"/>
-              </a:rPr>
-              <a:t>&gt;&gt;</a:t>
-            </a:r>
-            <a:endParaRPr b="1" sz="3400">
+            <a:endParaRPr sz="3400" b="1">
               <a:solidFill>
                 <a:srgbClr val="FCBE41"/>
               </a:solidFill>
@@ -8471,7 +8284,7 @@
             </a:endParaRPr>
           </a:p>
           <a:p>
-            <a:pPr indent="0" lvl="0" marL="0" rtl="0" algn="l">
+            <a:pPr marL="0" lvl="0" indent="0" algn="l" rtl="0">
               <a:spcBef>
                 <a:spcPts val="0"/>
               </a:spcBef>
@@ -8480,10 +8293,7 @@
               </a:spcAft>
               <a:buNone/>
             </a:pPr>
-            <a:r>
-              <a:t/>
-            </a:r>
-            <a:endParaRPr b="1" sz="3400">
+            <a:endParaRPr sz="3400" b="1">
               <a:solidFill>
                 <a:srgbClr val="FCBE41"/>
               </a:solidFill>
@@ -8515,12 +8325,12 @@
           </a:ln>
         </p:spPr>
         <p:txBody>
-          <a:bodyPr anchorCtr="0" anchor="t" bIns="91425" lIns="91425" spcFirstLastPara="1" rIns="91425" wrap="square" tIns="91425">
+          <a:bodyPr spcFirstLastPara="1" wrap="square" lIns="91425" tIns="91425" rIns="91425" bIns="91425" anchor="t" anchorCtr="0">
             <a:noAutofit/>
           </a:bodyPr>
           <a:lstStyle/>
           <a:p>
-            <a:pPr indent="0" lvl="0" marL="0" rtl="0" algn="l">
+            <a:pPr marL="0" lvl="0" indent="0" algn="l" rtl="0">
               <a:spcBef>
                 <a:spcPts val="0"/>
               </a:spcBef>
@@ -8539,31 +8349,7 @@
                 <a:cs typeface="Archivo SemiBold"/>
                 <a:sym typeface="Archivo SemiBold"/>
               </a:rPr>
-              <a:t>&lt;&lt;</a:t>
-            </a:r>
-            <a:r>
-              <a:rPr lang="en" sz="2800">
-                <a:solidFill>
-                  <a:srgbClr val="FCBE41"/>
-                </a:solidFill>
-                <a:latin typeface="Archivo SemiBold"/>
-                <a:ea typeface="Archivo SemiBold"/>
-                <a:cs typeface="Archivo SemiBold"/>
-                <a:sym typeface="Archivo SemiBold"/>
-              </a:rPr>
-              <a:t>Aspecto 3</a:t>
-            </a:r>
-            <a:r>
-              <a:rPr lang="en" sz="2800">
-                <a:solidFill>
-                  <a:srgbClr val="FCBE41"/>
-                </a:solidFill>
-                <a:latin typeface="Archivo SemiBold"/>
-                <a:ea typeface="Archivo SemiBold"/>
-                <a:cs typeface="Archivo SemiBold"/>
-                <a:sym typeface="Archivo SemiBold"/>
-              </a:rPr>
-              <a:t>&gt;&gt;</a:t>
+              <a:t>&lt;&lt;Aspecto 3&gt;&gt;</a:t>
             </a:r>
             <a:endParaRPr sz="2800">
               <a:solidFill>
@@ -8576,7 +8362,7 @@
             </a:endParaRPr>
           </a:p>
           <a:p>
-            <a:pPr indent="0" lvl="0" marL="0" rtl="0" algn="l">
+            <a:pPr marL="0" lvl="0" indent="0" algn="l" rtl="0">
               <a:spcBef>
                 <a:spcPts val="0"/>
               </a:spcBef>
@@ -8585,9 +8371,6 @@
               </a:spcAft>
               <a:buNone/>
             </a:pPr>
-            <a:r>
-              <a:t/>
-            </a:r>
             <a:endParaRPr sz="2800">
               <a:solidFill>
                 <a:srgbClr val="FCBE41"/>
@@ -8620,12 +8403,12 @@
           </a:ln>
         </p:spPr>
         <p:txBody>
-          <a:bodyPr anchorCtr="0" anchor="t" bIns="91425" lIns="91425" spcFirstLastPara="1" rIns="91425" wrap="square" tIns="91425">
+          <a:bodyPr spcFirstLastPara="1" wrap="square" lIns="91425" tIns="91425" rIns="91425" bIns="91425" anchor="t" anchorCtr="0">
             <a:noAutofit/>
           </a:bodyPr>
           <a:lstStyle/>
           <a:p>
-            <a:pPr indent="0" lvl="0" marL="0" rtl="0" algn="l">
+            <a:pPr marL="0" lvl="0" indent="0" algn="l" rtl="0">
               <a:spcBef>
                 <a:spcPts val="0"/>
               </a:spcBef>
@@ -8644,31 +8427,7 @@
                 <a:cs typeface="Archivo SemiBold"/>
                 <a:sym typeface="Archivo SemiBold"/>
               </a:rPr>
-              <a:t>&lt;&lt;</a:t>
-            </a:r>
-            <a:r>
-              <a:rPr lang="en" sz="2800">
-                <a:solidFill>
-                  <a:srgbClr val="FCBE41"/>
-                </a:solidFill>
-                <a:latin typeface="Archivo SemiBold"/>
-                <a:ea typeface="Archivo SemiBold"/>
-                <a:cs typeface="Archivo SemiBold"/>
-                <a:sym typeface="Archivo SemiBold"/>
-              </a:rPr>
-              <a:t>Futuro 3</a:t>
-            </a:r>
-            <a:r>
-              <a:rPr lang="en" sz="2800">
-                <a:solidFill>
-                  <a:srgbClr val="FCBE41"/>
-                </a:solidFill>
-                <a:latin typeface="Archivo SemiBold"/>
-                <a:ea typeface="Archivo SemiBold"/>
-                <a:cs typeface="Archivo SemiBold"/>
-                <a:sym typeface="Archivo SemiBold"/>
-              </a:rPr>
-              <a:t>&gt;&gt;</a:t>
+              <a:t>&lt;&lt;Futuro 3&gt;&gt;</a:t>
             </a:r>
             <a:endParaRPr sz="2800">
               <a:solidFill>
@@ -8681,7 +8440,7 @@
             </a:endParaRPr>
           </a:p>
           <a:p>
-            <a:pPr indent="0" lvl="0" marL="0" rtl="0" algn="l">
+            <a:pPr marL="0" lvl="0" indent="0" algn="l" rtl="0">
               <a:spcBef>
                 <a:spcPts val="0"/>
               </a:spcBef>
@@ -8690,9 +8449,6 @@
               </a:spcAft>
               <a:buNone/>
             </a:pPr>
-            <a:r>
-              <a:t/>
-            </a:r>
             <a:endParaRPr sz="2800">
               <a:solidFill>
                 <a:srgbClr val="FCBE41"/>
@@ -8714,7 +8470,7 @@
 </file>
 
 <file path=ppt/slides/slide8.xml><?xml version="1.0" encoding="utf-8"?>
-<p:sld xmlns:a="http://schemas.openxmlformats.org/drawingml/2006/main" xmlns:r="http://schemas.openxmlformats.org/officeDocument/2006/relationships" xmlns:mc="http://schemas.openxmlformats.org/markup-compatibility/2006" xmlns:mv="urn:schemas-microsoft-com:mac:vml" xmlns:p="http://schemas.openxmlformats.org/presentationml/2006/main" xmlns:c="http://schemas.openxmlformats.org/drawingml/2006/chart" xmlns:dgm="http://schemas.openxmlformats.org/drawingml/2006/diagram" xmlns:o="urn:schemas-microsoft-com:office:office" xmlns:v="urn:schemas-microsoft-com:vml" xmlns:pvml="urn:schemas-microsoft-com:office:powerpoint" xmlns:com="http://schemas.openxmlformats.org/drawingml/2006/compatibility" xmlns:p14="http://schemas.microsoft.com/office/powerpoint/2010/main" xmlns:p15="http://schemas.microsoft.com/office/powerpoint/2012/main" xmlns:ahyp="http://schemas.microsoft.com/office/drawing/2018/hyperlinkcolor">
+<p:sld xmlns:a="http://schemas.openxmlformats.org/drawingml/2006/main" xmlns:r="http://schemas.openxmlformats.org/officeDocument/2006/relationships" xmlns:p="http://schemas.openxmlformats.org/presentationml/2006/main">
   <p:cSld>
     <p:bg>
       <p:bgPr>
@@ -8726,11 +8482,12 @@
             <a:fillRect/>
           </a:stretch>
         </a:blipFill>
+        <a:effectLst/>
       </p:bgPr>
     </p:bg>
     <p:spTree>
       <p:nvGrpSpPr>
-        <p:cNvPr id="97" name="Shape 97"/>
+        <p:cNvPr id="1" name="Shape 97"/>
         <p:cNvGrpSpPr/>
         <p:nvPr/>
       </p:nvGrpSpPr>
@@ -8762,12 +8519,12 @@
           </a:ln>
         </p:spPr>
         <p:txBody>
-          <a:bodyPr anchorCtr="0" anchor="t" bIns="91425" lIns="91425" spcFirstLastPara="1" rIns="91425" wrap="square" tIns="91425">
+          <a:bodyPr spcFirstLastPara="1" wrap="square" lIns="91425" tIns="91425" rIns="91425" bIns="91425" anchor="t" anchorCtr="0">
             <a:noAutofit/>
           </a:bodyPr>
           <a:lstStyle/>
           <a:p>
-            <a:pPr indent="0" lvl="0" marL="0" rtl="0" algn="l">
+            <a:pPr marL="0" lvl="0" indent="0" algn="l" rtl="0">
               <a:spcBef>
                 <a:spcPts val="0"/>
               </a:spcBef>
@@ -8786,31 +8543,7 @@
                 <a:cs typeface="Archivo Medium"/>
                 <a:sym typeface="Archivo Medium"/>
               </a:rPr>
-              <a:t>&lt;&lt;</a:t>
-            </a:r>
-            <a:r>
-              <a:rPr lang="en" sz="3000">
-                <a:solidFill>
-                  <a:schemeClr val="lt1"/>
-                </a:solidFill>
-                <a:latin typeface="Archivo Medium"/>
-                <a:ea typeface="Archivo Medium"/>
-                <a:cs typeface="Archivo Medium"/>
-                <a:sym typeface="Archivo Medium"/>
-              </a:rPr>
-              <a:t>Ficha tecnica Texto descriptivo 3</a:t>
-            </a:r>
-            <a:r>
-              <a:rPr lang="en" sz="3000">
-                <a:solidFill>
-                  <a:schemeClr val="lt1"/>
-                </a:solidFill>
-                <a:latin typeface="Archivo Medium"/>
-                <a:ea typeface="Archivo Medium"/>
-                <a:cs typeface="Archivo Medium"/>
-                <a:sym typeface="Archivo Medium"/>
-              </a:rPr>
-              <a:t>&gt;&gt;</a:t>
+              <a:t>&lt;&lt;Ficha tecnica Texto descriptivo 3&gt;&gt;</a:t>
             </a:r>
             <a:endParaRPr sz="3000">
               <a:solidFill>
@@ -8844,12 +8577,12 @@
           </a:ln>
         </p:spPr>
         <p:txBody>
-          <a:bodyPr anchorCtr="0" anchor="t" bIns="91425" lIns="91425" spcFirstLastPara="1" rIns="91425" wrap="square" tIns="91425">
+          <a:bodyPr spcFirstLastPara="1" wrap="square" lIns="91425" tIns="91425" rIns="91425" bIns="91425" anchor="t" anchorCtr="0">
             <a:noAutofit/>
           </a:bodyPr>
           <a:lstStyle/>
           <a:p>
-            <a:pPr indent="0" lvl="0" marL="0" rtl="0" algn="l">
+            <a:pPr marL="0" lvl="0" indent="0" algn="l" rtl="0">
               <a:spcBef>
                 <a:spcPts val="0"/>
               </a:spcBef>
@@ -8868,31 +8601,7 @@
                 <a:cs typeface="Archivo Medium"/>
                 <a:sym typeface="Archivo Medium"/>
               </a:rPr>
-              <a:t>&lt;&lt;</a:t>
-            </a:r>
-            <a:r>
-              <a:rPr lang="en" sz="2800">
-                <a:solidFill>
-                  <a:schemeClr val="lt1"/>
-                </a:solidFill>
-                <a:latin typeface="Archivo Medium"/>
-                <a:ea typeface="Archivo Medium"/>
-                <a:cs typeface="Archivo Medium"/>
-                <a:sym typeface="Archivo Medium"/>
-              </a:rPr>
-              <a:t>Ficha tecnica Área de estudio 3</a:t>
-            </a:r>
-            <a:r>
-              <a:rPr lang="en" sz="2800">
-                <a:solidFill>
-                  <a:schemeClr val="lt1"/>
-                </a:solidFill>
-                <a:latin typeface="Archivo Medium"/>
-                <a:ea typeface="Archivo Medium"/>
-                <a:cs typeface="Archivo Medium"/>
-                <a:sym typeface="Archivo Medium"/>
-              </a:rPr>
-              <a:t>&gt;&gt;</a:t>
+              <a:t>&lt;&lt;Ficha tecnica Área de estudio 3&gt;&gt;</a:t>
             </a:r>
             <a:endParaRPr sz="2800">
               <a:solidFill>
@@ -8905,7 +8614,7 @@
             </a:endParaRPr>
           </a:p>
           <a:p>
-            <a:pPr indent="0" lvl="0" marL="0" rtl="0" algn="l">
+            <a:pPr marL="0" lvl="0" indent="0" algn="l" rtl="0">
               <a:spcBef>
                 <a:spcPts val="0"/>
               </a:spcBef>
@@ -8914,9 +8623,6 @@
               </a:spcAft>
               <a:buNone/>
             </a:pPr>
-            <a:r>
-              <a:t/>
-            </a:r>
             <a:endParaRPr sz="2800">
               <a:solidFill>
                 <a:schemeClr val="lt1"/>
@@ -8949,12 +8655,12 @@
           </a:ln>
         </p:spPr>
         <p:txBody>
-          <a:bodyPr anchorCtr="0" anchor="t" bIns="91425" lIns="91425" spcFirstLastPara="1" rIns="91425" wrap="square" tIns="91425">
+          <a:bodyPr spcFirstLastPara="1" wrap="square" lIns="91425" tIns="91425" rIns="91425" bIns="91425" anchor="t" anchorCtr="0">
             <a:noAutofit/>
           </a:bodyPr>
           <a:lstStyle/>
           <a:p>
-            <a:pPr indent="0" lvl="0" marL="0" rtl="0" algn="l">
+            <a:pPr marL="0" lvl="0" indent="0" algn="l" rtl="0">
               <a:spcBef>
                 <a:spcPts val="0"/>
               </a:spcBef>
@@ -8973,31 +8679,7 @@
                 <a:cs typeface="Archivo Medium"/>
                 <a:sym typeface="Archivo Medium"/>
               </a:rPr>
-              <a:t>&lt;&lt;</a:t>
-            </a:r>
-            <a:r>
-              <a:rPr lang="en" sz="2800">
-                <a:solidFill>
-                  <a:schemeClr val="lt1"/>
-                </a:solidFill>
-                <a:latin typeface="Archivo Medium"/>
-                <a:ea typeface="Archivo Medium"/>
-                <a:cs typeface="Archivo Medium"/>
-                <a:sym typeface="Archivo Medium"/>
-              </a:rPr>
-              <a:t>Ficha tecnica Duración 3</a:t>
-            </a:r>
-            <a:r>
-              <a:rPr lang="en" sz="2800">
-                <a:solidFill>
-                  <a:schemeClr val="lt1"/>
-                </a:solidFill>
-                <a:latin typeface="Archivo Medium"/>
-                <a:ea typeface="Archivo Medium"/>
-                <a:cs typeface="Archivo Medium"/>
-                <a:sym typeface="Archivo Medium"/>
-              </a:rPr>
-              <a:t>&gt;&gt;</a:t>
+              <a:t>&lt;&lt;Ficha tecnica Duración 3&gt;&gt;</a:t>
             </a:r>
             <a:endParaRPr sz="2800">
               <a:solidFill>
@@ -9010,7 +8692,7 @@
             </a:endParaRPr>
           </a:p>
           <a:p>
-            <a:pPr indent="0" lvl="0" marL="0" rtl="0" algn="l">
+            <a:pPr marL="0" lvl="0" indent="0" algn="l" rtl="0">
               <a:spcBef>
                 <a:spcPts val="0"/>
               </a:spcBef>
@@ -9019,9 +8701,6 @@
               </a:spcAft>
               <a:buNone/>
             </a:pPr>
-            <a:r>
-              <a:t/>
-            </a:r>
             <a:endParaRPr sz="2800">
               <a:solidFill>
                 <a:schemeClr val="lt1"/>
@@ -9043,7 +8722,7 @@
 </file>
 
 <file path=ppt/slides/slide9.xml><?xml version="1.0" encoding="utf-8"?>
-<p:sld xmlns:a="http://schemas.openxmlformats.org/drawingml/2006/main" xmlns:r="http://schemas.openxmlformats.org/officeDocument/2006/relationships" xmlns:mc="http://schemas.openxmlformats.org/markup-compatibility/2006" xmlns:mv="urn:schemas-microsoft-com:mac:vml" xmlns:p="http://schemas.openxmlformats.org/presentationml/2006/main" xmlns:c="http://schemas.openxmlformats.org/drawingml/2006/chart" xmlns:dgm="http://schemas.openxmlformats.org/drawingml/2006/diagram" xmlns:o="urn:schemas-microsoft-com:office:office" xmlns:v="urn:schemas-microsoft-com:vml" xmlns:pvml="urn:schemas-microsoft-com:office:powerpoint" xmlns:com="http://schemas.openxmlformats.org/drawingml/2006/compatibility" xmlns:p14="http://schemas.microsoft.com/office/powerpoint/2010/main" xmlns:p15="http://schemas.microsoft.com/office/powerpoint/2012/main" xmlns:ahyp="http://schemas.microsoft.com/office/drawing/2018/hyperlinkcolor">
+<p:sld xmlns:a="http://schemas.openxmlformats.org/drawingml/2006/main" xmlns:r="http://schemas.openxmlformats.org/officeDocument/2006/relationships" xmlns:p="http://schemas.openxmlformats.org/presentationml/2006/main">
   <p:cSld>
     <p:bg>
       <p:bgPr>
@@ -9055,11 +8734,12 @@
             <a:fillRect/>
           </a:stretch>
         </a:blipFill>
+        <a:effectLst/>
       </p:bgPr>
     </p:bg>
     <p:spTree>
       <p:nvGrpSpPr>
-        <p:cNvPr id="104" name="Shape 104"/>
+        <p:cNvPr id="1" name="Shape 104"/>
         <p:cNvGrpSpPr/>
         <p:nvPr/>
       </p:nvGrpSpPr>
@@ -9080,7 +8760,7 @@
 </file>
 
 <file path=ppt/theme/theme1.xml><?xml version="1.0" encoding="utf-8"?>
-<a:theme xmlns:a="http://schemas.openxmlformats.org/drawingml/2006/main" xmlns:r="http://schemas.openxmlformats.org/officeDocument/2006/relationships" name="Simple Light">
+<a:theme xmlns:a="http://schemas.openxmlformats.org/drawingml/2006/main" name="Simple Light">
   <a:themeElements>
     <a:clrScheme name="Simple Light">
       <a:dk1>
@@ -9355,11 +9035,13 @@
       </a:bgFillStyleLst>
     </a:fmtScheme>
   </a:themeElements>
+  <a:objectDefaults/>
+  <a:extraClrSchemeLst/>
 </a:theme>
 </file>
 
 <file path=ppt/theme/theme2.xml><?xml version="1.0" encoding="utf-8"?>
-<a:theme xmlns:a="http://schemas.openxmlformats.org/drawingml/2006/main" xmlns:r="http://schemas.openxmlformats.org/officeDocument/2006/relationships">
+<a:theme xmlns:a="http://schemas.openxmlformats.org/drawingml/2006/main">
   <a:themeElements>
     <a:clrScheme name="Default">
       <a:dk1>
@@ -9634,5 +9316,7 @@
       </a:bgFillStyleLst>
     </a:fmtScheme>
   </a:themeElements>
+  <a:objectDefaults/>
+  <a:extraClrSchemeLst/>
 </a:theme>
 </file>
--- a/assets/template_que_estudiar.pptx
+++ b/assets/template_que_estudiar.pptx
@@ -763,8 +763,8 @@
         </p:nvSpPr>
         <p:spPr>
           <a:xfrm>
-            <a:off x="2464919" y="685800"/>
-            <a:ext cx="1928700" cy="3429000"/>
+            <a:off x="2465388" y="685800"/>
+            <a:ext cx="1928812" cy="3429000"/>
           </a:xfrm>
           <a:custGeom>
             <a:avLst/>
@@ -6692,7 +6692,7 @@
               <a:buNone/>
             </a:pPr>
             <a:r>
-              <a:rPr lang="en" sz="3600" b="1">
+              <a:rPr lang="en" sz="3600" b="1" dirty="0">
                 <a:solidFill>
                   <a:srgbClr val="FFFFFF"/>
                 </a:solidFill>
@@ -6701,9 +6701,9 @@
                 <a:cs typeface="Archivo"/>
                 <a:sym typeface="Archivo"/>
               </a:rPr>
-              <a:t>&lt;&lt;NOMBRE COMPLETO&gt;&gt;</a:t>
+              <a:t>&lt;&lt;Nombre y Apellido&gt;&gt;</a:t>
             </a:r>
-            <a:endParaRPr sz="3600" b="1">
+            <a:endParaRPr sz="3600" b="1" dirty="0">
               <a:solidFill>
                 <a:srgbClr val="FFFFFF"/>
               </a:solidFill>
